--- a/output/wordlabs-develop-3day.pptx
+++ b/output/wordlabs-develop-3day.pptx
@@ -4240,7 +4240,7 @@
                 <a:ea typeface="Calibri" pitchFamily="34" charset="-122"/>
                 <a:cs typeface="Calibri" pitchFamily="34" charset="-120"/>
               </a:rPr>
-              <a:t>"to grow or build up"</a:t>
+              <a:t>"to grow or unfold gradually"</a:t>
             </a:r>
             <a:endParaRPr lang="en-US" sz="2200" dirty="0"/>
           </a:p>
@@ -4279,7 +4279,7 @@
                 <a:ea typeface="Calibri" pitchFamily="34" charset="-122"/>
                 <a:cs typeface="Calibri" pitchFamily="34" charset="-120"/>
               </a:rPr>
-              <a:t>Origin: French: développer</a:t>
+              <a:t>Origin: Latin: de + volvere</a:t>
             </a:r>
             <a:endParaRPr lang="en-US" sz="1300" dirty="0"/>
           </a:p>
@@ -5288,7 +5288,7 @@
                 <a:ea typeface="Calibri" pitchFamily="34" charset="-122"/>
                 <a:cs typeface="Calibri" pitchFamily="34" charset="-120"/>
               </a:rPr>
-              <a:t>Word Labs  •  wordlabs.app  •  Root: 'develop' = to grow or build up</a:t>
+              <a:t>Word Labs  •  wordlabs.app  •  Root: 'develop' = to grow or unfold gradually</a:t>
             </a:r>
             <a:endParaRPr lang="en-US" sz="800" dirty="0"/>
           </a:p>
@@ -5928,7 +5928,7 @@
                 <a:ea typeface="Calibri" pitchFamily="34" charset="-122"/>
                 <a:cs typeface="Calibri" pitchFamily="34" charset="-120"/>
               </a:rPr>
-              <a:t>Word Labs  •  wordlabs.app  •  Root: 'develop' = to grow or build up</a:t>
+              <a:t>Word Labs  •  wordlabs.app  •  Root: 'develop' = to grow or unfold gradually</a:t>
             </a:r>
             <a:endParaRPr lang="en-US" sz="800" dirty="0"/>
           </a:p>
@@ -6040,7 +6040,7 @@
                 <a:ea typeface="Calibri" pitchFamily="34" charset="-122"/>
                 <a:cs typeface="Calibri" pitchFamily="34" charset="-120"/>
               </a:rPr>
-              <a:t>The </a:t>
+              <a:t>The young </a:t>
             </a:r>
             <a:pPr algn="l" indent="0" marL="0">
               <a:buNone/>
@@ -6057,7 +6057,7 @@
                 <a:ea typeface="Calibri" pitchFamily="34" charset="-122"/>
                 <a:cs typeface="Calibri" pitchFamily="34" charset="-120"/>
               </a:rPr>
-              <a:t>development</a:t>
+              <a:t>developer</a:t>
             </a:r>
             <a:pPr algn="l" indent="0" marL="0">
               <a:buNone/>
@@ -6071,7 +6071,7 @@
                 <a:ea typeface="Calibri" pitchFamily="34" charset="-122"/>
                 <a:cs typeface="Calibri" pitchFamily="34" charset="-120"/>
               </a:rPr>
-              <a:t> of the new park was exciting, and the </a:t>
+              <a:t> worked hard to create an exciting game, showing incredible </a:t>
             </a:r>
             <a:pPr algn="l" indent="0" marL="0">
               <a:buNone/>
@@ -6088,7 +6088,7 @@
                 <a:ea typeface="Calibri" pitchFamily="34" charset="-122"/>
                 <a:cs typeface="Calibri" pitchFamily="34" charset="-120"/>
               </a:rPr>
-              <a:t>developer</a:t>
+              <a:t>development</a:t>
             </a:r>
             <a:pPr algn="l" indent="0" marL="0">
               <a:buNone/>
@@ -6102,7 +6102,7 @@
                 <a:ea typeface="Calibri" pitchFamily="34" charset="-122"/>
                 <a:cs typeface="Calibri" pitchFamily="34" charset="-120"/>
               </a:rPr>
-              <a:t> promised it would be finished by summer.</a:t>
+              <a:t> along the way.</a:t>
             </a:r>
             <a:endParaRPr lang="en-US" sz="1800" dirty="0"/>
           </a:p>
@@ -6257,7 +6257,7 @@
                 <a:ea typeface="Trebuchet MS" pitchFamily="34" charset="-122"/>
                 <a:cs typeface="Trebuchet MS" pitchFamily="34" charset="-120"/>
               </a:rPr>
-              <a:t>development</a:t>
+              <a:t>developer</a:t>
             </a:r>
             <a:endParaRPr lang="en-US" sz="1400" dirty="0"/>
           </a:p>
@@ -6385,7 +6385,7 @@
                 <a:ea typeface="Trebuchet MS" pitchFamily="34" charset="-122"/>
                 <a:cs typeface="Trebuchet MS" pitchFamily="34" charset="-120"/>
               </a:rPr>
-              <a:t>developer</a:t>
+              <a:t>development</a:t>
             </a:r>
             <a:endParaRPr lang="en-US" sz="1400" dirty="0"/>
           </a:p>
@@ -6716,7 +6716,7 @@
                 <a:ea typeface="Calibri" pitchFamily="34" charset="-122"/>
                 <a:cs typeface="Calibri" pitchFamily="34" charset="-120"/>
               </a:rPr>
-              <a:t>Word Labs  •  wordlabs.app  •  Root: 'develop' = to grow or build up</a:t>
+              <a:t>Word Labs  •  wordlabs.app  •  Root: 'develop' = to grow or unfold gradually</a:t>
             </a:r>
             <a:endParaRPr lang="en-US" sz="800" dirty="0"/>
           </a:p>
@@ -6855,7 +6855,7 @@
                 <a:ea typeface="Trebuchet MS" pitchFamily="34" charset="-122"/>
                 <a:cs typeface="Trebuchet MS" pitchFamily="34" charset="-120"/>
               </a:rPr>
-              <a:t>development</a:t>
+              <a:t>developer</a:t>
             </a:r>
             <a:endParaRPr lang="en-US" sz="2800" dirty="0"/>
           </a:p>
@@ -7543,7 +7543,7 @@
                 <a:ea typeface="Calibri" pitchFamily="34" charset="-122"/>
                 <a:cs typeface="Calibri" pitchFamily="34" charset="-120"/>
               </a:rPr>
-              <a:t>Word Labs  •  wordlabs.app  •  Root: 'develop' = to grow or build up</a:t>
+              <a:t>Word Labs  •  wordlabs.app  •  Root: 'develop' = to grow or unfold gradually</a:t>
             </a:r>
             <a:endParaRPr lang="en-US" sz="800" dirty="0"/>
           </a:p>
@@ -7682,7 +7682,7 @@
                 <a:ea typeface="Trebuchet MS" pitchFamily="34" charset="-122"/>
                 <a:cs typeface="Trebuchet MS" pitchFamily="34" charset="-120"/>
               </a:rPr>
-              <a:t>development</a:t>
+              <a:t>developer</a:t>
             </a:r>
             <a:endParaRPr lang="en-US" sz="2800" dirty="0"/>
           </a:p>
@@ -7860,7 +7860,7 @@
                 <a:ea typeface="Calibri" pitchFamily="34" charset="-122"/>
                 <a:cs typeface="Calibri" pitchFamily="34" charset="-120"/>
               </a:rPr>
-              <a:t>to grow or build up</a:t>
+              <a:t>to grow or build gradually</a:t>
             </a:r>
             <a:endParaRPr lang="en-US" sz="850" dirty="0"/>
           </a:p>
@@ -7933,7 +7933,7 @@
                 <a:ea typeface="Trebuchet MS" pitchFamily="34" charset="-122"/>
                 <a:cs typeface="Trebuchet MS" pitchFamily="34" charset="-120"/>
               </a:rPr>
-              <a:t>ment</a:t>
+              <a:t>er</a:t>
             </a:r>
             <a:endParaRPr lang="en-US" sz="1300" dirty="0"/>
           </a:p>
@@ -7972,7 +7972,7 @@
                 <a:ea typeface="Calibri" pitchFamily="34" charset="-122"/>
                 <a:cs typeface="Calibri" pitchFamily="34" charset="-120"/>
               </a:rPr>
-              <a:t>result or process of</a:t>
+              <a:t>a person who does something</a:t>
             </a:r>
             <a:endParaRPr lang="en-US" sz="850" dirty="0"/>
           </a:p>
@@ -8528,7 +8528,7 @@
                 <a:ea typeface="Calibri" pitchFamily="34" charset="-122"/>
                 <a:cs typeface="Calibri" pitchFamily="34" charset="-120"/>
               </a:rPr>
-              <a:t>Word Labs  •  wordlabs.app  •  Root: 'develop' = to grow or build up</a:t>
+              <a:t>Word Labs  •  wordlabs.app  •  Root: 'develop' = to grow or unfold gradually</a:t>
             </a:r>
             <a:endParaRPr lang="en-US" sz="800" dirty="0"/>
           </a:p>
@@ -8667,7 +8667,7 @@
                 <a:ea typeface="Trebuchet MS" pitchFamily="34" charset="-122"/>
                 <a:cs typeface="Trebuchet MS" pitchFamily="34" charset="-120"/>
               </a:rPr>
-              <a:t>development</a:t>
+              <a:t>developer</a:t>
             </a:r>
             <a:endParaRPr lang="en-US" sz="2800" dirty="0"/>
           </a:p>
@@ -8845,7 +8845,7 @@
                 <a:ea typeface="Calibri" pitchFamily="34" charset="-122"/>
                 <a:cs typeface="Calibri" pitchFamily="34" charset="-120"/>
               </a:rPr>
-              <a:t>to grow or build up</a:t>
+              <a:t>to grow or build gradually</a:t>
             </a:r>
             <a:endParaRPr lang="en-US" sz="850" dirty="0"/>
           </a:p>
@@ -8918,7 +8918,7 @@
                 <a:ea typeface="Trebuchet MS" pitchFamily="34" charset="-122"/>
                 <a:cs typeface="Trebuchet MS" pitchFamily="34" charset="-120"/>
               </a:rPr>
-              <a:t>ment</a:t>
+              <a:t>er</a:t>
             </a:r>
             <a:endParaRPr lang="en-US" sz="1300" dirty="0"/>
           </a:p>
@@ -8957,7 +8957,7 @@
                 <a:ea typeface="Calibri" pitchFamily="34" charset="-122"/>
                 <a:cs typeface="Calibri" pitchFamily="34" charset="-120"/>
               </a:rPr>
-              <a:t>result or process of</a:t>
+              <a:t>a person who does something</a:t>
             </a:r>
             <a:endParaRPr lang="en-US" sz="850" dirty="0"/>
           </a:p>
@@ -9431,7 +9431,7 @@
                 <a:ea typeface="Trebuchet MS" pitchFamily="34" charset="-122"/>
                 <a:cs typeface="Trebuchet MS" pitchFamily="34" charset="-120"/>
               </a:rPr>
-              <a:t>ment</a:t>
+              <a:t>er</a:t>
             </a:r>
             <a:endParaRPr lang="en-US" sz="1400" dirty="0"/>
           </a:p>
@@ -9855,7 +9855,7 @@
                 <a:ea typeface="Calibri" pitchFamily="34" charset="-122"/>
                 <a:cs typeface="Calibri" pitchFamily="34" charset="-120"/>
               </a:rPr>
-              <a:t>Word Labs  •  wordlabs.app  •  Root: 'develop' = to grow or build up</a:t>
+              <a:t>Word Labs  •  wordlabs.app  •  Root: 'develop' = to grow or unfold gradually</a:t>
             </a:r>
             <a:endParaRPr lang="en-US" sz="800" dirty="0"/>
           </a:p>
@@ -9994,7 +9994,7 @@
                 <a:ea typeface="Trebuchet MS" pitchFamily="34" charset="-122"/>
                 <a:cs typeface="Trebuchet MS" pitchFamily="34" charset="-120"/>
               </a:rPr>
-              <a:t>development</a:t>
+              <a:t>developer</a:t>
             </a:r>
             <a:endParaRPr lang="en-US" sz="2800" dirty="0"/>
           </a:p>
@@ -10172,7 +10172,7 @@
                 <a:ea typeface="Calibri" pitchFamily="34" charset="-122"/>
                 <a:cs typeface="Calibri" pitchFamily="34" charset="-120"/>
               </a:rPr>
-              <a:t>to grow or build up</a:t>
+              <a:t>to grow or build gradually</a:t>
             </a:r>
             <a:endParaRPr lang="en-US" sz="850" dirty="0"/>
           </a:p>
@@ -10245,7 +10245,7 @@
                 <a:ea typeface="Trebuchet MS" pitchFamily="34" charset="-122"/>
                 <a:cs typeface="Trebuchet MS" pitchFamily="34" charset="-120"/>
               </a:rPr>
-              <a:t>ment</a:t>
+              <a:t>er</a:t>
             </a:r>
             <a:endParaRPr lang="en-US" sz="1300" dirty="0"/>
           </a:p>
@@ -10284,7 +10284,7 @@
                 <a:ea typeface="Calibri" pitchFamily="34" charset="-122"/>
                 <a:cs typeface="Calibri" pitchFamily="34" charset="-120"/>
               </a:rPr>
-              <a:t>result or process of</a:t>
+              <a:t>a person who does something</a:t>
             </a:r>
             <a:endParaRPr lang="en-US" sz="850" dirty="0"/>
           </a:p>
@@ -10758,7 +10758,7 @@
                 <a:ea typeface="Trebuchet MS" pitchFamily="34" charset="-122"/>
                 <a:cs typeface="Trebuchet MS" pitchFamily="34" charset="-120"/>
               </a:rPr>
-              <a:t>ment</a:t>
+              <a:t>er</a:t>
             </a:r>
             <a:endParaRPr lang="en-US" sz="1400" dirty="0"/>
           </a:p>
@@ -10865,8 +10865,8 @@
         </p:nvSpPr>
         <p:spPr>
           <a:xfrm>
-            <a:off x="1952244" y="4169664"/>
-            <a:ext cx="543652" cy="475488"/>
+            <a:off x="2023872" y="4169664"/>
+            <a:ext cx="685800" cy="475488"/>
           </a:xfrm>
           <a:prstGeom prst="rect">
             <a:avLst>
@@ -10892,8 +10892,8 @@
         </p:nvSpPr>
         <p:spPr>
           <a:xfrm>
-            <a:off x="1952244" y="4169664"/>
-            <a:ext cx="543652" cy="475488"/>
+            <a:off x="2023872" y="4169664"/>
+            <a:ext cx="685800" cy="475488"/>
           </a:xfrm>
           <a:prstGeom prst="rect">
             <a:avLst/>
@@ -10931,8 +10931,8 @@
         </p:nvSpPr>
         <p:spPr>
           <a:xfrm>
-            <a:off x="2546188" y="4169664"/>
-            <a:ext cx="543652" cy="475488"/>
+            <a:off x="2831592" y="4169664"/>
+            <a:ext cx="685800" cy="475488"/>
           </a:xfrm>
           <a:prstGeom prst="rect">
             <a:avLst>
@@ -10958,8 +10958,8 @@
         </p:nvSpPr>
         <p:spPr>
           <a:xfrm>
-            <a:off x="2546188" y="4169664"/>
-            <a:ext cx="543652" cy="475488"/>
+            <a:off x="2831592" y="4169664"/>
+            <a:ext cx="685800" cy="475488"/>
           </a:xfrm>
           <a:prstGeom prst="rect">
             <a:avLst/>
@@ -10997,8 +10997,8 @@
         </p:nvSpPr>
         <p:spPr>
           <a:xfrm>
-            <a:off x="3140133" y="4169664"/>
-            <a:ext cx="543652" cy="475488"/>
+            <a:off x="3639312" y="4169664"/>
+            <a:ext cx="685800" cy="475488"/>
           </a:xfrm>
           <a:prstGeom prst="rect">
             <a:avLst>
@@ -11024,8 +11024,8 @@
         </p:nvSpPr>
         <p:spPr>
           <a:xfrm>
-            <a:off x="3140133" y="4169664"/>
-            <a:ext cx="543652" cy="475488"/>
+            <a:off x="3639312" y="4169664"/>
+            <a:ext cx="685800" cy="475488"/>
           </a:xfrm>
           <a:prstGeom prst="rect">
             <a:avLst/>
@@ -11063,8 +11063,8 @@
         </p:nvSpPr>
         <p:spPr>
           <a:xfrm>
-            <a:off x="3734077" y="4169664"/>
-            <a:ext cx="543652" cy="475488"/>
+            <a:off x="4447032" y="4169664"/>
+            <a:ext cx="685800" cy="475488"/>
           </a:xfrm>
           <a:prstGeom prst="rect">
             <a:avLst>
@@ -11090,8 +11090,8 @@
         </p:nvSpPr>
         <p:spPr>
           <a:xfrm>
-            <a:off x="3734077" y="4169664"/>
-            <a:ext cx="543652" cy="475488"/>
+            <a:off x="4447032" y="4169664"/>
+            <a:ext cx="685800" cy="475488"/>
           </a:xfrm>
           <a:prstGeom prst="rect">
             <a:avLst/>
@@ -11129,8 +11129,8 @@
         </p:nvSpPr>
         <p:spPr>
           <a:xfrm>
-            <a:off x="4328021" y="4169664"/>
-            <a:ext cx="543652" cy="475488"/>
+            <a:off x="5254752" y="4169664"/>
+            <a:ext cx="685800" cy="475488"/>
           </a:xfrm>
           <a:prstGeom prst="rect">
             <a:avLst>
@@ -11156,8 +11156,8 @@
         </p:nvSpPr>
         <p:spPr>
           <a:xfrm>
-            <a:off x="4328021" y="4169664"/>
-            <a:ext cx="543652" cy="475488"/>
+            <a:off x="5254752" y="4169664"/>
+            <a:ext cx="685800" cy="475488"/>
           </a:xfrm>
           <a:prstGeom prst="rect">
             <a:avLst/>
@@ -11195,8 +11195,8 @@
         </p:nvSpPr>
         <p:spPr>
           <a:xfrm>
-            <a:off x="4921966" y="4169664"/>
-            <a:ext cx="543652" cy="475488"/>
+            <a:off x="6062472" y="4169664"/>
+            <a:ext cx="685800" cy="475488"/>
           </a:xfrm>
           <a:prstGeom prst="rect">
             <a:avLst>
@@ -11222,8 +11222,8 @@
         </p:nvSpPr>
         <p:spPr>
           <a:xfrm>
-            <a:off x="4921966" y="4169664"/>
-            <a:ext cx="543652" cy="475488"/>
+            <a:off x="6062472" y="4169664"/>
+            <a:ext cx="685800" cy="475488"/>
           </a:xfrm>
           <a:prstGeom prst="rect">
             <a:avLst/>
@@ -11261,8 +11261,8 @@
         </p:nvSpPr>
         <p:spPr>
           <a:xfrm>
-            <a:off x="5515910" y="4169664"/>
-            <a:ext cx="543652" cy="475488"/>
+            <a:off x="6870192" y="4169664"/>
+            <a:ext cx="685800" cy="475488"/>
           </a:xfrm>
           <a:prstGeom prst="rect">
             <a:avLst>
@@ -11288,8 +11288,8 @@
         </p:nvSpPr>
         <p:spPr>
           <a:xfrm>
-            <a:off x="5515910" y="4169664"/>
-            <a:ext cx="543652" cy="475488"/>
+            <a:off x="6870192" y="4169664"/>
+            <a:ext cx="685800" cy="475488"/>
           </a:xfrm>
           <a:prstGeom prst="rect">
             <a:avLst/>
@@ -11327,8 +11327,8 @@
         </p:nvSpPr>
         <p:spPr>
           <a:xfrm>
-            <a:off x="6109855" y="4169664"/>
-            <a:ext cx="543652" cy="475488"/>
+            <a:off x="7677912" y="4169664"/>
+            <a:ext cx="685800" cy="475488"/>
           </a:xfrm>
           <a:prstGeom prst="rect">
             <a:avLst>
@@ -11354,8 +11354,8 @@
         </p:nvSpPr>
         <p:spPr>
           <a:xfrm>
-            <a:off x="6109855" y="4169664"/>
-            <a:ext cx="543652" cy="475488"/>
+            <a:off x="7677912" y="4169664"/>
+            <a:ext cx="685800" cy="475488"/>
           </a:xfrm>
           <a:prstGeom prst="rect">
             <a:avLst/>
@@ -11379,205 +11379,7 @@
                 <a:ea typeface="Trebuchet MS" pitchFamily="34" charset="-122"/>
                 <a:cs typeface="Trebuchet MS" pitchFamily="34" charset="-120"/>
               </a:rPr>
-              <a:t>m</a:t>
-            </a:r>
-            <a:endParaRPr lang="en-US" sz="900" dirty="0"/>
-          </a:p>
-        </p:txBody>
-      </p:sp>
-      <p:sp>
-        <p:nvSpPr>
-          <p:cNvPr id="55" name="Shape 53"/>
-          <p:cNvSpPr/>
-          <p:nvPr/>
-        </p:nvSpPr>
-        <p:spPr>
-          <a:xfrm>
-            <a:off x="6703799" y="4169664"/>
-            <a:ext cx="543652" cy="475488"/>
-          </a:xfrm>
-          <a:prstGeom prst="rect">
-            <a:avLst>
-              <a:gd name="adj" fmla="val 7692"/>
-            </a:avLst>
-          </a:prstGeom>
-          <a:solidFill>
-            <a:srgbClr val="FFFFFF"/>
-          </a:solidFill>
-          <a:ln w="12700">
-            <a:solidFill>
-              <a:srgbClr val="DB2777"/>
-            </a:solidFill>
-            <a:prstDash val="solid"/>
-          </a:ln>
-        </p:spPr>
-      </p:sp>
-      <p:sp>
-        <p:nvSpPr>
-          <p:cNvPr id="56" name="Text 54"/>
-          <p:cNvSpPr/>
-          <p:nvPr/>
-        </p:nvSpPr>
-        <p:spPr>
-          <a:xfrm>
-            <a:off x="6703799" y="4169664"/>
-            <a:ext cx="543652" cy="475488"/>
-          </a:xfrm>
-          <a:prstGeom prst="rect">
-            <a:avLst/>
-          </a:prstGeom>
-          <a:noFill/>
-          <a:ln/>
-        </p:spPr>
-        <p:txBody>
-          <a:bodyPr wrap="square" lIns="0" tIns="0" rIns="0" bIns="0" rtlCol="0" anchor="ctr"/>
-          <a:lstStyle/>
-          <a:p>
-            <a:pPr algn="ctr" indent="0" marL="0">
-              <a:buNone/>
-            </a:pPr>
-            <a:r>
-              <a:rPr lang="en-US" sz="900" b="1" dirty="0">
-                <a:solidFill>
-                  <a:srgbClr val="9D174D"/>
-                </a:solidFill>
-                <a:latin typeface="Trebuchet MS" pitchFamily="34" charset="0"/>
-                <a:ea typeface="Trebuchet MS" pitchFamily="34" charset="-122"/>
-                <a:cs typeface="Trebuchet MS" pitchFamily="34" charset="-120"/>
-              </a:rPr>
-              <a:t>e</a:t>
-            </a:r>
-            <a:endParaRPr lang="en-US" sz="900" dirty="0"/>
-          </a:p>
-        </p:txBody>
-      </p:sp>
-      <p:sp>
-        <p:nvSpPr>
-          <p:cNvPr id="57" name="Shape 55"/>
-          <p:cNvSpPr/>
-          <p:nvPr/>
-        </p:nvSpPr>
-        <p:spPr>
-          <a:xfrm>
-            <a:off x="7297743" y="4169664"/>
-            <a:ext cx="543652" cy="475488"/>
-          </a:xfrm>
-          <a:prstGeom prst="rect">
-            <a:avLst>
-              <a:gd name="adj" fmla="val 7692"/>
-            </a:avLst>
-          </a:prstGeom>
-          <a:solidFill>
-            <a:srgbClr val="FFFFFF"/>
-          </a:solidFill>
-          <a:ln w="12700">
-            <a:solidFill>
-              <a:srgbClr val="DB2777"/>
-            </a:solidFill>
-            <a:prstDash val="solid"/>
-          </a:ln>
-        </p:spPr>
-      </p:sp>
-      <p:sp>
-        <p:nvSpPr>
-          <p:cNvPr id="58" name="Text 56"/>
-          <p:cNvSpPr/>
-          <p:nvPr/>
-        </p:nvSpPr>
-        <p:spPr>
-          <a:xfrm>
-            <a:off x="7297743" y="4169664"/>
-            <a:ext cx="543652" cy="475488"/>
-          </a:xfrm>
-          <a:prstGeom prst="rect">
-            <a:avLst/>
-          </a:prstGeom>
-          <a:noFill/>
-          <a:ln/>
-        </p:spPr>
-        <p:txBody>
-          <a:bodyPr wrap="square" lIns="0" tIns="0" rIns="0" bIns="0" rtlCol="0" anchor="ctr"/>
-          <a:lstStyle/>
-          <a:p>
-            <a:pPr algn="ctr" indent="0" marL="0">
-              <a:buNone/>
-            </a:pPr>
-            <a:r>
-              <a:rPr lang="en-US" sz="900" b="1" dirty="0">
-                <a:solidFill>
-                  <a:srgbClr val="9D174D"/>
-                </a:solidFill>
-                <a:latin typeface="Trebuchet MS" pitchFamily="34" charset="0"/>
-                <a:ea typeface="Trebuchet MS" pitchFamily="34" charset="-122"/>
-                <a:cs typeface="Trebuchet MS" pitchFamily="34" charset="-120"/>
-              </a:rPr>
-              <a:t>n</a:t>
-            </a:r>
-            <a:endParaRPr lang="en-US" sz="900" dirty="0"/>
-          </a:p>
-        </p:txBody>
-      </p:sp>
-      <p:sp>
-        <p:nvSpPr>
-          <p:cNvPr id="59" name="Shape 57"/>
-          <p:cNvSpPr/>
-          <p:nvPr/>
-        </p:nvSpPr>
-        <p:spPr>
-          <a:xfrm>
-            <a:off x="7891688" y="4169664"/>
-            <a:ext cx="543652" cy="475488"/>
-          </a:xfrm>
-          <a:prstGeom prst="rect">
-            <a:avLst>
-              <a:gd name="adj" fmla="val 7692"/>
-            </a:avLst>
-          </a:prstGeom>
-          <a:solidFill>
-            <a:srgbClr val="FFFFFF"/>
-          </a:solidFill>
-          <a:ln w="12700">
-            <a:solidFill>
-              <a:srgbClr val="DB2777"/>
-            </a:solidFill>
-            <a:prstDash val="solid"/>
-          </a:ln>
-        </p:spPr>
-      </p:sp>
-      <p:sp>
-        <p:nvSpPr>
-          <p:cNvPr id="60" name="Text 58"/>
-          <p:cNvSpPr/>
-          <p:nvPr/>
-        </p:nvSpPr>
-        <p:spPr>
-          <a:xfrm>
-            <a:off x="7891688" y="4169664"/>
-            <a:ext cx="543652" cy="475488"/>
-          </a:xfrm>
-          <a:prstGeom prst="rect">
-            <a:avLst/>
-          </a:prstGeom>
-          <a:noFill/>
-          <a:ln/>
-        </p:spPr>
-        <p:txBody>
-          <a:bodyPr wrap="square" lIns="0" tIns="0" rIns="0" bIns="0" rtlCol="0" anchor="ctr"/>
-          <a:lstStyle/>
-          <a:p>
-            <a:pPr algn="ctr" indent="0" marL="0">
-              <a:buNone/>
-            </a:pPr>
-            <a:r>
-              <a:rPr lang="en-US" sz="900" b="1" dirty="0">
-                <a:solidFill>
-                  <a:srgbClr val="9D174D"/>
-                </a:solidFill>
-                <a:latin typeface="Trebuchet MS" pitchFamily="34" charset="0"/>
-                <a:ea typeface="Trebuchet MS" pitchFamily="34" charset="-122"/>
-                <a:cs typeface="Trebuchet MS" pitchFamily="34" charset="-120"/>
-              </a:rPr>
-              <a:t>t</a:t>
+              <a:t>er</a:t>
             </a:r>
             <a:endParaRPr lang="en-US" sz="900" dirty="0"/>
           </a:p>
@@ -11869,7 +11671,7 @@
                 <a:ea typeface="Calibri" pitchFamily="34" charset="-122"/>
                 <a:cs typeface="Calibri" pitchFamily="34" charset="-120"/>
               </a:rPr>
-              <a:t>Word Labs  •  wordlabs.app  •  Root: 'develop' = to grow or build up</a:t>
+              <a:t>Word Labs  •  wordlabs.app  •  Root: 'develop' = to grow or unfold gradually</a:t>
             </a:r>
             <a:endParaRPr lang="en-US" sz="800" dirty="0"/>
           </a:p>
@@ -12008,7 +11810,7 @@
                 <a:ea typeface="Trebuchet MS" pitchFamily="34" charset="-122"/>
                 <a:cs typeface="Trebuchet MS" pitchFamily="34" charset="-120"/>
               </a:rPr>
-              <a:t>developer</a:t>
+              <a:t>development</a:t>
             </a:r>
             <a:endParaRPr lang="en-US" sz="2800" dirty="0"/>
           </a:p>
@@ -12696,7 +12498,7 @@
                 <a:ea typeface="Calibri" pitchFamily="34" charset="-122"/>
                 <a:cs typeface="Calibri" pitchFamily="34" charset="-120"/>
               </a:rPr>
-              <a:t>Word Labs  •  wordlabs.app  •  Root: 'develop' = to grow or build up</a:t>
+              <a:t>Word Labs  •  wordlabs.app  •  Root: 'develop' = to grow or unfold gradually</a:t>
             </a:r>
             <a:endParaRPr lang="en-US" sz="800" dirty="0"/>
           </a:p>
@@ -12835,7 +12637,7 @@
                 <a:ea typeface="Trebuchet MS" pitchFamily="34" charset="-122"/>
                 <a:cs typeface="Trebuchet MS" pitchFamily="34" charset="-120"/>
               </a:rPr>
-              <a:t>developer</a:t>
+              <a:t>development</a:t>
             </a:r>
             <a:endParaRPr lang="en-US" sz="2800" dirty="0"/>
           </a:p>
@@ -13013,7 +12815,7 @@
                 <a:ea typeface="Calibri" pitchFamily="34" charset="-122"/>
                 <a:cs typeface="Calibri" pitchFamily="34" charset="-120"/>
               </a:rPr>
-              <a:t>to grow or build up</a:t>
+              <a:t>to grow or build gradually</a:t>
             </a:r>
             <a:endParaRPr lang="en-US" sz="850" dirty="0"/>
           </a:p>
@@ -13086,7 +12888,7 @@
                 <a:ea typeface="Trebuchet MS" pitchFamily="34" charset="-122"/>
                 <a:cs typeface="Trebuchet MS" pitchFamily="34" charset="-120"/>
               </a:rPr>
-              <a:t>er</a:t>
+              <a:t>ment</a:t>
             </a:r>
             <a:endParaRPr lang="en-US" sz="1300" dirty="0"/>
           </a:p>
@@ -13125,7 +12927,7 @@
                 <a:ea typeface="Calibri" pitchFamily="34" charset="-122"/>
                 <a:cs typeface="Calibri" pitchFamily="34" charset="-120"/>
               </a:rPr>
-              <a:t>a person who does something</a:t>
+              <a:t>the result or process of</a:t>
             </a:r>
             <a:endParaRPr lang="en-US" sz="850" dirty="0"/>
           </a:p>
@@ -13681,7 +13483,7 @@
                 <a:ea typeface="Calibri" pitchFamily="34" charset="-122"/>
                 <a:cs typeface="Calibri" pitchFamily="34" charset="-120"/>
               </a:rPr>
-              <a:t>Word Labs  •  wordlabs.app  •  Root: 'develop' = to grow or build up</a:t>
+              <a:t>Word Labs  •  wordlabs.app  •  Root: 'develop' = to grow or unfold gradually</a:t>
             </a:r>
             <a:endParaRPr lang="en-US" sz="800" dirty="0"/>
           </a:p>
@@ -13820,7 +13622,7 @@
                 <a:ea typeface="Trebuchet MS" pitchFamily="34" charset="-122"/>
                 <a:cs typeface="Trebuchet MS" pitchFamily="34" charset="-120"/>
               </a:rPr>
-              <a:t>developer</a:t>
+              <a:t>development</a:t>
             </a:r>
             <a:endParaRPr lang="en-US" sz="2800" dirty="0"/>
           </a:p>
@@ -13998,7 +13800,7 @@
                 <a:ea typeface="Calibri" pitchFamily="34" charset="-122"/>
                 <a:cs typeface="Calibri" pitchFamily="34" charset="-120"/>
               </a:rPr>
-              <a:t>to grow or build up</a:t>
+              <a:t>to grow or build gradually</a:t>
             </a:r>
             <a:endParaRPr lang="en-US" sz="850" dirty="0"/>
           </a:p>
@@ -14071,7 +13873,7 @@
                 <a:ea typeface="Trebuchet MS" pitchFamily="34" charset="-122"/>
                 <a:cs typeface="Trebuchet MS" pitchFamily="34" charset="-120"/>
               </a:rPr>
-              <a:t>er</a:t>
+              <a:t>ment</a:t>
             </a:r>
             <a:endParaRPr lang="en-US" sz="1300" dirty="0"/>
           </a:p>
@@ -14110,7 +13912,7 @@
                 <a:ea typeface="Calibri" pitchFamily="34" charset="-122"/>
                 <a:cs typeface="Calibri" pitchFamily="34" charset="-120"/>
               </a:rPr>
-              <a:t>a person who does something</a:t>
+              <a:t>the result or process of</a:t>
             </a:r>
             <a:endParaRPr lang="en-US" sz="850" dirty="0"/>
           </a:p>
@@ -14584,7 +14386,7 @@
                 <a:ea typeface="Trebuchet MS" pitchFamily="34" charset="-122"/>
                 <a:cs typeface="Trebuchet MS" pitchFamily="34" charset="-120"/>
               </a:rPr>
-              <a:t>er</a:t>
+              <a:t>ment</a:t>
             </a:r>
             <a:endParaRPr lang="en-US" sz="1400" dirty="0"/>
           </a:p>
@@ -14917,7 +14719,7 @@
                 <a:ea typeface="Calibri" pitchFamily="34" charset="-122"/>
                 <a:cs typeface="Calibri" pitchFamily="34" charset="-120"/>
               </a:rPr>
-              <a:t>Root 'develop' — to grow or build up</a:t>
+              <a:t>Root 'develop' — to grow or unfold gradually</a:t>
             </a:r>
             <a:endParaRPr lang="en-US" sz="1600" dirty="0"/>
           </a:p>
@@ -15273,7 +15075,7 @@
                 <a:ea typeface="Calibri" pitchFamily="34" charset="-122"/>
                 <a:cs typeface="Calibri" pitchFamily="34" charset="-120"/>
               </a:rPr>
-              <a:t>Word Labs  •  wordlabs.app  •  Root: 'develop' = to grow or build up</a:t>
+              <a:t>Word Labs  •  wordlabs.app  •  Root: 'develop' = to grow or unfold gradually</a:t>
             </a:r>
             <a:endParaRPr lang="en-US" sz="800" dirty="0"/>
           </a:p>
@@ -15412,7 +15214,7 @@
                 <a:ea typeface="Trebuchet MS" pitchFamily="34" charset="-122"/>
                 <a:cs typeface="Trebuchet MS" pitchFamily="34" charset="-120"/>
               </a:rPr>
-              <a:t>developer</a:t>
+              <a:t>development</a:t>
             </a:r>
             <a:endParaRPr lang="en-US" sz="2800" dirty="0"/>
           </a:p>
@@ -15590,7 +15392,7 @@
                 <a:ea typeface="Calibri" pitchFamily="34" charset="-122"/>
                 <a:cs typeface="Calibri" pitchFamily="34" charset="-120"/>
               </a:rPr>
-              <a:t>to grow or build up</a:t>
+              <a:t>to grow or build gradually</a:t>
             </a:r>
             <a:endParaRPr lang="en-US" sz="850" dirty="0"/>
           </a:p>
@@ -15663,7 +15465,7 @@
                 <a:ea typeface="Trebuchet MS" pitchFamily="34" charset="-122"/>
                 <a:cs typeface="Trebuchet MS" pitchFamily="34" charset="-120"/>
               </a:rPr>
-              <a:t>er</a:t>
+              <a:t>ment</a:t>
             </a:r>
             <a:endParaRPr lang="en-US" sz="1300" dirty="0"/>
           </a:p>
@@ -15702,7 +15504,7 @@
                 <a:ea typeface="Calibri" pitchFamily="34" charset="-122"/>
                 <a:cs typeface="Calibri" pitchFamily="34" charset="-120"/>
               </a:rPr>
-              <a:t>a person who does something</a:t>
+              <a:t>the result or process of</a:t>
             </a:r>
             <a:endParaRPr lang="en-US" sz="850" dirty="0"/>
           </a:p>
@@ -16176,7 +15978,7 @@
                 <a:ea typeface="Trebuchet MS" pitchFamily="34" charset="-122"/>
                 <a:cs typeface="Trebuchet MS" pitchFamily="34" charset="-120"/>
               </a:rPr>
-              <a:t>er</a:t>
+              <a:t>ment</a:t>
             </a:r>
             <a:endParaRPr lang="en-US" sz="1400" dirty="0"/>
           </a:p>
@@ -16283,8 +16085,8 @@
         </p:nvSpPr>
         <p:spPr>
           <a:xfrm>
-            <a:off x="2023872" y="4169664"/>
-            <a:ext cx="685800" cy="475488"/>
+            <a:off x="1952244" y="4169664"/>
+            <a:ext cx="543652" cy="475488"/>
           </a:xfrm>
           <a:prstGeom prst="rect">
             <a:avLst>
@@ -16310,8 +16112,8 @@
         </p:nvSpPr>
         <p:spPr>
           <a:xfrm>
-            <a:off x="2023872" y="4169664"/>
-            <a:ext cx="685800" cy="475488"/>
+            <a:off x="1952244" y="4169664"/>
+            <a:ext cx="543652" cy="475488"/>
           </a:xfrm>
           <a:prstGeom prst="rect">
             <a:avLst/>
@@ -16349,8 +16151,8 @@
         </p:nvSpPr>
         <p:spPr>
           <a:xfrm>
-            <a:off x="2831592" y="4169664"/>
-            <a:ext cx="685800" cy="475488"/>
+            <a:off x="2546188" y="4169664"/>
+            <a:ext cx="543652" cy="475488"/>
           </a:xfrm>
           <a:prstGeom prst="rect">
             <a:avLst>
@@ -16376,8 +16178,8 @@
         </p:nvSpPr>
         <p:spPr>
           <a:xfrm>
-            <a:off x="2831592" y="4169664"/>
-            <a:ext cx="685800" cy="475488"/>
+            <a:off x="2546188" y="4169664"/>
+            <a:ext cx="543652" cy="475488"/>
           </a:xfrm>
           <a:prstGeom prst="rect">
             <a:avLst/>
@@ -16415,8 +16217,8 @@
         </p:nvSpPr>
         <p:spPr>
           <a:xfrm>
-            <a:off x="3639312" y="4169664"/>
-            <a:ext cx="685800" cy="475488"/>
+            <a:off x="3140133" y="4169664"/>
+            <a:ext cx="543652" cy="475488"/>
           </a:xfrm>
           <a:prstGeom prst="rect">
             <a:avLst>
@@ -16442,8 +16244,8 @@
         </p:nvSpPr>
         <p:spPr>
           <a:xfrm>
-            <a:off x="3639312" y="4169664"/>
-            <a:ext cx="685800" cy="475488"/>
+            <a:off x="3140133" y="4169664"/>
+            <a:ext cx="543652" cy="475488"/>
           </a:xfrm>
           <a:prstGeom prst="rect">
             <a:avLst/>
@@ -16481,8 +16283,8 @@
         </p:nvSpPr>
         <p:spPr>
           <a:xfrm>
-            <a:off x="4447032" y="4169664"/>
-            <a:ext cx="685800" cy="475488"/>
+            <a:off x="3734077" y="4169664"/>
+            <a:ext cx="543652" cy="475488"/>
           </a:xfrm>
           <a:prstGeom prst="rect">
             <a:avLst>
@@ -16508,8 +16310,8 @@
         </p:nvSpPr>
         <p:spPr>
           <a:xfrm>
-            <a:off x="4447032" y="4169664"/>
-            <a:ext cx="685800" cy="475488"/>
+            <a:off x="3734077" y="4169664"/>
+            <a:ext cx="543652" cy="475488"/>
           </a:xfrm>
           <a:prstGeom prst="rect">
             <a:avLst/>
@@ -16547,8 +16349,8 @@
         </p:nvSpPr>
         <p:spPr>
           <a:xfrm>
-            <a:off x="5254752" y="4169664"/>
-            <a:ext cx="685800" cy="475488"/>
+            <a:off x="4328021" y="4169664"/>
+            <a:ext cx="543652" cy="475488"/>
           </a:xfrm>
           <a:prstGeom prst="rect">
             <a:avLst>
@@ -16574,8 +16376,8 @@
         </p:nvSpPr>
         <p:spPr>
           <a:xfrm>
-            <a:off x="5254752" y="4169664"/>
-            <a:ext cx="685800" cy="475488"/>
+            <a:off x="4328021" y="4169664"/>
+            <a:ext cx="543652" cy="475488"/>
           </a:xfrm>
           <a:prstGeom prst="rect">
             <a:avLst/>
@@ -16613,8 +16415,8 @@
         </p:nvSpPr>
         <p:spPr>
           <a:xfrm>
-            <a:off x="6062472" y="4169664"/>
-            <a:ext cx="685800" cy="475488"/>
+            <a:off x="4921966" y="4169664"/>
+            <a:ext cx="543652" cy="475488"/>
           </a:xfrm>
           <a:prstGeom prst="rect">
             <a:avLst>
@@ -16640,8 +16442,8 @@
         </p:nvSpPr>
         <p:spPr>
           <a:xfrm>
-            <a:off x="6062472" y="4169664"/>
-            <a:ext cx="685800" cy="475488"/>
+            <a:off x="4921966" y="4169664"/>
+            <a:ext cx="543652" cy="475488"/>
           </a:xfrm>
           <a:prstGeom prst="rect">
             <a:avLst/>
@@ -16679,8 +16481,8 @@
         </p:nvSpPr>
         <p:spPr>
           <a:xfrm>
-            <a:off x="6870192" y="4169664"/>
-            <a:ext cx="685800" cy="475488"/>
+            <a:off x="5515910" y="4169664"/>
+            <a:ext cx="543652" cy="475488"/>
           </a:xfrm>
           <a:prstGeom prst="rect">
             <a:avLst>
@@ -16706,8 +16508,8 @@
         </p:nvSpPr>
         <p:spPr>
           <a:xfrm>
-            <a:off x="6870192" y="4169664"/>
-            <a:ext cx="685800" cy="475488"/>
+            <a:off x="5515910" y="4169664"/>
+            <a:ext cx="543652" cy="475488"/>
           </a:xfrm>
           <a:prstGeom prst="rect">
             <a:avLst/>
@@ -16745,8 +16547,8 @@
         </p:nvSpPr>
         <p:spPr>
           <a:xfrm>
-            <a:off x="7677912" y="4169664"/>
-            <a:ext cx="685800" cy="475488"/>
+            <a:off x="6109855" y="4169664"/>
+            <a:ext cx="543652" cy="475488"/>
           </a:xfrm>
           <a:prstGeom prst="rect">
             <a:avLst>
@@ -16772,8 +16574,8 @@
         </p:nvSpPr>
         <p:spPr>
           <a:xfrm>
-            <a:off x="7677912" y="4169664"/>
-            <a:ext cx="685800" cy="475488"/>
+            <a:off x="6109855" y="4169664"/>
+            <a:ext cx="543652" cy="475488"/>
           </a:xfrm>
           <a:prstGeom prst="rect">
             <a:avLst/>
@@ -16797,7 +16599,205 @@
                 <a:ea typeface="Trebuchet MS" pitchFamily="34" charset="-122"/>
                 <a:cs typeface="Trebuchet MS" pitchFamily="34" charset="-120"/>
               </a:rPr>
-              <a:t>er</a:t>
+              <a:t>m</a:t>
+            </a:r>
+            <a:endParaRPr lang="en-US" sz="900" dirty="0"/>
+          </a:p>
+        </p:txBody>
+      </p:sp>
+      <p:sp>
+        <p:nvSpPr>
+          <p:cNvPr id="55" name="Shape 53"/>
+          <p:cNvSpPr/>
+          <p:nvPr/>
+        </p:nvSpPr>
+        <p:spPr>
+          <a:xfrm>
+            <a:off x="6703799" y="4169664"/>
+            <a:ext cx="543652" cy="475488"/>
+          </a:xfrm>
+          <a:prstGeom prst="rect">
+            <a:avLst>
+              <a:gd name="adj" fmla="val 7692"/>
+            </a:avLst>
+          </a:prstGeom>
+          <a:solidFill>
+            <a:srgbClr val="FFFFFF"/>
+          </a:solidFill>
+          <a:ln w="12700">
+            <a:solidFill>
+              <a:srgbClr val="DB2777"/>
+            </a:solidFill>
+            <a:prstDash val="solid"/>
+          </a:ln>
+        </p:spPr>
+      </p:sp>
+      <p:sp>
+        <p:nvSpPr>
+          <p:cNvPr id="56" name="Text 54"/>
+          <p:cNvSpPr/>
+          <p:nvPr/>
+        </p:nvSpPr>
+        <p:spPr>
+          <a:xfrm>
+            <a:off x="6703799" y="4169664"/>
+            <a:ext cx="543652" cy="475488"/>
+          </a:xfrm>
+          <a:prstGeom prst="rect">
+            <a:avLst/>
+          </a:prstGeom>
+          <a:noFill/>
+          <a:ln/>
+        </p:spPr>
+        <p:txBody>
+          <a:bodyPr wrap="square" lIns="0" tIns="0" rIns="0" bIns="0" rtlCol="0" anchor="ctr"/>
+          <a:lstStyle/>
+          <a:p>
+            <a:pPr algn="ctr" indent="0" marL="0">
+              <a:buNone/>
+            </a:pPr>
+            <a:r>
+              <a:rPr lang="en-US" sz="900" b="1" dirty="0">
+                <a:solidFill>
+                  <a:srgbClr val="9D174D"/>
+                </a:solidFill>
+                <a:latin typeface="Trebuchet MS" pitchFamily="34" charset="0"/>
+                <a:ea typeface="Trebuchet MS" pitchFamily="34" charset="-122"/>
+                <a:cs typeface="Trebuchet MS" pitchFamily="34" charset="-120"/>
+              </a:rPr>
+              <a:t>e</a:t>
+            </a:r>
+            <a:endParaRPr lang="en-US" sz="900" dirty="0"/>
+          </a:p>
+        </p:txBody>
+      </p:sp>
+      <p:sp>
+        <p:nvSpPr>
+          <p:cNvPr id="57" name="Shape 55"/>
+          <p:cNvSpPr/>
+          <p:nvPr/>
+        </p:nvSpPr>
+        <p:spPr>
+          <a:xfrm>
+            <a:off x="7297743" y="4169664"/>
+            <a:ext cx="543652" cy="475488"/>
+          </a:xfrm>
+          <a:prstGeom prst="rect">
+            <a:avLst>
+              <a:gd name="adj" fmla="val 7692"/>
+            </a:avLst>
+          </a:prstGeom>
+          <a:solidFill>
+            <a:srgbClr val="FFFFFF"/>
+          </a:solidFill>
+          <a:ln w="12700">
+            <a:solidFill>
+              <a:srgbClr val="DB2777"/>
+            </a:solidFill>
+            <a:prstDash val="solid"/>
+          </a:ln>
+        </p:spPr>
+      </p:sp>
+      <p:sp>
+        <p:nvSpPr>
+          <p:cNvPr id="58" name="Text 56"/>
+          <p:cNvSpPr/>
+          <p:nvPr/>
+        </p:nvSpPr>
+        <p:spPr>
+          <a:xfrm>
+            <a:off x="7297743" y="4169664"/>
+            <a:ext cx="543652" cy="475488"/>
+          </a:xfrm>
+          <a:prstGeom prst="rect">
+            <a:avLst/>
+          </a:prstGeom>
+          <a:noFill/>
+          <a:ln/>
+        </p:spPr>
+        <p:txBody>
+          <a:bodyPr wrap="square" lIns="0" tIns="0" rIns="0" bIns="0" rtlCol="0" anchor="ctr"/>
+          <a:lstStyle/>
+          <a:p>
+            <a:pPr algn="ctr" indent="0" marL="0">
+              <a:buNone/>
+            </a:pPr>
+            <a:r>
+              <a:rPr lang="en-US" sz="900" b="1" dirty="0">
+                <a:solidFill>
+                  <a:srgbClr val="9D174D"/>
+                </a:solidFill>
+                <a:latin typeface="Trebuchet MS" pitchFamily="34" charset="0"/>
+                <a:ea typeface="Trebuchet MS" pitchFamily="34" charset="-122"/>
+                <a:cs typeface="Trebuchet MS" pitchFamily="34" charset="-120"/>
+              </a:rPr>
+              <a:t>n</a:t>
+            </a:r>
+            <a:endParaRPr lang="en-US" sz="900" dirty="0"/>
+          </a:p>
+        </p:txBody>
+      </p:sp>
+      <p:sp>
+        <p:nvSpPr>
+          <p:cNvPr id="59" name="Shape 57"/>
+          <p:cNvSpPr/>
+          <p:nvPr/>
+        </p:nvSpPr>
+        <p:spPr>
+          <a:xfrm>
+            <a:off x="7891688" y="4169664"/>
+            <a:ext cx="543652" cy="475488"/>
+          </a:xfrm>
+          <a:prstGeom prst="rect">
+            <a:avLst>
+              <a:gd name="adj" fmla="val 7692"/>
+            </a:avLst>
+          </a:prstGeom>
+          <a:solidFill>
+            <a:srgbClr val="FFFFFF"/>
+          </a:solidFill>
+          <a:ln w="12700">
+            <a:solidFill>
+              <a:srgbClr val="DB2777"/>
+            </a:solidFill>
+            <a:prstDash val="solid"/>
+          </a:ln>
+        </p:spPr>
+      </p:sp>
+      <p:sp>
+        <p:nvSpPr>
+          <p:cNvPr id="60" name="Text 58"/>
+          <p:cNvSpPr/>
+          <p:nvPr/>
+        </p:nvSpPr>
+        <p:spPr>
+          <a:xfrm>
+            <a:off x="7891688" y="4169664"/>
+            <a:ext cx="543652" cy="475488"/>
+          </a:xfrm>
+          <a:prstGeom prst="rect">
+            <a:avLst/>
+          </a:prstGeom>
+          <a:noFill/>
+          <a:ln/>
+        </p:spPr>
+        <p:txBody>
+          <a:bodyPr wrap="square" lIns="0" tIns="0" rIns="0" bIns="0" rtlCol="0" anchor="ctr"/>
+          <a:lstStyle/>
+          <a:p>
+            <a:pPr algn="ctr" indent="0" marL="0">
+              <a:buNone/>
+            </a:pPr>
+            <a:r>
+              <a:rPr lang="en-US" sz="900" b="1" dirty="0">
+                <a:solidFill>
+                  <a:srgbClr val="9D174D"/>
+                </a:solidFill>
+                <a:latin typeface="Trebuchet MS" pitchFamily="34" charset="0"/>
+                <a:ea typeface="Trebuchet MS" pitchFamily="34" charset="-122"/>
+                <a:cs typeface="Trebuchet MS" pitchFamily="34" charset="-120"/>
+              </a:rPr>
+              <a:t>t</a:t>
             </a:r>
             <a:endParaRPr lang="en-US" sz="900" dirty="0"/>
           </a:p>
@@ -17371,7 +17371,7 @@
                 <a:ea typeface="Calibri" pitchFamily="34" charset="-122"/>
                 <a:cs typeface="Calibri" pitchFamily="34" charset="-120"/>
               </a:rPr>
-              <a:t>Word Labs  •  wordlabs.app  •  Root: 'develop' = to grow or build up</a:t>
+              <a:t>Word Labs  •  wordlabs.app  •  Root: 'develop' = to grow or unfold gradually</a:t>
             </a:r>
             <a:endParaRPr lang="en-US" sz="800" dirty="0"/>
           </a:p>
@@ -18011,7 +18011,7 @@
                 <a:ea typeface="Calibri" pitchFamily="34" charset="-122"/>
                 <a:cs typeface="Calibri" pitchFamily="34" charset="-120"/>
               </a:rPr>
-              <a:t>Word Labs  •  wordlabs.app  •  Root: 'develop' = to grow or build up</a:t>
+              <a:t>Word Labs  •  wordlabs.app  •  Root: 'develop' = to grow or unfold gradually</a:t>
             </a:r>
             <a:endParaRPr lang="en-US" sz="800" dirty="0"/>
           </a:p>
@@ -18115,6 +18115,20 @@
               <a:buNone/>
             </a:pPr>
             <a:r>
+              <a:rPr lang="en-US" sz="1800" dirty="0">
+                <a:solidFill>
+                  <a:srgbClr val="0F172A"/>
+                </a:solidFill>
+                <a:latin typeface="Calibri" pitchFamily="34" charset="0"/>
+                <a:ea typeface="Calibri" pitchFamily="34" charset="-122"/>
+                <a:cs typeface="Calibri" pitchFamily="34" charset="-120"/>
+              </a:rPr>
+              <a:t>We are </a:t>
+            </a:r>
+            <a:pPr algn="l" indent="0" marL="0">
+              <a:buNone/>
+            </a:pPr>
+            <a:r>
               <a:rPr lang="en-US" sz="1800" b="1" dirty="0">
                 <a:solidFill>
                   <a:srgbClr val="0D9488"/>
@@ -18126,7 +18140,7 @@
                 <a:ea typeface="Calibri" pitchFamily="34" charset="-122"/>
                 <a:cs typeface="Calibri" pitchFamily="34" charset="-120"/>
               </a:rPr>
-              <a:t>Redeveloping</a:t>
+              <a:t>redeveloping</a:t>
             </a:r>
             <a:pPr algn="l" indent="0" marL="0">
               <a:buNone/>
@@ -18140,7 +18154,7 @@
                 <a:ea typeface="Calibri" pitchFamily="34" charset="-122"/>
                 <a:cs typeface="Calibri" pitchFamily="34" charset="-120"/>
               </a:rPr>
-              <a:t> the old factory was a huge challenge; the </a:t>
+              <a:t> the old hall; however, the </a:t>
             </a:r>
             <a:pPr algn="l" indent="0" marL="0">
               <a:buNone/>
@@ -18157,7 +18171,7 @@
                 <a:ea typeface="Calibri" pitchFamily="34" charset="-122"/>
                 <a:cs typeface="Calibri" pitchFamily="34" charset="-120"/>
               </a:rPr>
-              <a:t>developers</a:t>
+              <a:t>developing</a:t>
             </a:r>
             <a:pPr algn="l" indent="0" marL="0">
               <a:buNone/>
@@ -18171,7 +18185,7 @@
                 <a:ea typeface="Calibri" pitchFamily="34" charset="-122"/>
                 <a:cs typeface="Calibri" pitchFamily="34" charset="-120"/>
               </a:rPr>
-              <a:t> needed to create plans for a well-</a:t>
+              <a:t> plans and all new </a:t>
             </a:r>
             <a:pPr algn="l" indent="0" marL="0">
               <a:buNone/>
@@ -18188,7 +18202,7 @@
                 <a:ea typeface="Calibri" pitchFamily="34" charset="-122"/>
                 <a:cs typeface="Calibri" pitchFamily="34" charset="-120"/>
               </a:rPr>
-              <a:t>developed</a:t>
+              <a:t>developments</a:t>
             </a:r>
             <a:pPr algn="l" indent="0" marL="0">
               <a:buNone/>
@@ -18202,7 +18216,7 @@
                 <a:ea typeface="Calibri" pitchFamily="34" charset="-122"/>
                 <a:cs typeface="Calibri" pitchFamily="34" charset="-120"/>
               </a:rPr>
-              <a:t> community space.</a:t>
+              <a:t> must be approved first.</a:t>
             </a:r>
             <a:endParaRPr lang="en-US" sz="1800" dirty="0"/>
           </a:p>
@@ -18357,7 +18371,7 @@
                 <a:ea typeface="Trebuchet MS" pitchFamily="34" charset="-122"/>
                 <a:cs typeface="Trebuchet MS" pitchFamily="34" charset="-120"/>
               </a:rPr>
-              <a:t>Redeveloping</a:t>
+              <a:t>redeveloping</a:t>
             </a:r>
             <a:endParaRPr lang="en-US" sz="1400" dirty="0"/>
           </a:p>
@@ -18485,7 +18499,7 @@
                 <a:ea typeface="Trebuchet MS" pitchFamily="34" charset="-122"/>
                 <a:cs typeface="Trebuchet MS" pitchFamily="34" charset="-120"/>
               </a:rPr>
-              <a:t>developers</a:t>
+              <a:t>developing</a:t>
             </a:r>
             <a:endParaRPr lang="en-US" sz="1400" dirty="0"/>
           </a:p>
@@ -18613,7 +18627,7 @@
                 <a:ea typeface="Trebuchet MS" pitchFamily="34" charset="-122"/>
                 <a:cs typeface="Trebuchet MS" pitchFamily="34" charset="-120"/>
               </a:rPr>
-              <a:t>developed</a:t>
+              <a:t>developments</a:t>
             </a:r>
             <a:endParaRPr lang="en-US" sz="1400" dirty="0"/>
           </a:p>
@@ -18944,7 +18958,7 @@
                 <a:ea typeface="Calibri" pitchFamily="34" charset="-122"/>
                 <a:cs typeface="Calibri" pitchFamily="34" charset="-120"/>
               </a:rPr>
-              <a:t>Word Labs  •  wordlabs.app  •  Root: 'develop' = to grow or build up</a:t>
+              <a:t>Word Labs  •  wordlabs.app  •  Root: 'develop' = to grow or unfold gradually</a:t>
             </a:r>
             <a:endParaRPr lang="en-US" sz="800" dirty="0"/>
           </a:p>
@@ -19083,7 +19097,7 @@
                 <a:ea typeface="Trebuchet MS" pitchFamily="34" charset="-122"/>
                 <a:cs typeface="Trebuchet MS" pitchFamily="34" charset="-120"/>
               </a:rPr>
-              <a:t>Redeveloping</a:t>
+              <a:t>redeveloping</a:t>
             </a:r>
             <a:endParaRPr lang="en-US" sz="2800" dirty="0"/>
           </a:p>
@@ -19771,7 +19785,7 @@
                 <a:ea typeface="Calibri" pitchFamily="34" charset="-122"/>
                 <a:cs typeface="Calibri" pitchFamily="34" charset="-120"/>
               </a:rPr>
-              <a:t>Word Labs  •  wordlabs.app  •  Root: 'develop' = to grow or build up</a:t>
+              <a:t>Word Labs  •  wordlabs.app  •  Root: 'develop' = to grow or unfold gradually</a:t>
             </a:r>
             <a:endParaRPr lang="en-US" sz="800" dirty="0"/>
           </a:p>
@@ -19910,7 +19924,7 @@
                 <a:ea typeface="Trebuchet MS" pitchFamily="34" charset="-122"/>
                 <a:cs typeface="Trebuchet MS" pitchFamily="34" charset="-120"/>
               </a:rPr>
-              <a:t>Redeveloping</a:t>
+              <a:t>redeveloping</a:t>
             </a:r>
             <a:endParaRPr lang="en-US" sz="2800" dirty="0"/>
           </a:p>
@@ -20200,7 +20214,7 @@
                 <a:ea typeface="Calibri" pitchFamily="34" charset="-122"/>
                 <a:cs typeface="Calibri" pitchFamily="34" charset="-120"/>
               </a:rPr>
-              <a:t>to grow or build up</a:t>
+              <a:t>to grow or build gradually</a:t>
             </a:r>
             <a:endParaRPr lang="en-US" sz="850" dirty="0"/>
           </a:p>
@@ -20312,7 +20326,7 @@
                 <a:ea typeface="Calibri" pitchFamily="34" charset="-122"/>
                 <a:cs typeface="Calibri" pitchFamily="34" charset="-120"/>
               </a:rPr>
-              <a:t>action happening now</a:t>
+              <a:t>happening right now</a:t>
             </a:r>
             <a:endParaRPr lang="en-US" sz="850" dirty="0"/>
           </a:p>
@@ -20868,7 +20882,7 @@
                 <a:ea typeface="Calibri" pitchFamily="34" charset="-122"/>
                 <a:cs typeface="Calibri" pitchFamily="34" charset="-120"/>
               </a:rPr>
-              <a:t>Word Labs  •  wordlabs.app  •  Root: 'develop' = to grow or build up</a:t>
+              <a:t>Word Labs  •  wordlabs.app  •  Root: 'develop' = to grow or unfold gradually</a:t>
             </a:r>
             <a:endParaRPr lang="en-US" sz="800" dirty="0"/>
           </a:p>
@@ -21007,7 +21021,7 @@
                 <a:ea typeface="Trebuchet MS" pitchFamily="34" charset="-122"/>
                 <a:cs typeface="Trebuchet MS" pitchFamily="34" charset="-120"/>
               </a:rPr>
-              <a:t>Redeveloping</a:t>
+              <a:t>redeveloping</a:t>
             </a:r>
             <a:endParaRPr lang="en-US" sz="2800" dirty="0"/>
           </a:p>
@@ -21297,7 +21311,7 @@
                 <a:ea typeface="Calibri" pitchFamily="34" charset="-122"/>
                 <a:cs typeface="Calibri" pitchFamily="34" charset="-120"/>
               </a:rPr>
-              <a:t>to grow or build up</a:t>
+              <a:t>to grow or build gradually</a:t>
             </a:r>
             <a:endParaRPr lang="en-US" sz="850" dirty="0"/>
           </a:p>
@@ -21409,7 +21423,7 @@
                 <a:ea typeface="Calibri" pitchFamily="34" charset="-122"/>
                 <a:cs typeface="Calibri" pitchFamily="34" charset="-120"/>
               </a:rPr>
-              <a:t>action happening now</a:t>
+              <a:t>happening right now</a:t>
             </a:r>
             <a:endParaRPr lang="en-US" sz="850" dirty="0"/>
           </a:p>
@@ -22412,7 +22426,7 @@
                 <a:ea typeface="Calibri" pitchFamily="34" charset="-122"/>
                 <a:cs typeface="Calibri" pitchFamily="34" charset="-120"/>
               </a:rPr>
-              <a:t>Word Labs  •  wordlabs.app  •  Root: 'develop' = to grow or build up</a:t>
+              <a:t>Word Labs  •  wordlabs.app  •  Root: 'develop' = to grow or unfold gradually</a:t>
             </a:r>
             <a:endParaRPr lang="en-US" sz="800" dirty="0"/>
           </a:p>
@@ -22551,7 +22565,7 @@
                 <a:ea typeface="Trebuchet MS" pitchFamily="34" charset="-122"/>
                 <a:cs typeface="Trebuchet MS" pitchFamily="34" charset="-120"/>
               </a:rPr>
-              <a:t>Redeveloping</a:t>
+              <a:t>redeveloping</a:t>
             </a:r>
             <a:endParaRPr lang="en-US" sz="2800" dirty="0"/>
           </a:p>
@@ -22841,7 +22855,7 @@
                 <a:ea typeface="Calibri" pitchFamily="34" charset="-122"/>
                 <a:cs typeface="Calibri" pitchFamily="34" charset="-120"/>
               </a:rPr>
-              <a:t>to grow or build up</a:t>
+              <a:t>to grow or build gradually</a:t>
             </a:r>
             <a:endParaRPr lang="en-US" sz="850" dirty="0"/>
           </a:p>
@@ -22953,7 +22967,7 @@
                 <a:ea typeface="Calibri" pitchFamily="34" charset="-122"/>
                 <a:cs typeface="Calibri" pitchFamily="34" charset="-120"/>
               </a:rPr>
-              <a:t>action happening now</a:t>
+              <a:t>happening right now</a:t>
             </a:r>
             <a:endParaRPr lang="en-US" sz="850" dirty="0"/>
           </a:p>
@@ -24643,7 +24657,7 @@
                 <a:ea typeface="Calibri" pitchFamily="34" charset="-122"/>
                 <a:cs typeface="Calibri" pitchFamily="34" charset="-120"/>
               </a:rPr>
-              <a:t>Word Labs  •  wordlabs.app  •  Root: 'develop' = to grow or build up</a:t>
+              <a:t>Word Labs  •  wordlabs.app  •  Root: 'develop' = to grow or unfold gradually</a:t>
             </a:r>
             <a:endParaRPr lang="en-US" sz="800" dirty="0"/>
           </a:p>
@@ -24782,7 +24796,7 @@
                 <a:ea typeface="Trebuchet MS" pitchFamily="34" charset="-122"/>
                 <a:cs typeface="Trebuchet MS" pitchFamily="34" charset="-120"/>
               </a:rPr>
-              <a:t>developers</a:t>
+              <a:t>developing</a:t>
             </a:r>
             <a:endParaRPr lang="en-US" sz="2800" dirty="0"/>
           </a:p>
@@ -25470,7 +25484,7 @@
                 <a:ea typeface="Calibri" pitchFamily="34" charset="-122"/>
                 <a:cs typeface="Calibri" pitchFamily="34" charset="-120"/>
               </a:rPr>
-              <a:t>Word Labs  •  wordlabs.app  •  Root: 'develop' = to grow or build up</a:t>
+              <a:t>Word Labs  •  wordlabs.app  •  Root: 'develop' = to grow or unfold gradually</a:t>
             </a:r>
             <a:endParaRPr lang="en-US" sz="800" dirty="0"/>
           </a:p>
@@ -25609,7 +25623,7 @@
                 <a:ea typeface="Trebuchet MS" pitchFamily="34" charset="-122"/>
                 <a:cs typeface="Trebuchet MS" pitchFamily="34" charset="-120"/>
               </a:rPr>
-              <a:t>developers</a:t>
+              <a:t>developing</a:t>
             </a:r>
             <a:endParaRPr lang="en-US" sz="2800" dirty="0"/>
           </a:p>
@@ -25689,7 +25703,7 @@
         </p:nvSpPr>
         <p:spPr>
           <a:xfrm>
-            <a:off x="2221992" y="2258568"/>
+            <a:off x="2938272" y="2258568"/>
             <a:ext cx="1828800" cy="292608"/>
           </a:xfrm>
           <a:prstGeom prst="rect">
@@ -25723,7 +25737,7 @@
         </p:nvSpPr>
         <p:spPr>
           <a:xfrm>
-            <a:off x="2221992" y="2258568"/>
+            <a:off x="2938272" y="2258568"/>
             <a:ext cx="1828800" cy="292608"/>
           </a:xfrm>
           <a:prstGeom prst="rect">
@@ -25762,7 +25776,7 @@
         </p:nvSpPr>
         <p:spPr>
           <a:xfrm>
-            <a:off x="2221992" y="2569464"/>
+            <a:off x="2938272" y="2569464"/>
             <a:ext cx="1828800" cy="201168"/>
           </a:xfrm>
           <a:prstGeom prst="rect">
@@ -25787,7 +25801,7 @@
                 <a:ea typeface="Calibri" pitchFamily="34" charset="-122"/>
                 <a:cs typeface="Calibri" pitchFamily="34" charset="-120"/>
               </a:rPr>
-              <a:t>to grow or build up</a:t>
+              <a:t>to grow or build gradually</a:t>
             </a:r>
             <a:endParaRPr lang="en-US" sz="850" dirty="0"/>
           </a:p>
@@ -25801,7 +25815,7 @@
         </p:nvSpPr>
         <p:spPr>
           <a:xfrm>
-            <a:off x="4370832" y="2258568"/>
+            <a:off x="5803392" y="2258568"/>
             <a:ext cx="1828800" cy="292608"/>
           </a:xfrm>
           <a:prstGeom prst="rect">
@@ -25835,7 +25849,7 @@
         </p:nvSpPr>
         <p:spPr>
           <a:xfrm>
-            <a:off x="4370832" y="2258568"/>
+            <a:off x="5803392" y="2258568"/>
             <a:ext cx="1828800" cy="292608"/>
           </a:xfrm>
           <a:prstGeom prst="rect">
@@ -25860,7 +25874,7 @@
                 <a:ea typeface="Trebuchet MS" pitchFamily="34" charset="-122"/>
                 <a:cs typeface="Trebuchet MS" pitchFamily="34" charset="-120"/>
               </a:rPr>
-              <a:t>er</a:t>
+              <a:t>ing</a:t>
             </a:r>
             <a:endParaRPr lang="en-US" sz="1300" dirty="0"/>
           </a:p>
@@ -25874,7 +25888,7 @@
         </p:nvSpPr>
         <p:spPr>
           <a:xfrm>
-            <a:off x="4370832" y="2569464"/>
+            <a:off x="5803392" y="2569464"/>
             <a:ext cx="1828800" cy="201168"/>
           </a:xfrm>
           <a:prstGeom prst="rect">
@@ -25899,7 +25913,7 @@
                 <a:ea typeface="Calibri" pitchFamily="34" charset="-122"/>
                 <a:cs typeface="Calibri" pitchFamily="34" charset="-120"/>
               </a:rPr>
-              <a:t>a person who does something</a:t>
+              <a:t>happening right now</a:t>
             </a:r>
             <a:endParaRPr lang="en-US" sz="850" dirty="0"/>
           </a:p>
@@ -25913,30 +25927,23 @@
         </p:nvSpPr>
         <p:spPr>
           <a:xfrm>
-            <a:off x="6519672" y="2258568"/>
-            <a:ext cx="1828800" cy="292608"/>
+            <a:off x="365760" y="3273552"/>
+            <a:ext cx="1371600" cy="658368"/>
           </a:xfrm>
           <a:prstGeom prst="rect">
             <a:avLst>
-              <a:gd name="adj" fmla="val 25000"/>
+              <a:gd name="adj" fmla="val 8333"/>
             </a:avLst>
           </a:prstGeom>
           <a:solidFill>
-            <a:srgbClr val="FCE7F3"/>
-          </a:solidFill>
-          <a:ln w="19050">
-            <a:solidFill>
-              <a:srgbClr val="DB2777"/>
-            </a:solidFill>
-            <a:prstDash val="solid"/>
-          </a:ln>
-          <a:effectLst>
-            <a:outerShdw sx="100000" sy="100000" kx="0" ky="0" algn="bl" rotWithShape="0" blurRad="101600" dist="38100" dir="8100000">
-              <a:srgbClr val="000000">
-                <a:alpha val="12000"/>
-              </a:srgbClr>
-            </a:outerShdw>
-          </a:effectLst>
+            <a:srgbClr val="E2E8F0"/>
+          </a:solidFill>
+          <a:ln w="12700">
+            <a:solidFill>
+              <a:srgbClr val="E2E8F0"/>
+            </a:solidFill>
+            <a:prstDash val="solid"/>
+          </a:ln>
         </p:spPr>
       </p:sp>
       <p:sp>
@@ -25947,90 +25954,117 @@
         </p:nvSpPr>
         <p:spPr>
           <a:xfrm>
-            <a:off x="6519672" y="2258568"/>
-            <a:ext cx="1828800" cy="292608"/>
-          </a:xfrm>
-          <a:prstGeom prst="rect">
-            <a:avLst/>
-          </a:prstGeom>
-          <a:noFill/>
-          <a:ln/>
-        </p:spPr>
-        <p:txBody>
-          <a:bodyPr wrap="square" lIns="0" tIns="0" rIns="0" bIns="0" rtlCol="0" anchor="ctr"/>
-          <a:lstStyle/>
-          <a:p>
-            <a:pPr algn="ctr" indent="0" marL="0">
-              <a:buNone/>
-            </a:pPr>
-            <a:r>
-              <a:rPr lang="en-US" sz="1300" b="1" dirty="0">
-                <a:solidFill>
-                  <a:srgbClr val="9D174D"/>
+            <a:off x="365760" y="3273552"/>
+            <a:ext cx="1371600" cy="658368"/>
+          </a:xfrm>
+          <a:prstGeom prst="rect">
+            <a:avLst/>
+          </a:prstGeom>
+          <a:noFill/>
+          <a:ln/>
+        </p:spPr>
+        <p:txBody>
+          <a:bodyPr wrap="square" lIns="0" tIns="0" rIns="0" bIns="0" rtlCol="0" anchor="ctr"/>
+          <a:lstStyle/>
+          <a:p>
+            <a:pPr algn="ctr" indent="0" marL="0">
+              <a:buNone/>
+            </a:pPr>
+            <a:r>
+              <a:rPr lang="en-US" sz="1100" b="1" dirty="0">
+                <a:solidFill>
+                  <a:srgbClr val="475569"/>
                 </a:solidFill>
                 <a:latin typeface="Trebuchet MS" pitchFamily="34" charset="0"/>
                 <a:ea typeface="Trebuchet MS" pitchFamily="34" charset="-122"/>
                 <a:cs typeface="Trebuchet MS" pitchFamily="34" charset="-120"/>
               </a:rPr>
-              <a:t>s</a:t>
-            </a:r>
-            <a:endParaRPr lang="en-US" sz="1300" dirty="0"/>
-          </a:p>
-        </p:txBody>
-      </p:sp>
-      <p:sp>
-        <p:nvSpPr>
-          <p:cNvPr id="24" name="Text 22"/>
-          <p:cNvSpPr/>
-          <p:nvPr/>
-        </p:nvSpPr>
-        <p:spPr>
-          <a:xfrm>
-            <a:off x="6519672" y="2569464"/>
-            <a:ext cx="1828800" cy="201168"/>
-          </a:xfrm>
-          <a:prstGeom prst="rect">
-            <a:avLst/>
-          </a:prstGeom>
-          <a:noFill/>
-          <a:ln/>
-        </p:spPr>
-        <p:txBody>
-          <a:bodyPr wrap="square" lIns="0" tIns="0" rIns="0" bIns="0" rtlCol="0" anchor="t"/>
-          <a:lstStyle/>
-          <a:p>
-            <a:pPr algn="ctr" indent="0" marL="0">
-              <a:buNone/>
-            </a:pPr>
-            <a:r>
-              <a:rPr lang="en-US" sz="850" dirty="0">
-                <a:solidFill>
-                  <a:srgbClr val="475569"/>
+              <a:t>Syllables</a:t>
+            </a:r>
+            <a:endParaRPr lang="en-US" sz="1100" dirty="0"/>
+          </a:p>
+        </p:txBody>
+      </p:sp>
+      <p:sp>
+        <p:nvSpPr>
+          <p:cNvPr id="24" name="Shape 22"/>
+          <p:cNvSpPr/>
+          <p:nvPr/>
+        </p:nvSpPr>
+        <p:spPr>
+          <a:xfrm>
+            <a:off x="1874520" y="3273552"/>
+            <a:ext cx="6903720" cy="658368"/>
+          </a:xfrm>
+          <a:prstGeom prst="rect">
+            <a:avLst>
+              <a:gd name="adj" fmla="val 8333"/>
+            </a:avLst>
+          </a:prstGeom>
+          <a:solidFill>
+            <a:srgbClr val="F8FAFC"/>
+          </a:solidFill>
+          <a:ln w="12700">
+            <a:solidFill>
+              <a:srgbClr val="E2E8F0"/>
+            </a:solidFill>
+            <a:prstDash val="dash"/>
+          </a:ln>
+        </p:spPr>
+      </p:sp>
+      <p:sp>
+        <p:nvSpPr>
+          <p:cNvPr id="25" name="Text 23"/>
+          <p:cNvSpPr/>
+          <p:nvPr/>
+        </p:nvSpPr>
+        <p:spPr>
+          <a:xfrm>
+            <a:off x="1874520" y="3273552"/>
+            <a:ext cx="6903720" cy="658368"/>
+          </a:xfrm>
+          <a:prstGeom prst="rect">
+            <a:avLst/>
+          </a:prstGeom>
+          <a:noFill/>
+          <a:ln/>
+        </p:spPr>
+        <p:txBody>
+          <a:bodyPr wrap="square" rtlCol="0" anchor="ctr"/>
+          <a:lstStyle/>
+          <a:p>
+            <a:pPr algn="ctr" indent="0" marL="0">
+              <a:buNone/>
+            </a:pPr>
+            <a:r>
+              <a:rPr lang="en-US" sz="1100" i="1" dirty="0">
+                <a:solidFill>
+                  <a:srgbClr val="CBD5E1"/>
                 </a:solidFill>
                 <a:latin typeface="Calibri" pitchFamily="34" charset="0"/>
                 <a:ea typeface="Calibri" pitchFamily="34" charset="-122"/>
                 <a:cs typeface="Calibri" pitchFamily="34" charset="-120"/>
               </a:rPr>
-              <a:t>more than one</a:t>
-            </a:r>
-            <a:endParaRPr lang="en-US" sz="850" dirty="0"/>
-          </a:p>
-        </p:txBody>
-      </p:sp>
-      <p:sp>
-        <p:nvSpPr>
-          <p:cNvPr id="25" name="Shape 23"/>
-          <p:cNvSpPr/>
-          <p:nvPr/>
-        </p:nvSpPr>
-        <p:spPr>
-          <a:xfrm>
-            <a:off x="365760" y="3273552"/>
-            <a:ext cx="1371600" cy="658368"/>
+              <a:t>Write here...</a:t>
+            </a:r>
+            <a:endParaRPr lang="en-US" sz="1100" dirty="0"/>
+          </a:p>
+        </p:txBody>
+      </p:sp>
+      <p:sp>
+        <p:nvSpPr>
+          <p:cNvPr id="26" name="Shape 24"/>
+          <p:cNvSpPr/>
+          <p:nvPr/>
+        </p:nvSpPr>
+        <p:spPr>
+          <a:xfrm>
+            <a:off x="365760" y="4096512"/>
+            <a:ext cx="1371600" cy="804672"/>
           </a:xfrm>
           <a:prstGeom prst="rect">
             <a:avLst>
-              <a:gd name="adj" fmla="val 8333"/>
+              <a:gd name="adj" fmla="val 6818"/>
             </a:avLst>
           </a:prstGeom>
           <a:solidFill>
@@ -26046,14 +26080,14 @@
       </p:sp>
       <p:sp>
         <p:nvSpPr>
-          <p:cNvPr id="26" name="Text 24"/>
-          <p:cNvSpPr/>
-          <p:nvPr/>
-        </p:nvSpPr>
-        <p:spPr>
-          <a:xfrm>
-            <a:off x="365760" y="3273552"/>
-            <a:ext cx="1371600" cy="658368"/>
+          <p:cNvPr id="27" name="Text 25"/>
+          <p:cNvSpPr/>
+          <p:nvPr/>
+        </p:nvSpPr>
+        <p:spPr>
+          <a:xfrm>
+            <a:off x="365760" y="4096512"/>
+            <a:ext cx="1371600" cy="804672"/>
           </a:xfrm>
           <a:prstGeom prst="rect">
             <a:avLst/>
@@ -26077,7 +26111,7 @@
                 <a:ea typeface="Trebuchet MS" pitchFamily="34" charset="-122"/>
                 <a:cs typeface="Trebuchet MS" pitchFamily="34" charset="-120"/>
               </a:rPr>
-              <a:t>Syllables</a:t>
+              <a:t>Phonemes</a:t>
             </a:r>
             <a:endParaRPr lang="en-US" sz="1100" dirty="0"/>
           </a:p>
@@ -26085,80 +26119,14 @@
       </p:sp>
       <p:sp>
         <p:nvSpPr>
-          <p:cNvPr id="27" name="Shape 25"/>
-          <p:cNvSpPr/>
-          <p:nvPr/>
-        </p:nvSpPr>
-        <p:spPr>
-          <a:xfrm>
-            <a:off x="1874520" y="3273552"/>
-            <a:ext cx="6903720" cy="658368"/>
-          </a:xfrm>
-          <a:prstGeom prst="rect">
-            <a:avLst>
-              <a:gd name="adj" fmla="val 8333"/>
-            </a:avLst>
-          </a:prstGeom>
-          <a:solidFill>
-            <a:srgbClr val="F8FAFC"/>
-          </a:solidFill>
-          <a:ln w="12700">
-            <a:solidFill>
-              <a:srgbClr val="E2E8F0"/>
-            </a:solidFill>
-            <a:prstDash val="dash"/>
-          </a:ln>
-        </p:spPr>
-      </p:sp>
-      <p:sp>
-        <p:nvSpPr>
-          <p:cNvPr id="28" name="Text 26"/>
-          <p:cNvSpPr/>
-          <p:nvPr/>
-        </p:nvSpPr>
-        <p:spPr>
-          <a:xfrm>
-            <a:off x="1874520" y="3273552"/>
-            <a:ext cx="6903720" cy="658368"/>
-          </a:xfrm>
-          <a:prstGeom prst="rect">
-            <a:avLst/>
-          </a:prstGeom>
-          <a:noFill/>
-          <a:ln/>
-        </p:spPr>
-        <p:txBody>
-          <a:bodyPr wrap="square" rtlCol="0" anchor="ctr"/>
-          <a:lstStyle/>
-          <a:p>
-            <a:pPr algn="ctr" indent="0" marL="0">
-              <a:buNone/>
-            </a:pPr>
-            <a:r>
-              <a:rPr lang="en-US" sz="1100" i="1" dirty="0">
-                <a:solidFill>
-                  <a:srgbClr val="CBD5E1"/>
-                </a:solidFill>
-                <a:latin typeface="Calibri" pitchFamily="34" charset="0"/>
-                <a:ea typeface="Calibri" pitchFamily="34" charset="-122"/>
-                <a:cs typeface="Calibri" pitchFamily="34" charset="-120"/>
-              </a:rPr>
-              <a:t>Write here...</a:t>
-            </a:r>
-            <a:endParaRPr lang="en-US" sz="1100" dirty="0"/>
-          </a:p>
-        </p:txBody>
-      </p:sp>
-      <p:sp>
-        <p:nvSpPr>
-          <p:cNvPr id="29" name="Shape 27"/>
-          <p:cNvSpPr/>
-          <p:nvPr/>
-        </p:nvSpPr>
-        <p:spPr>
-          <a:xfrm>
-            <a:off x="365760" y="4096512"/>
-            <a:ext cx="1371600" cy="804672"/>
+          <p:cNvPr id="28" name="Shape 26"/>
+          <p:cNvSpPr/>
+          <p:nvPr/>
+        </p:nvSpPr>
+        <p:spPr>
+          <a:xfrm>
+            <a:off x="1874520" y="4096512"/>
+            <a:ext cx="6903720" cy="804672"/>
           </a:xfrm>
           <a:prstGeom prst="rect">
             <a:avLst>
@@ -26166,85 +26134,19 @@
             </a:avLst>
           </a:prstGeom>
           <a:solidFill>
-            <a:srgbClr val="E2E8F0"/>
+            <a:srgbClr val="F8FAFC"/>
           </a:solidFill>
           <a:ln w="12700">
             <a:solidFill>
               <a:srgbClr val="E2E8F0"/>
             </a:solidFill>
-            <a:prstDash val="solid"/>
-          </a:ln>
-        </p:spPr>
-      </p:sp>
-      <p:sp>
-        <p:nvSpPr>
-          <p:cNvPr id="30" name="Text 28"/>
-          <p:cNvSpPr/>
-          <p:nvPr/>
-        </p:nvSpPr>
-        <p:spPr>
-          <a:xfrm>
-            <a:off x="365760" y="4096512"/>
-            <a:ext cx="1371600" cy="804672"/>
-          </a:xfrm>
-          <a:prstGeom prst="rect">
-            <a:avLst/>
-          </a:prstGeom>
-          <a:noFill/>
-          <a:ln/>
-        </p:spPr>
-        <p:txBody>
-          <a:bodyPr wrap="square" lIns="0" tIns="0" rIns="0" bIns="0" rtlCol="0" anchor="ctr"/>
-          <a:lstStyle/>
-          <a:p>
-            <a:pPr algn="ctr" indent="0" marL="0">
-              <a:buNone/>
-            </a:pPr>
-            <a:r>
-              <a:rPr lang="en-US" sz="1100" b="1" dirty="0">
-                <a:solidFill>
-                  <a:srgbClr val="475569"/>
-                </a:solidFill>
-                <a:latin typeface="Trebuchet MS" pitchFamily="34" charset="0"/>
-                <a:ea typeface="Trebuchet MS" pitchFamily="34" charset="-122"/>
-                <a:cs typeface="Trebuchet MS" pitchFamily="34" charset="-120"/>
-              </a:rPr>
-              <a:t>Phonemes</a:t>
-            </a:r>
-            <a:endParaRPr lang="en-US" sz="1100" dirty="0"/>
-          </a:p>
-        </p:txBody>
-      </p:sp>
-      <p:sp>
-        <p:nvSpPr>
-          <p:cNvPr id="31" name="Shape 29"/>
-          <p:cNvSpPr/>
-          <p:nvPr/>
-        </p:nvSpPr>
-        <p:spPr>
-          <a:xfrm>
-            <a:off x="1874520" y="4096512"/>
-            <a:ext cx="6903720" cy="804672"/>
-          </a:xfrm>
-          <a:prstGeom prst="rect">
-            <a:avLst>
-              <a:gd name="adj" fmla="val 6818"/>
-            </a:avLst>
-          </a:prstGeom>
-          <a:solidFill>
-            <a:srgbClr val="F8FAFC"/>
-          </a:solidFill>
-          <a:ln w="12700">
-            <a:solidFill>
-              <a:srgbClr val="E2E8F0"/>
-            </a:solidFill>
             <a:prstDash val="dash"/>
           </a:ln>
         </p:spPr>
       </p:sp>
       <p:sp>
         <p:nvSpPr>
-          <p:cNvPr id="32" name="Text 30"/>
+          <p:cNvPr id="29" name="Text 27"/>
           <p:cNvSpPr/>
           <p:nvPr/>
         </p:nvSpPr>
@@ -26567,7 +26469,7 @@
                 <a:ea typeface="Calibri" pitchFamily="34" charset="-122"/>
                 <a:cs typeface="Calibri" pitchFamily="34" charset="-120"/>
               </a:rPr>
-              <a:t>Word Labs  •  wordlabs.app  •  Root: 'develop' = to grow or build up</a:t>
+              <a:t>Word Labs  •  wordlabs.app  •  Root: 'develop' = to grow or unfold gradually</a:t>
             </a:r>
             <a:endParaRPr lang="en-US" sz="800" dirty="0"/>
           </a:p>
@@ -26640,7 +26542,7 @@
                 <a:ea typeface="Trebuchet MS" pitchFamily="34" charset="-122"/>
                 <a:cs typeface="Trebuchet MS" pitchFamily="34" charset="-120"/>
               </a:rPr>
-              <a:t>We are learning that the root 'develop' means 'to grow or build up'.</a:t>
+              <a:t>We are learning that the root 'develop' means 'to grow or unfold gradually'.</a:t>
             </a:r>
             <a:endParaRPr lang="en-US" sz="2000" dirty="0"/>
           </a:p>
@@ -27286,7 +27188,7 @@
                 <a:ea typeface="Calibri" pitchFamily="34" charset="-122"/>
                 <a:cs typeface="Calibri" pitchFamily="34" charset="-120"/>
               </a:rPr>
-              <a:t>Word Labs  •  wordlabs.app  •  Root: 'develop' = to grow or build up</a:t>
+              <a:t>Word Labs  •  wordlabs.app  •  Root: 'develop' = to grow or unfold gradually</a:t>
             </a:r>
             <a:endParaRPr lang="en-US" sz="800" dirty="0"/>
           </a:p>
@@ -27425,7 +27327,7 @@
                 <a:ea typeface="Trebuchet MS" pitchFamily="34" charset="-122"/>
                 <a:cs typeface="Trebuchet MS" pitchFamily="34" charset="-120"/>
               </a:rPr>
-              <a:t>developers</a:t>
+              <a:t>developing</a:t>
             </a:r>
             <a:endParaRPr lang="en-US" sz="2800" dirty="0"/>
           </a:p>
@@ -27505,7 +27407,7 @@
         </p:nvSpPr>
         <p:spPr>
           <a:xfrm>
-            <a:off x="2221992" y="2258568"/>
+            <a:off x="2938272" y="2258568"/>
             <a:ext cx="1828800" cy="292608"/>
           </a:xfrm>
           <a:prstGeom prst="rect">
@@ -27539,7 +27441,7 @@
         </p:nvSpPr>
         <p:spPr>
           <a:xfrm>
-            <a:off x="2221992" y="2258568"/>
+            <a:off x="2938272" y="2258568"/>
             <a:ext cx="1828800" cy="292608"/>
           </a:xfrm>
           <a:prstGeom prst="rect">
@@ -27578,7 +27480,7 @@
         </p:nvSpPr>
         <p:spPr>
           <a:xfrm>
-            <a:off x="2221992" y="2569464"/>
+            <a:off x="2938272" y="2569464"/>
             <a:ext cx="1828800" cy="201168"/>
           </a:xfrm>
           <a:prstGeom prst="rect">
@@ -27603,7 +27505,7 @@
                 <a:ea typeface="Calibri" pitchFamily="34" charset="-122"/>
                 <a:cs typeface="Calibri" pitchFamily="34" charset="-120"/>
               </a:rPr>
-              <a:t>to grow or build up</a:t>
+              <a:t>to grow or build gradually</a:t>
             </a:r>
             <a:endParaRPr lang="en-US" sz="850" dirty="0"/>
           </a:p>
@@ -27617,7 +27519,7 @@
         </p:nvSpPr>
         <p:spPr>
           <a:xfrm>
-            <a:off x="4370832" y="2258568"/>
+            <a:off x="5803392" y="2258568"/>
             <a:ext cx="1828800" cy="292608"/>
           </a:xfrm>
           <a:prstGeom prst="rect">
@@ -27651,7 +27553,7 @@
         </p:nvSpPr>
         <p:spPr>
           <a:xfrm>
-            <a:off x="4370832" y="2258568"/>
+            <a:off x="5803392" y="2258568"/>
             <a:ext cx="1828800" cy="292608"/>
           </a:xfrm>
           <a:prstGeom prst="rect">
@@ -27676,7 +27578,7 @@
                 <a:ea typeface="Trebuchet MS" pitchFamily="34" charset="-122"/>
                 <a:cs typeface="Trebuchet MS" pitchFamily="34" charset="-120"/>
               </a:rPr>
-              <a:t>er</a:t>
+              <a:t>ing</a:t>
             </a:r>
             <a:endParaRPr lang="en-US" sz="1300" dirty="0"/>
           </a:p>
@@ -27690,7 +27592,7 @@
         </p:nvSpPr>
         <p:spPr>
           <a:xfrm>
-            <a:off x="4370832" y="2569464"/>
+            <a:off x="5803392" y="2569464"/>
             <a:ext cx="1828800" cy="201168"/>
           </a:xfrm>
           <a:prstGeom prst="rect">
@@ -27715,7 +27617,7 @@
                 <a:ea typeface="Calibri" pitchFamily="34" charset="-122"/>
                 <a:cs typeface="Calibri" pitchFamily="34" charset="-120"/>
               </a:rPr>
-              <a:t>a person who does something</a:t>
+              <a:t>happening right now</a:t>
             </a:r>
             <a:endParaRPr lang="en-US" sz="850" dirty="0"/>
           </a:p>
@@ -27729,30 +27631,23 @@
         </p:nvSpPr>
         <p:spPr>
           <a:xfrm>
-            <a:off x="6519672" y="2258568"/>
-            <a:ext cx="1828800" cy="292608"/>
+            <a:off x="365760" y="3273552"/>
+            <a:ext cx="1371600" cy="658368"/>
           </a:xfrm>
           <a:prstGeom prst="rect">
             <a:avLst>
-              <a:gd name="adj" fmla="val 25000"/>
+              <a:gd name="adj" fmla="val 8333"/>
             </a:avLst>
           </a:prstGeom>
           <a:solidFill>
-            <a:srgbClr val="FCE7F3"/>
-          </a:solidFill>
-          <a:ln w="19050">
-            <a:solidFill>
-              <a:srgbClr val="DB2777"/>
-            </a:solidFill>
-            <a:prstDash val="solid"/>
-          </a:ln>
-          <a:effectLst>
-            <a:outerShdw sx="100000" sy="100000" kx="0" ky="0" algn="bl" rotWithShape="0" blurRad="101600" dist="38100" dir="8100000">
-              <a:srgbClr val="000000">
-                <a:alpha val="12000"/>
-              </a:srgbClr>
-            </a:outerShdw>
-          </a:effectLst>
+            <a:srgbClr val="E2E8F0"/>
+          </a:solidFill>
+          <a:ln w="12700">
+            <a:solidFill>
+              <a:srgbClr val="E2E8F0"/>
+            </a:solidFill>
+            <a:prstDash val="solid"/>
+          </a:ln>
         </p:spPr>
       </p:sp>
       <p:sp>
@@ -27763,86 +27658,47 @@
         </p:nvSpPr>
         <p:spPr>
           <a:xfrm>
-            <a:off x="6519672" y="2258568"/>
-            <a:ext cx="1828800" cy="292608"/>
-          </a:xfrm>
-          <a:prstGeom prst="rect">
-            <a:avLst/>
-          </a:prstGeom>
-          <a:noFill/>
-          <a:ln/>
-        </p:spPr>
-        <p:txBody>
-          <a:bodyPr wrap="square" lIns="0" tIns="0" rIns="0" bIns="0" rtlCol="0" anchor="ctr"/>
-          <a:lstStyle/>
-          <a:p>
-            <a:pPr algn="ctr" indent="0" marL="0">
-              <a:buNone/>
-            </a:pPr>
-            <a:r>
-              <a:rPr lang="en-US" sz="1300" b="1" dirty="0">
-                <a:solidFill>
-                  <a:srgbClr val="9D174D"/>
+            <a:off x="365760" y="3273552"/>
+            <a:ext cx="1371600" cy="658368"/>
+          </a:xfrm>
+          <a:prstGeom prst="rect">
+            <a:avLst/>
+          </a:prstGeom>
+          <a:noFill/>
+          <a:ln/>
+        </p:spPr>
+        <p:txBody>
+          <a:bodyPr wrap="square" lIns="0" tIns="0" rIns="0" bIns="0" rtlCol="0" anchor="ctr"/>
+          <a:lstStyle/>
+          <a:p>
+            <a:pPr algn="ctr" indent="0" marL="0">
+              <a:buNone/>
+            </a:pPr>
+            <a:r>
+              <a:rPr lang="en-US" sz="1100" b="1" dirty="0">
+                <a:solidFill>
+                  <a:srgbClr val="475569"/>
                 </a:solidFill>
                 <a:latin typeface="Trebuchet MS" pitchFamily="34" charset="0"/>
                 <a:ea typeface="Trebuchet MS" pitchFamily="34" charset="-122"/>
                 <a:cs typeface="Trebuchet MS" pitchFamily="34" charset="-120"/>
               </a:rPr>
-              <a:t>s</a:t>
-            </a:r>
-            <a:endParaRPr lang="en-US" sz="1300" dirty="0"/>
-          </a:p>
-        </p:txBody>
-      </p:sp>
-      <p:sp>
-        <p:nvSpPr>
-          <p:cNvPr id="24" name="Text 22"/>
-          <p:cNvSpPr/>
-          <p:nvPr/>
-        </p:nvSpPr>
-        <p:spPr>
-          <a:xfrm>
-            <a:off x="6519672" y="2569464"/>
-            <a:ext cx="1828800" cy="201168"/>
-          </a:xfrm>
-          <a:prstGeom prst="rect">
-            <a:avLst/>
-          </a:prstGeom>
-          <a:noFill/>
-          <a:ln/>
-        </p:spPr>
-        <p:txBody>
-          <a:bodyPr wrap="square" lIns="0" tIns="0" rIns="0" bIns="0" rtlCol="0" anchor="t"/>
-          <a:lstStyle/>
-          <a:p>
-            <a:pPr algn="ctr" indent="0" marL="0">
-              <a:buNone/>
-            </a:pPr>
-            <a:r>
-              <a:rPr lang="en-US" sz="850" dirty="0">
-                <a:solidFill>
-                  <a:srgbClr val="475569"/>
-                </a:solidFill>
-                <a:latin typeface="Calibri" pitchFamily="34" charset="0"/>
-                <a:ea typeface="Calibri" pitchFamily="34" charset="-122"/>
-                <a:cs typeface="Calibri" pitchFamily="34" charset="-120"/>
-              </a:rPr>
-              <a:t>more than one</a:t>
-            </a:r>
-            <a:endParaRPr lang="en-US" sz="850" dirty="0"/>
-          </a:p>
-        </p:txBody>
-      </p:sp>
-      <p:sp>
-        <p:nvSpPr>
-          <p:cNvPr id="25" name="Shape 23"/>
-          <p:cNvSpPr/>
-          <p:nvPr/>
-        </p:nvSpPr>
-        <p:spPr>
-          <a:xfrm>
-            <a:off x="365760" y="3273552"/>
-            <a:ext cx="1371600" cy="658368"/>
+              <a:t>Syllables</a:t>
+            </a:r>
+            <a:endParaRPr lang="en-US" sz="1100" dirty="0"/>
+          </a:p>
+        </p:txBody>
+      </p:sp>
+      <p:sp>
+        <p:nvSpPr>
+          <p:cNvPr id="24" name="Shape 22"/>
+          <p:cNvSpPr/>
+          <p:nvPr/>
+        </p:nvSpPr>
+        <p:spPr>
+          <a:xfrm>
+            <a:off x="1874520" y="3273552"/>
+            <a:ext cx="6903720" cy="658368"/>
           </a:xfrm>
           <a:prstGeom prst="rect">
             <a:avLst>
@@ -27850,11 +27706,38 @@
             </a:avLst>
           </a:prstGeom>
           <a:solidFill>
-            <a:srgbClr val="E2E8F0"/>
-          </a:solidFill>
-          <a:ln w="12700">
-            <a:solidFill>
-              <a:srgbClr val="E2E8F0"/>
+            <a:srgbClr val="CCFBF1"/>
+          </a:solidFill>
+          <a:ln w="12700">
+            <a:solidFill>
+              <a:srgbClr val="0D9488"/>
+            </a:solidFill>
+            <a:prstDash val="solid"/>
+          </a:ln>
+        </p:spPr>
+      </p:sp>
+      <p:sp>
+        <p:nvSpPr>
+          <p:cNvPr id="25" name="Shape 23"/>
+          <p:cNvSpPr/>
+          <p:nvPr/>
+        </p:nvSpPr>
+        <p:spPr>
+          <a:xfrm>
+            <a:off x="1975104" y="3364992"/>
+            <a:ext cx="1554480" cy="475488"/>
+          </a:xfrm>
+          <a:prstGeom prst="rect">
+            <a:avLst>
+              <a:gd name="adj" fmla="val 9615"/>
+            </a:avLst>
+          </a:prstGeom>
+          <a:solidFill>
+            <a:srgbClr val="FFFFFF"/>
+          </a:solidFill>
+          <a:ln w="12700">
+            <a:solidFill>
+              <a:srgbClr val="0D9488"/>
             </a:solidFill>
             <a:prstDash val="solid"/>
           </a:ln>
@@ -27868,63 +27751,75 @@
         </p:nvSpPr>
         <p:spPr>
           <a:xfrm>
-            <a:off x="365760" y="3273552"/>
-            <a:ext cx="1371600" cy="658368"/>
-          </a:xfrm>
-          <a:prstGeom prst="rect">
-            <a:avLst/>
-          </a:prstGeom>
-          <a:noFill/>
-          <a:ln/>
-        </p:spPr>
-        <p:txBody>
-          <a:bodyPr wrap="square" lIns="0" tIns="0" rIns="0" bIns="0" rtlCol="0" anchor="ctr"/>
-          <a:lstStyle/>
-          <a:p>
-            <a:pPr algn="ctr" indent="0" marL="0">
-              <a:buNone/>
-            </a:pPr>
-            <a:r>
-              <a:rPr lang="en-US" sz="1100" b="1" dirty="0">
-                <a:solidFill>
-                  <a:srgbClr val="475569"/>
+            <a:off x="1975104" y="3364992"/>
+            <a:ext cx="1554480" cy="475488"/>
+          </a:xfrm>
+          <a:prstGeom prst="rect">
+            <a:avLst/>
+          </a:prstGeom>
+          <a:noFill/>
+          <a:ln/>
+        </p:spPr>
+        <p:txBody>
+          <a:bodyPr wrap="square" lIns="0" tIns="0" rIns="0" bIns="0" rtlCol="0" anchor="ctr"/>
+          <a:lstStyle/>
+          <a:p>
+            <a:pPr algn="ctr" indent="0" marL="0">
+              <a:buNone/>
+            </a:pPr>
+            <a:r>
+              <a:rPr lang="en-US" sz="1400" b="1" dirty="0">
+                <a:solidFill>
+                  <a:srgbClr val="0D9488"/>
                 </a:solidFill>
                 <a:latin typeface="Trebuchet MS" pitchFamily="34" charset="0"/>
                 <a:ea typeface="Trebuchet MS" pitchFamily="34" charset="-122"/>
                 <a:cs typeface="Trebuchet MS" pitchFamily="34" charset="-120"/>
               </a:rPr>
-              <a:t>Syllables</a:t>
-            </a:r>
-            <a:endParaRPr lang="en-US" sz="1100" dirty="0"/>
-          </a:p>
-        </p:txBody>
-      </p:sp>
-      <p:sp>
-        <p:nvSpPr>
-          <p:cNvPr id="27" name="Shape 25"/>
-          <p:cNvSpPr/>
-          <p:nvPr/>
-        </p:nvSpPr>
-        <p:spPr>
-          <a:xfrm>
-            <a:off x="1874520" y="3273552"/>
-            <a:ext cx="6903720" cy="658368"/>
-          </a:xfrm>
-          <a:prstGeom prst="rect">
-            <a:avLst>
-              <a:gd name="adj" fmla="val 8333"/>
-            </a:avLst>
-          </a:prstGeom>
-          <a:solidFill>
-            <a:srgbClr val="CCFBF1"/>
-          </a:solidFill>
-          <a:ln w="12700">
-            <a:solidFill>
-              <a:srgbClr val="0D9488"/>
-            </a:solidFill>
-            <a:prstDash val="solid"/>
-          </a:ln>
-        </p:spPr>
+              <a:t>de</a:t>
+            </a:r>
+            <a:endParaRPr lang="en-US" sz="1400" dirty="0"/>
+          </a:p>
+        </p:txBody>
+      </p:sp>
+      <p:sp>
+        <p:nvSpPr>
+          <p:cNvPr id="27" name="Text 25"/>
+          <p:cNvSpPr/>
+          <p:nvPr/>
+        </p:nvSpPr>
+        <p:spPr>
+          <a:xfrm>
+            <a:off x="3529584" y="3364992"/>
+            <a:ext cx="73152" cy="475488"/>
+          </a:xfrm>
+          <a:prstGeom prst="rect">
+            <a:avLst/>
+          </a:prstGeom>
+          <a:noFill/>
+          <a:ln/>
+        </p:spPr>
+        <p:txBody>
+          <a:bodyPr wrap="square" lIns="0" tIns="0" rIns="0" bIns="0" rtlCol="0" anchor="ctr"/>
+          <a:lstStyle/>
+          <a:p>
+            <a:pPr algn="ctr" indent="0" marL="0">
+              <a:buNone/>
+            </a:pPr>
+            <a:r>
+              <a:rPr lang="en-US" sz="1600" b="1" dirty="0">
+                <a:solidFill>
+                  <a:srgbClr val="0D9488"/>
+                </a:solidFill>
+                <a:latin typeface="Trebuchet MS" pitchFamily="34" charset="0"/>
+                <a:ea typeface="Trebuchet MS" pitchFamily="34" charset="-122"/>
+                <a:cs typeface="Trebuchet MS" pitchFamily="34" charset="-120"/>
+              </a:rPr>
+              <a:t>·</a:t>
+            </a:r>
+            <a:endParaRPr lang="en-US" sz="1600" dirty="0"/>
+          </a:p>
+        </p:txBody>
       </p:sp>
       <p:sp>
         <p:nvSpPr>
@@ -27934,7 +27829,7 @@
         </p:nvSpPr>
         <p:spPr>
           <a:xfrm>
-            <a:off x="1975104" y="3364992"/>
+            <a:off x="3602736" y="3364992"/>
             <a:ext cx="1554480" cy="475488"/>
           </a:xfrm>
           <a:prstGeom prst="rect">
@@ -27961,7 +27856,7 @@
         </p:nvSpPr>
         <p:spPr>
           <a:xfrm>
-            <a:off x="1975104" y="3364992"/>
+            <a:off x="3602736" y="3364992"/>
             <a:ext cx="1554480" cy="475488"/>
           </a:xfrm>
           <a:prstGeom prst="rect">
@@ -27986,7 +27881,7 @@
                 <a:ea typeface="Trebuchet MS" pitchFamily="34" charset="-122"/>
                 <a:cs typeface="Trebuchet MS" pitchFamily="34" charset="-120"/>
               </a:rPr>
-              <a:t>de</a:t>
+              <a:t>vel</a:t>
             </a:r>
             <a:endParaRPr lang="en-US" sz="1400" dirty="0"/>
           </a:p>
@@ -28000,7 +27895,7 @@
         </p:nvSpPr>
         <p:spPr>
           <a:xfrm>
-            <a:off x="3529584" y="3364992"/>
+            <a:off x="5157216" y="3364992"/>
             <a:ext cx="73152" cy="475488"/>
           </a:xfrm>
           <a:prstGeom prst="rect">
@@ -28039,7 +27934,7 @@
         </p:nvSpPr>
         <p:spPr>
           <a:xfrm>
-            <a:off x="3602736" y="3364992"/>
+            <a:off x="5230368" y="3364992"/>
             <a:ext cx="1554480" cy="475488"/>
           </a:xfrm>
           <a:prstGeom prst="rect">
@@ -28066,7 +27961,7 @@
         </p:nvSpPr>
         <p:spPr>
           <a:xfrm>
-            <a:off x="3602736" y="3364992"/>
+            <a:off x="5230368" y="3364992"/>
             <a:ext cx="1554480" cy="475488"/>
           </a:xfrm>
           <a:prstGeom prst="rect">
@@ -28091,7 +27986,7 @@
                 <a:ea typeface="Trebuchet MS" pitchFamily="34" charset="-122"/>
                 <a:cs typeface="Trebuchet MS" pitchFamily="34" charset="-120"/>
               </a:rPr>
-              <a:t>vel</a:t>
+              <a:t>op</a:t>
             </a:r>
             <a:endParaRPr lang="en-US" sz="1400" dirty="0"/>
           </a:p>
@@ -28105,7 +28000,7 @@
         </p:nvSpPr>
         <p:spPr>
           <a:xfrm>
-            <a:off x="5157216" y="3364992"/>
+            <a:off x="6784848" y="3364992"/>
             <a:ext cx="73152" cy="475488"/>
           </a:xfrm>
           <a:prstGeom prst="rect">
@@ -28144,7 +28039,7 @@
         </p:nvSpPr>
         <p:spPr>
           <a:xfrm>
-            <a:off x="5230368" y="3364992"/>
+            <a:off x="6858000" y="3364992"/>
             <a:ext cx="1554480" cy="475488"/>
           </a:xfrm>
           <a:prstGeom prst="rect">
@@ -28171,7 +28066,7 @@
         </p:nvSpPr>
         <p:spPr>
           <a:xfrm>
-            <a:off x="5230368" y="3364992"/>
+            <a:off x="6858000" y="3364992"/>
             <a:ext cx="1554480" cy="475488"/>
           </a:xfrm>
           <a:prstGeom prst="rect">
@@ -28196,7 +28091,7 @@
                 <a:ea typeface="Trebuchet MS" pitchFamily="34" charset="-122"/>
                 <a:cs typeface="Trebuchet MS" pitchFamily="34" charset="-120"/>
               </a:rPr>
-              <a:t>op</a:t>
+              <a:t>ing</a:t>
             </a:r>
             <a:endParaRPr lang="en-US" sz="1400" dirty="0"/>
           </a:p>
@@ -28204,119 +28099,80 @@
       </p:sp>
       <p:sp>
         <p:nvSpPr>
-          <p:cNvPr id="36" name="Text 34"/>
-          <p:cNvSpPr/>
-          <p:nvPr/>
-        </p:nvSpPr>
-        <p:spPr>
-          <a:xfrm>
-            <a:off x="6784848" y="3364992"/>
-            <a:ext cx="73152" cy="475488"/>
-          </a:xfrm>
-          <a:prstGeom prst="rect">
-            <a:avLst/>
-          </a:prstGeom>
-          <a:noFill/>
-          <a:ln/>
-        </p:spPr>
-        <p:txBody>
-          <a:bodyPr wrap="square" lIns="0" tIns="0" rIns="0" bIns="0" rtlCol="0" anchor="ctr"/>
-          <a:lstStyle/>
-          <a:p>
-            <a:pPr algn="ctr" indent="0" marL="0">
-              <a:buNone/>
-            </a:pPr>
-            <a:r>
-              <a:rPr lang="en-US" sz="1600" b="1" dirty="0">
-                <a:solidFill>
-                  <a:srgbClr val="0D9488"/>
+          <p:cNvPr id="36" name="Shape 34"/>
+          <p:cNvSpPr/>
+          <p:nvPr/>
+        </p:nvSpPr>
+        <p:spPr>
+          <a:xfrm>
+            <a:off x="365760" y="4096512"/>
+            <a:ext cx="1371600" cy="804672"/>
+          </a:xfrm>
+          <a:prstGeom prst="rect">
+            <a:avLst>
+              <a:gd name="adj" fmla="val 6818"/>
+            </a:avLst>
+          </a:prstGeom>
+          <a:solidFill>
+            <a:srgbClr val="E2E8F0"/>
+          </a:solidFill>
+          <a:ln w="12700">
+            <a:solidFill>
+              <a:srgbClr val="E2E8F0"/>
+            </a:solidFill>
+            <a:prstDash val="solid"/>
+          </a:ln>
+        </p:spPr>
+      </p:sp>
+      <p:sp>
+        <p:nvSpPr>
+          <p:cNvPr id="37" name="Text 35"/>
+          <p:cNvSpPr/>
+          <p:nvPr/>
+        </p:nvSpPr>
+        <p:spPr>
+          <a:xfrm>
+            <a:off x="365760" y="4096512"/>
+            <a:ext cx="1371600" cy="804672"/>
+          </a:xfrm>
+          <a:prstGeom prst="rect">
+            <a:avLst/>
+          </a:prstGeom>
+          <a:noFill/>
+          <a:ln/>
+        </p:spPr>
+        <p:txBody>
+          <a:bodyPr wrap="square" lIns="0" tIns="0" rIns="0" bIns="0" rtlCol="0" anchor="ctr"/>
+          <a:lstStyle/>
+          <a:p>
+            <a:pPr algn="ctr" indent="0" marL="0">
+              <a:buNone/>
+            </a:pPr>
+            <a:r>
+              <a:rPr lang="en-US" sz="1100" b="1" dirty="0">
+                <a:solidFill>
+                  <a:srgbClr val="475569"/>
                 </a:solidFill>
                 <a:latin typeface="Trebuchet MS" pitchFamily="34" charset="0"/>
                 <a:ea typeface="Trebuchet MS" pitchFamily="34" charset="-122"/>
                 <a:cs typeface="Trebuchet MS" pitchFamily="34" charset="-120"/>
               </a:rPr>
-              <a:t>·</a:t>
-            </a:r>
-            <a:endParaRPr lang="en-US" sz="1600" dirty="0"/>
-          </a:p>
-        </p:txBody>
-      </p:sp>
-      <p:sp>
-        <p:nvSpPr>
-          <p:cNvPr id="37" name="Shape 35"/>
-          <p:cNvSpPr/>
-          <p:nvPr/>
-        </p:nvSpPr>
-        <p:spPr>
-          <a:xfrm>
-            <a:off x="6858000" y="3364992"/>
-            <a:ext cx="1554480" cy="475488"/>
-          </a:xfrm>
-          <a:prstGeom prst="rect">
-            <a:avLst>
-              <a:gd name="adj" fmla="val 9615"/>
-            </a:avLst>
-          </a:prstGeom>
-          <a:solidFill>
-            <a:srgbClr val="FFFFFF"/>
-          </a:solidFill>
-          <a:ln w="12700">
-            <a:solidFill>
-              <a:srgbClr val="0D9488"/>
-            </a:solidFill>
-            <a:prstDash val="solid"/>
-          </a:ln>
-        </p:spPr>
-      </p:sp>
-      <p:sp>
-        <p:nvSpPr>
-          <p:cNvPr id="38" name="Text 36"/>
-          <p:cNvSpPr/>
-          <p:nvPr/>
-        </p:nvSpPr>
-        <p:spPr>
-          <a:xfrm>
-            <a:off x="6858000" y="3364992"/>
-            <a:ext cx="1554480" cy="475488"/>
-          </a:xfrm>
-          <a:prstGeom prst="rect">
-            <a:avLst/>
-          </a:prstGeom>
-          <a:noFill/>
-          <a:ln/>
-        </p:spPr>
-        <p:txBody>
-          <a:bodyPr wrap="square" lIns="0" tIns="0" rIns="0" bIns="0" rtlCol="0" anchor="ctr"/>
-          <a:lstStyle/>
-          <a:p>
-            <a:pPr algn="ctr" indent="0" marL="0">
-              <a:buNone/>
-            </a:pPr>
-            <a:r>
-              <a:rPr lang="en-US" sz="1400" b="1" dirty="0">
-                <a:solidFill>
-                  <a:srgbClr val="0D9488"/>
-                </a:solidFill>
-                <a:latin typeface="Trebuchet MS" pitchFamily="34" charset="0"/>
-                <a:ea typeface="Trebuchet MS" pitchFamily="34" charset="-122"/>
-                <a:cs typeface="Trebuchet MS" pitchFamily="34" charset="-120"/>
-              </a:rPr>
-              <a:t>ers</a:t>
-            </a:r>
-            <a:endParaRPr lang="en-US" sz="1400" dirty="0"/>
-          </a:p>
-        </p:txBody>
-      </p:sp>
-      <p:sp>
-        <p:nvSpPr>
-          <p:cNvPr id="39" name="Shape 37"/>
-          <p:cNvSpPr/>
-          <p:nvPr/>
-        </p:nvSpPr>
-        <p:spPr>
-          <a:xfrm>
-            <a:off x="365760" y="4096512"/>
-            <a:ext cx="1371600" cy="804672"/>
+              <a:t>Phonemes</a:t>
+            </a:r>
+            <a:endParaRPr lang="en-US" sz="1100" dirty="0"/>
+          </a:p>
+        </p:txBody>
+      </p:sp>
+      <p:sp>
+        <p:nvSpPr>
+          <p:cNvPr id="38" name="Shape 36"/>
+          <p:cNvSpPr/>
+          <p:nvPr/>
+        </p:nvSpPr>
+        <p:spPr>
+          <a:xfrm>
+            <a:off x="1874520" y="4096512"/>
+            <a:ext cx="6903720" cy="804672"/>
           </a:xfrm>
           <a:prstGeom prst="rect">
             <a:avLst>
@@ -28324,85 +28180,19 @@
             </a:avLst>
           </a:prstGeom>
           <a:solidFill>
-            <a:srgbClr val="E2E8F0"/>
+            <a:srgbClr val="F8FAFC"/>
           </a:solidFill>
           <a:ln w="12700">
             <a:solidFill>
               <a:srgbClr val="E2E8F0"/>
             </a:solidFill>
-            <a:prstDash val="solid"/>
-          </a:ln>
-        </p:spPr>
-      </p:sp>
-      <p:sp>
-        <p:nvSpPr>
-          <p:cNvPr id="40" name="Text 38"/>
-          <p:cNvSpPr/>
-          <p:nvPr/>
-        </p:nvSpPr>
-        <p:spPr>
-          <a:xfrm>
-            <a:off x="365760" y="4096512"/>
-            <a:ext cx="1371600" cy="804672"/>
-          </a:xfrm>
-          <a:prstGeom prst="rect">
-            <a:avLst/>
-          </a:prstGeom>
-          <a:noFill/>
-          <a:ln/>
-        </p:spPr>
-        <p:txBody>
-          <a:bodyPr wrap="square" lIns="0" tIns="0" rIns="0" bIns="0" rtlCol="0" anchor="ctr"/>
-          <a:lstStyle/>
-          <a:p>
-            <a:pPr algn="ctr" indent="0" marL="0">
-              <a:buNone/>
-            </a:pPr>
-            <a:r>
-              <a:rPr lang="en-US" sz="1100" b="1" dirty="0">
-                <a:solidFill>
-                  <a:srgbClr val="475569"/>
-                </a:solidFill>
-                <a:latin typeface="Trebuchet MS" pitchFamily="34" charset="0"/>
-                <a:ea typeface="Trebuchet MS" pitchFamily="34" charset="-122"/>
-                <a:cs typeface="Trebuchet MS" pitchFamily="34" charset="-120"/>
-              </a:rPr>
-              <a:t>Phonemes</a:t>
-            </a:r>
-            <a:endParaRPr lang="en-US" sz="1100" dirty="0"/>
-          </a:p>
-        </p:txBody>
-      </p:sp>
-      <p:sp>
-        <p:nvSpPr>
-          <p:cNvPr id="41" name="Shape 39"/>
-          <p:cNvSpPr/>
-          <p:nvPr/>
-        </p:nvSpPr>
-        <p:spPr>
-          <a:xfrm>
-            <a:off x="1874520" y="4096512"/>
-            <a:ext cx="6903720" cy="804672"/>
-          </a:xfrm>
-          <a:prstGeom prst="rect">
-            <a:avLst>
-              <a:gd name="adj" fmla="val 6818"/>
-            </a:avLst>
-          </a:prstGeom>
-          <a:solidFill>
-            <a:srgbClr val="F8FAFC"/>
-          </a:solidFill>
-          <a:ln w="12700">
-            <a:solidFill>
-              <a:srgbClr val="E2E8F0"/>
-            </a:solidFill>
             <a:prstDash val="dash"/>
           </a:ln>
         </p:spPr>
       </p:sp>
       <p:sp>
         <p:nvSpPr>
-          <p:cNvPr id="42" name="Text 40"/>
+          <p:cNvPr id="39" name="Text 37"/>
           <p:cNvSpPr/>
           <p:nvPr/>
         </p:nvSpPr>
@@ -28725,7 +28515,7 @@
                 <a:ea typeface="Calibri" pitchFamily="34" charset="-122"/>
                 <a:cs typeface="Calibri" pitchFamily="34" charset="-120"/>
               </a:rPr>
-              <a:t>Word Labs  •  wordlabs.app  •  Root: 'develop' = to grow or build up</a:t>
+              <a:t>Word Labs  •  wordlabs.app  •  Root: 'develop' = to grow or unfold gradually</a:t>
             </a:r>
             <a:endParaRPr lang="en-US" sz="800" dirty="0"/>
           </a:p>
@@ -28864,7 +28654,7 @@
                 <a:ea typeface="Trebuchet MS" pitchFamily="34" charset="-122"/>
                 <a:cs typeface="Trebuchet MS" pitchFamily="34" charset="-120"/>
               </a:rPr>
-              <a:t>developers</a:t>
+              <a:t>developing</a:t>
             </a:r>
             <a:endParaRPr lang="en-US" sz="2800" dirty="0"/>
           </a:p>
@@ -28944,7 +28734,7 @@
         </p:nvSpPr>
         <p:spPr>
           <a:xfrm>
-            <a:off x="2221992" y="2258568"/>
+            <a:off x="2938272" y="2258568"/>
             <a:ext cx="1828800" cy="292608"/>
           </a:xfrm>
           <a:prstGeom prst="rect">
@@ -28978,7 +28768,7 @@
         </p:nvSpPr>
         <p:spPr>
           <a:xfrm>
-            <a:off x="2221992" y="2258568"/>
+            <a:off x="2938272" y="2258568"/>
             <a:ext cx="1828800" cy="292608"/>
           </a:xfrm>
           <a:prstGeom prst="rect">
@@ -29017,7 +28807,7 @@
         </p:nvSpPr>
         <p:spPr>
           <a:xfrm>
-            <a:off x="2221992" y="2569464"/>
+            <a:off x="2938272" y="2569464"/>
             <a:ext cx="1828800" cy="201168"/>
           </a:xfrm>
           <a:prstGeom prst="rect">
@@ -29042,7 +28832,7 @@
                 <a:ea typeface="Calibri" pitchFamily="34" charset="-122"/>
                 <a:cs typeface="Calibri" pitchFamily="34" charset="-120"/>
               </a:rPr>
-              <a:t>to grow or build up</a:t>
+              <a:t>to grow or build gradually</a:t>
             </a:r>
             <a:endParaRPr lang="en-US" sz="850" dirty="0"/>
           </a:p>
@@ -29056,7 +28846,7 @@
         </p:nvSpPr>
         <p:spPr>
           <a:xfrm>
-            <a:off x="4370832" y="2258568"/>
+            <a:off x="5803392" y="2258568"/>
             <a:ext cx="1828800" cy="292608"/>
           </a:xfrm>
           <a:prstGeom prst="rect">
@@ -29090,7 +28880,7 @@
         </p:nvSpPr>
         <p:spPr>
           <a:xfrm>
-            <a:off x="4370832" y="2258568"/>
+            <a:off x="5803392" y="2258568"/>
             <a:ext cx="1828800" cy="292608"/>
           </a:xfrm>
           <a:prstGeom prst="rect">
@@ -29115,7 +28905,7 @@
                 <a:ea typeface="Trebuchet MS" pitchFamily="34" charset="-122"/>
                 <a:cs typeface="Trebuchet MS" pitchFamily="34" charset="-120"/>
               </a:rPr>
-              <a:t>er</a:t>
+              <a:t>ing</a:t>
             </a:r>
             <a:endParaRPr lang="en-US" sz="1300" dirty="0"/>
           </a:p>
@@ -29129,7 +28919,7 @@
         </p:nvSpPr>
         <p:spPr>
           <a:xfrm>
-            <a:off x="4370832" y="2569464"/>
+            <a:off x="5803392" y="2569464"/>
             <a:ext cx="1828800" cy="201168"/>
           </a:xfrm>
           <a:prstGeom prst="rect">
@@ -29154,7 +28944,7 @@
                 <a:ea typeface="Calibri" pitchFamily="34" charset="-122"/>
                 <a:cs typeface="Calibri" pitchFamily="34" charset="-120"/>
               </a:rPr>
-              <a:t>a person who does something</a:t>
+              <a:t>happening right now</a:t>
             </a:r>
             <a:endParaRPr lang="en-US" sz="850" dirty="0"/>
           </a:p>
@@ -29168,30 +28958,23 @@
         </p:nvSpPr>
         <p:spPr>
           <a:xfrm>
-            <a:off x="6519672" y="2258568"/>
-            <a:ext cx="1828800" cy="292608"/>
+            <a:off x="365760" y="3273552"/>
+            <a:ext cx="1371600" cy="658368"/>
           </a:xfrm>
           <a:prstGeom prst="rect">
             <a:avLst>
-              <a:gd name="adj" fmla="val 25000"/>
+              <a:gd name="adj" fmla="val 8333"/>
             </a:avLst>
           </a:prstGeom>
           <a:solidFill>
-            <a:srgbClr val="FCE7F3"/>
-          </a:solidFill>
-          <a:ln w="19050">
-            <a:solidFill>
-              <a:srgbClr val="DB2777"/>
-            </a:solidFill>
-            <a:prstDash val="solid"/>
-          </a:ln>
-          <a:effectLst>
-            <a:outerShdw sx="100000" sy="100000" kx="0" ky="0" algn="bl" rotWithShape="0" blurRad="101600" dist="38100" dir="8100000">
-              <a:srgbClr val="000000">
-                <a:alpha val="12000"/>
-              </a:srgbClr>
-            </a:outerShdw>
-          </a:effectLst>
+            <a:srgbClr val="E2E8F0"/>
+          </a:solidFill>
+          <a:ln w="12700">
+            <a:solidFill>
+              <a:srgbClr val="E2E8F0"/>
+            </a:solidFill>
+            <a:prstDash val="solid"/>
+          </a:ln>
         </p:spPr>
       </p:sp>
       <p:sp>
@@ -29202,86 +28985,47 @@
         </p:nvSpPr>
         <p:spPr>
           <a:xfrm>
-            <a:off x="6519672" y="2258568"/>
-            <a:ext cx="1828800" cy="292608"/>
-          </a:xfrm>
-          <a:prstGeom prst="rect">
-            <a:avLst/>
-          </a:prstGeom>
-          <a:noFill/>
-          <a:ln/>
-        </p:spPr>
-        <p:txBody>
-          <a:bodyPr wrap="square" lIns="0" tIns="0" rIns="0" bIns="0" rtlCol="0" anchor="ctr"/>
-          <a:lstStyle/>
-          <a:p>
-            <a:pPr algn="ctr" indent="0" marL="0">
-              <a:buNone/>
-            </a:pPr>
-            <a:r>
-              <a:rPr lang="en-US" sz="1300" b="1" dirty="0">
-                <a:solidFill>
-                  <a:srgbClr val="9D174D"/>
+            <a:off x="365760" y="3273552"/>
+            <a:ext cx="1371600" cy="658368"/>
+          </a:xfrm>
+          <a:prstGeom prst="rect">
+            <a:avLst/>
+          </a:prstGeom>
+          <a:noFill/>
+          <a:ln/>
+        </p:spPr>
+        <p:txBody>
+          <a:bodyPr wrap="square" lIns="0" tIns="0" rIns="0" bIns="0" rtlCol="0" anchor="ctr"/>
+          <a:lstStyle/>
+          <a:p>
+            <a:pPr algn="ctr" indent="0" marL="0">
+              <a:buNone/>
+            </a:pPr>
+            <a:r>
+              <a:rPr lang="en-US" sz="1100" b="1" dirty="0">
+                <a:solidFill>
+                  <a:srgbClr val="475569"/>
                 </a:solidFill>
                 <a:latin typeface="Trebuchet MS" pitchFamily="34" charset="0"/>
                 <a:ea typeface="Trebuchet MS" pitchFamily="34" charset="-122"/>
                 <a:cs typeface="Trebuchet MS" pitchFamily="34" charset="-120"/>
               </a:rPr>
-              <a:t>s</a:t>
-            </a:r>
-            <a:endParaRPr lang="en-US" sz="1300" dirty="0"/>
-          </a:p>
-        </p:txBody>
-      </p:sp>
-      <p:sp>
-        <p:nvSpPr>
-          <p:cNvPr id="24" name="Text 22"/>
-          <p:cNvSpPr/>
-          <p:nvPr/>
-        </p:nvSpPr>
-        <p:spPr>
-          <a:xfrm>
-            <a:off x="6519672" y="2569464"/>
-            <a:ext cx="1828800" cy="201168"/>
-          </a:xfrm>
-          <a:prstGeom prst="rect">
-            <a:avLst/>
-          </a:prstGeom>
-          <a:noFill/>
-          <a:ln/>
-        </p:spPr>
-        <p:txBody>
-          <a:bodyPr wrap="square" lIns="0" tIns="0" rIns="0" bIns="0" rtlCol="0" anchor="t"/>
-          <a:lstStyle/>
-          <a:p>
-            <a:pPr algn="ctr" indent="0" marL="0">
-              <a:buNone/>
-            </a:pPr>
-            <a:r>
-              <a:rPr lang="en-US" sz="850" dirty="0">
-                <a:solidFill>
-                  <a:srgbClr val="475569"/>
-                </a:solidFill>
-                <a:latin typeface="Calibri" pitchFamily="34" charset="0"/>
-                <a:ea typeface="Calibri" pitchFamily="34" charset="-122"/>
-                <a:cs typeface="Calibri" pitchFamily="34" charset="-120"/>
-              </a:rPr>
-              <a:t>more than one</a:t>
-            </a:r>
-            <a:endParaRPr lang="en-US" sz="850" dirty="0"/>
-          </a:p>
-        </p:txBody>
-      </p:sp>
-      <p:sp>
-        <p:nvSpPr>
-          <p:cNvPr id="25" name="Shape 23"/>
-          <p:cNvSpPr/>
-          <p:nvPr/>
-        </p:nvSpPr>
-        <p:spPr>
-          <a:xfrm>
-            <a:off x="365760" y="3273552"/>
-            <a:ext cx="1371600" cy="658368"/>
+              <a:t>Syllables</a:t>
+            </a:r>
+            <a:endParaRPr lang="en-US" sz="1100" dirty="0"/>
+          </a:p>
+        </p:txBody>
+      </p:sp>
+      <p:sp>
+        <p:nvSpPr>
+          <p:cNvPr id="24" name="Shape 22"/>
+          <p:cNvSpPr/>
+          <p:nvPr/>
+        </p:nvSpPr>
+        <p:spPr>
+          <a:xfrm>
+            <a:off x="1874520" y="3273552"/>
+            <a:ext cx="6903720" cy="658368"/>
           </a:xfrm>
           <a:prstGeom prst="rect">
             <a:avLst>
@@ -29289,11 +29033,38 @@
             </a:avLst>
           </a:prstGeom>
           <a:solidFill>
-            <a:srgbClr val="E2E8F0"/>
-          </a:solidFill>
-          <a:ln w="12700">
-            <a:solidFill>
-              <a:srgbClr val="E2E8F0"/>
+            <a:srgbClr val="CCFBF1"/>
+          </a:solidFill>
+          <a:ln w="12700">
+            <a:solidFill>
+              <a:srgbClr val="0D9488"/>
+            </a:solidFill>
+            <a:prstDash val="solid"/>
+          </a:ln>
+        </p:spPr>
+      </p:sp>
+      <p:sp>
+        <p:nvSpPr>
+          <p:cNvPr id="25" name="Shape 23"/>
+          <p:cNvSpPr/>
+          <p:nvPr/>
+        </p:nvSpPr>
+        <p:spPr>
+          <a:xfrm>
+            <a:off x="1975104" y="3364992"/>
+            <a:ext cx="1554480" cy="475488"/>
+          </a:xfrm>
+          <a:prstGeom prst="rect">
+            <a:avLst>
+              <a:gd name="adj" fmla="val 9615"/>
+            </a:avLst>
+          </a:prstGeom>
+          <a:solidFill>
+            <a:srgbClr val="FFFFFF"/>
+          </a:solidFill>
+          <a:ln w="12700">
+            <a:solidFill>
+              <a:srgbClr val="0D9488"/>
             </a:solidFill>
             <a:prstDash val="solid"/>
           </a:ln>
@@ -29307,32 +29078,413 @@
         </p:nvSpPr>
         <p:spPr>
           <a:xfrm>
-            <a:off x="365760" y="3273552"/>
-            <a:ext cx="1371600" cy="658368"/>
-          </a:xfrm>
-          <a:prstGeom prst="rect">
-            <a:avLst/>
-          </a:prstGeom>
-          <a:noFill/>
-          <a:ln/>
-        </p:spPr>
-        <p:txBody>
-          <a:bodyPr wrap="square" lIns="0" tIns="0" rIns="0" bIns="0" rtlCol="0" anchor="ctr"/>
-          <a:lstStyle/>
-          <a:p>
-            <a:pPr algn="ctr" indent="0" marL="0">
-              <a:buNone/>
-            </a:pPr>
-            <a:r>
-              <a:rPr lang="en-US" sz="1100" b="1" dirty="0">
-                <a:solidFill>
-                  <a:srgbClr val="475569"/>
+            <a:off x="1975104" y="3364992"/>
+            <a:ext cx="1554480" cy="475488"/>
+          </a:xfrm>
+          <a:prstGeom prst="rect">
+            <a:avLst/>
+          </a:prstGeom>
+          <a:noFill/>
+          <a:ln/>
+        </p:spPr>
+        <p:txBody>
+          <a:bodyPr wrap="square" lIns="0" tIns="0" rIns="0" bIns="0" rtlCol="0" anchor="ctr"/>
+          <a:lstStyle/>
+          <a:p>
+            <a:pPr algn="ctr" indent="0" marL="0">
+              <a:buNone/>
+            </a:pPr>
+            <a:r>
+              <a:rPr lang="en-US" sz="1400" b="1" dirty="0">
+                <a:solidFill>
+                  <a:srgbClr val="0D9488"/>
                 </a:solidFill>
                 <a:latin typeface="Trebuchet MS" pitchFamily="34" charset="0"/>
                 <a:ea typeface="Trebuchet MS" pitchFamily="34" charset="-122"/>
                 <a:cs typeface="Trebuchet MS" pitchFamily="34" charset="-120"/>
               </a:rPr>
-              <a:t>Syllables</a:t>
+              <a:t>de</a:t>
+            </a:r>
+            <a:endParaRPr lang="en-US" sz="1400" dirty="0"/>
+          </a:p>
+        </p:txBody>
+      </p:sp>
+      <p:sp>
+        <p:nvSpPr>
+          <p:cNvPr id="27" name="Text 25"/>
+          <p:cNvSpPr/>
+          <p:nvPr/>
+        </p:nvSpPr>
+        <p:spPr>
+          <a:xfrm>
+            <a:off x="3529584" y="3364992"/>
+            <a:ext cx="73152" cy="475488"/>
+          </a:xfrm>
+          <a:prstGeom prst="rect">
+            <a:avLst/>
+          </a:prstGeom>
+          <a:noFill/>
+          <a:ln/>
+        </p:spPr>
+        <p:txBody>
+          <a:bodyPr wrap="square" lIns="0" tIns="0" rIns="0" bIns="0" rtlCol="0" anchor="ctr"/>
+          <a:lstStyle/>
+          <a:p>
+            <a:pPr algn="ctr" indent="0" marL="0">
+              <a:buNone/>
+            </a:pPr>
+            <a:r>
+              <a:rPr lang="en-US" sz="1600" b="1" dirty="0">
+                <a:solidFill>
+                  <a:srgbClr val="0D9488"/>
+                </a:solidFill>
+                <a:latin typeface="Trebuchet MS" pitchFamily="34" charset="0"/>
+                <a:ea typeface="Trebuchet MS" pitchFamily="34" charset="-122"/>
+                <a:cs typeface="Trebuchet MS" pitchFamily="34" charset="-120"/>
+              </a:rPr>
+              <a:t>·</a:t>
+            </a:r>
+            <a:endParaRPr lang="en-US" sz="1600" dirty="0"/>
+          </a:p>
+        </p:txBody>
+      </p:sp>
+      <p:sp>
+        <p:nvSpPr>
+          <p:cNvPr id="28" name="Shape 26"/>
+          <p:cNvSpPr/>
+          <p:nvPr/>
+        </p:nvSpPr>
+        <p:spPr>
+          <a:xfrm>
+            <a:off x="3602736" y="3364992"/>
+            <a:ext cx="1554480" cy="475488"/>
+          </a:xfrm>
+          <a:prstGeom prst="rect">
+            <a:avLst>
+              <a:gd name="adj" fmla="val 9615"/>
+            </a:avLst>
+          </a:prstGeom>
+          <a:solidFill>
+            <a:srgbClr val="FFFFFF"/>
+          </a:solidFill>
+          <a:ln w="12700">
+            <a:solidFill>
+              <a:srgbClr val="0D9488"/>
+            </a:solidFill>
+            <a:prstDash val="solid"/>
+          </a:ln>
+        </p:spPr>
+      </p:sp>
+      <p:sp>
+        <p:nvSpPr>
+          <p:cNvPr id="29" name="Text 27"/>
+          <p:cNvSpPr/>
+          <p:nvPr/>
+        </p:nvSpPr>
+        <p:spPr>
+          <a:xfrm>
+            <a:off x="3602736" y="3364992"/>
+            <a:ext cx="1554480" cy="475488"/>
+          </a:xfrm>
+          <a:prstGeom prst="rect">
+            <a:avLst/>
+          </a:prstGeom>
+          <a:noFill/>
+          <a:ln/>
+        </p:spPr>
+        <p:txBody>
+          <a:bodyPr wrap="square" lIns="0" tIns="0" rIns="0" bIns="0" rtlCol="0" anchor="ctr"/>
+          <a:lstStyle/>
+          <a:p>
+            <a:pPr algn="ctr" indent="0" marL="0">
+              <a:buNone/>
+            </a:pPr>
+            <a:r>
+              <a:rPr lang="en-US" sz="1400" b="1" dirty="0">
+                <a:solidFill>
+                  <a:srgbClr val="0D9488"/>
+                </a:solidFill>
+                <a:latin typeface="Trebuchet MS" pitchFamily="34" charset="0"/>
+                <a:ea typeface="Trebuchet MS" pitchFamily="34" charset="-122"/>
+                <a:cs typeface="Trebuchet MS" pitchFamily="34" charset="-120"/>
+              </a:rPr>
+              <a:t>vel</a:t>
+            </a:r>
+            <a:endParaRPr lang="en-US" sz="1400" dirty="0"/>
+          </a:p>
+        </p:txBody>
+      </p:sp>
+      <p:sp>
+        <p:nvSpPr>
+          <p:cNvPr id="30" name="Text 28"/>
+          <p:cNvSpPr/>
+          <p:nvPr/>
+        </p:nvSpPr>
+        <p:spPr>
+          <a:xfrm>
+            <a:off x="5157216" y="3364992"/>
+            <a:ext cx="73152" cy="475488"/>
+          </a:xfrm>
+          <a:prstGeom prst="rect">
+            <a:avLst/>
+          </a:prstGeom>
+          <a:noFill/>
+          <a:ln/>
+        </p:spPr>
+        <p:txBody>
+          <a:bodyPr wrap="square" lIns="0" tIns="0" rIns="0" bIns="0" rtlCol="0" anchor="ctr"/>
+          <a:lstStyle/>
+          <a:p>
+            <a:pPr algn="ctr" indent="0" marL="0">
+              <a:buNone/>
+            </a:pPr>
+            <a:r>
+              <a:rPr lang="en-US" sz="1600" b="1" dirty="0">
+                <a:solidFill>
+                  <a:srgbClr val="0D9488"/>
+                </a:solidFill>
+                <a:latin typeface="Trebuchet MS" pitchFamily="34" charset="0"/>
+                <a:ea typeface="Trebuchet MS" pitchFamily="34" charset="-122"/>
+                <a:cs typeface="Trebuchet MS" pitchFamily="34" charset="-120"/>
+              </a:rPr>
+              <a:t>·</a:t>
+            </a:r>
+            <a:endParaRPr lang="en-US" sz="1600" dirty="0"/>
+          </a:p>
+        </p:txBody>
+      </p:sp>
+      <p:sp>
+        <p:nvSpPr>
+          <p:cNvPr id="31" name="Shape 29"/>
+          <p:cNvSpPr/>
+          <p:nvPr/>
+        </p:nvSpPr>
+        <p:spPr>
+          <a:xfrm>
+            <a:off x="5230368" y="3364992"/>
+            <a:ext cx="1554480" cy="475488"/>
+          </a:xfrm>
+          <a:prstGeom prst="rect">
+            <a:avLst>
+              <a:gd name="adj" fmla="val 9615"/>
+            </a:avLst>
+          </a:prstGeom>
+          <a:solidFill>
+            <a:srgbClr val="FFFFFF"/>
+          </a:solidFill>
+          <a:ln w="12700">
+            <a:solidFill>
+              <a:srgbClr val="0D9488"/>
+            </a:solidFill>
+            <a:prstDash val="solid"/>
+          </a:ln>
+        </p:spPr>
+      </p:sp>
+      <p:sp>
+        <p:nvSpPr>
+          <p:cNvPr id="32" name="Text 30"/>
+          <p:cNvSpPr/>
+          <p:nvPr/>
+        </p:nvSpPr>
+        <p:spPr>
+          <a:xfrm>
+            <a:off x="5230368" y="3364992"/>
+            <a:ext cx="1554480" cy="475488"/>
+          </a:xfrm>
+          <a:prstGeom prst="rect">
+            <a:avLst/>
+          </a:prstGeom>
+          <a:noFill/>
+          <a:ln/>
+        </p:spPr>
+        <p:txBody>
+          <a:bodyPr wrap="square" lIns="0" tIns="0" rIns="0" bIns="0" rtlCol="0" anchor="ctr"/>
+          <a:lstStyle/>
+          <a:p>
+            <a:pPr algn="ctr" indent="0" marL="0">
+              <a:buNone/>
+            </a:pPr>
+            <a:r>
+              <a:rPr lang="en-US" sz="1400" b="1" dirty="0">
+                <a:solidFill>
+                  <a:srgbClr val="0D9488"/>
+                </a:solidFill>
+                <a:latin typeface="Trebuchet MS" pitchFamily="34" charset="0"/>
+                <a:ea typeface="Trebuchet MS" pitchFamily="34" charset="-122"/>
+                <a:cs typeface="Trebuchet MS" pitchFamily="34" charset="-120"/>
+              </a:rPr>
+              <a:t>op</a:t>
+            </a:r>
+            <a:endParaRPr lang="en-US" sz="1400" dirty="0"/>
+          </a:p>
+        </p:txBody>
+      </p:sp>
+      <p:sp>
+        <p:nvSpPr>
+          <p:cNvPr id="33" name="Text 31"/>
+          <p:cNvSpPr/>
+          <p:nvPr/>
+        </p:nvSpPr>
+        <p:spPr>
+          <a:xfrm>
+            <a:off x="6784848" y="3364992"/>
+            <a:ext cx="73152" cy="475488"/>
+          </a:xfrm>
+          <a:prstGeom prst="rect">
+            <a:avLst/>
+          </a:prstGeom>
+          <a:noFill/>
+          <a:ln/>
+        </p:spPr>
+        <p:txBody>
+          <a:bodyPr wrap="square" lIns="0" tIns="0" rIns="0" bIns="0" rtlCol="0" anchor="ctr"/>
+          <a:lstStyle/>
+          <a:p>
+            <a:pPr algn="ctr" indent="0" marL="0">
+              <a:buNone/>
+            </a:pPr>
+            <a:r>
+              <a:rPr lang="en-US" sz="1600" b="1" dirty="0">
+                <a:solidFill>
+                  <a:srgbClr val="0D9488"/>
+                </a:solidFill>
+                <a:latin typeface="Trebuchet MS" pitchFamily="34" charset="0"/>
+                <a:ea typeface="Trebuchet MS" pitchFamily="34" charset="-122"/>
+                <a:cs typeface="Trebuchet MS" pitchFamily="34" charset="-120"/>
+              </a:rPr>
+              <a:t>·</a:t>
+            </a:r>
+            <a:endParaRPr lang="en-US" sz="1600" dirty="0"/>
+          </a:p>
+        </p:txBody>
+      </p:sp>
+      <p:sp>
+        <p:nvSpPr>
+          <p:cNvPr id="34" name="Shape 32"/>
+          <p:cNvSpPr/>
+          <p:nvPr/>
+        </p:nvSpPr>
+        <p:spPr>
+          <a:xfrm>
+            <a:off x="6858000" y="3364992"/>
+            <a:ext cx="1554480" cy="475488"/>
+          </a:xfrm>
+          <a:prstGeom prst="rect">
+            <a:avLst>
+              <a:gd name="adj" fmla="val 9615"/>
+            </a:avLst>
+          </a:prstGeom>
+          <a:solidFill>
+            <a:srgbClr val="FFFFFF"/>
+          </a:solidFill>
+          <a:ln w="12700">
+            <a:solidFill>
+              <a:srgbClr val="0D9488"/>
+            </a:solidFill>
+            <a:prstDash val="solid"/>
+          </a:ln>
+        </p:spPr>
+      </p:sp>
+      <p:sp>
+        <p:nvSpPr>
+          <p:cNvPr id="35" name="Text 33"/>
+          <p:cNvSpPr/>
+          <p:nvPr/>
+        </p:nvSpPr>
+        <p:spPr>
+          <a:xfrm>
+            <a:off x="6858000" y="3364992"/>
+            <a:ext cx="1554480" cy="475488"/>
+          </a:xfrm>
+          <a:prstGeom prst="rect">
+            <a:avLst/>
+          </a:prstGeom>
+          <a:noFill/>
+          <a:ln/>
+        </p:spPr>
+        <p:txBody>
+          <a:bodyPr wrap="square" lIns="0" tIns="0" rIns="0" bIns="0" rtlCol="0" anchor="ctr"/>
+          <a:lstStyle/>
+          <a:p>
+            <a:pPr algn="ctr" indent="0" marL="0">
+              <a:buNone/>
+            </a:pPr>
+            <a:r>
+              <a:rPr lang="en-US" sz="1400" b="1" dirty="0">
+                <a:solidFill>
+                  <a:srgbClr val="0D9488"/>
+                </a:solidFill>
+                <a:latin typeface="Trebuchet MS" pitchFamily="34" charset="0"/>
+                <a:ea typeface="Trebuchet MS" pitchFamily="34" charset="-122"/>
+                <a:cs typeface="Trebuchet MS" pitchFamily="34" charset="-120"/>
+              </a:rPr>
+              <a:t>ing</a:t>
+            </a:r>
+            <a:endParaRPr lang="en-US" sz="1400" dirty="0"/>
+          </a:p>
+        </p:txBody>
+      </p:sp>
+      <p:sp>
+        <p:nvSpPr>
+          <p:cNvPr id="36" name="Shape 34"/>
+          <p:cNvSpPr/>
+          <p:nvPr/>
+        </p:nvSpPr>
+        <p:spPr>
+          <a:xfrm>
+            <a:off x="365760" y="4096512"/>
+            <a:ext cx="1371600" cy="804672"/>
+          </a:xfrm>
+          <a:prstGeom prst="rect">
+            <a:avLst>
+              <a:gd name="adj" fmla="val 6818"/>
+            </a:avLst>
+          </a:prstGeom>
+          <a:solidFill>
+            <a:srgbClr val="E2E8F0"/>
+          </a:solidFill>
+          <a:ln w="12700">
+            <a:solidFill>
+              <a:srgbClr val="E2E8F0"/>
+            </a:solidFill>
+            <a:prstDash val="solid"/>
+          </a:ln>
+        </p:spPr>
+      </p:sp>
+      <p:sp>
+        <p:nvSpPr>
+          <p:cNvPr id="37" name="Text 35"/>
+          <p:cNvSpPr/>
+          <p:nvPr/>
+        </p:nvSpPr>
+        <p:spPr>
+          <a:xfrm>
+            <a:off x="365760" y="4096512"/>
+            <a:ext cx="1371600" cy="804672"/>
+          </a:xfrm>
+          <a:prstGeom prst="rect">
+            <a:avLst/>
+          </a:prstGeom>
+          <a:noFill/>
+          <a:ln/>
+        </p:spPr>
+        <p:txBody>
+          <a:bodyPr wrap="square" lIns="0" tIns="0" rIns="0" bIns="0" rtlCol="0" anchor="ctr"/>
+          <a:lstStyle/>
+          <a:p>
+            <a:pPr algn="ctr" indent="0" marL="0">
+              <a:buNone/>
+            </a:pPr>
+            <a:r>
+              <a:rPr lang="en-US" sz="1100" b="1" dirty="0">
+                <a:solidFill>
+                  <a:srgbClr val="475569"/>
+                </a:solidFill>
+                <a:latin typeface="Trebuchet MS" pitchFamily="34" charset="0"/>
+                <a:ea typeface="Trebuchet MS" pitchFamily="34" charset="-122"/>
+                <a:cs typeface="Trebuchet MS" pitchFamily="34" charset="-120"/>
+              </a:rPr>
+              <a:t>Phonemes</a:t>
             </a:r>
             <a:endParaRPr lang="en-US" sz="1100" dirty="0"/>
           </a:p>
@@ -29340,13 +29492,13 @@
       </p:sp>
       <p:sp>
         <p:nvSpPr>
-          <p:cNvPr id="27" name="Shape 25"/>
-          <p:cNvSpPr/>
-          <p:nvPr/>
-        </p:nvSpPr>
-        <p:spPr>
-          <a:xfrm>
-            <a:off x="1874520" y="3273552"/>
+          <p:cNvPr id="38" name="Shape 36"/>
+          <p:cNvSpPr/>
+          <p:nvPr/>
+        </p:nvSpPr>
+        <p:spPr>
+          <a:xfrm>
+            <a:off x="1874520" y="4096512"/>
             <a:ext cx="6903720" cy="658368"/>
           </a:xfrm>
           <a:prstGeom prst="rect">
@@ -29355,30 +29507,30 @@
             </a:avLst>
           </a:prstGeom>
           <a:solidFill>
-            <a:srgbClr val="CCFBF1"/>
-          </a:solidFill>
-          <a:ln w="12700">
-            <a:solidFill>
-              <a:srgbClr val="0D9488"/>
-            </a:solidFill>
-            <a:prstDash val="solid"/>
-          </a:ln>
-        </p:spPr>
-      </p:sp>
-      <p:sp>
-        <p:nvSpPr>
-          <p:cNvPr id="28" name="Shape 26"/>
-          <p:cNvSpPr/>
-          <p:nvPr/>
-        </p:nvSpPr>
-        <p:spPr>
-          <a:xfrm>
-            <a:off x="1975104" y="3364992"/>
-            <a:ext cx="1554480" cy="475488"/>
+            <a:srgbClr val="FCE7F3"/>
+          </a:solidFill>
+          <a:ln w="12700">
+            <a:solidFill>
+              <a:srgbClr val="DB2777"/>
+            </a:solidFill>
+            <a:prstDash val="solid"/>
+          </a:ln>
+        </p:spPr>
+      </p:sp>
+      <p:sp>
+        <p:nvSpPr>
+          <p:cNvPr id="39" name="Shape 37"/>
+          <p:cNvSpPr/>
+          <p:nvPr/>
+        </p:nvSpPr>
+        <p:spPr>
+          <a:xfrm>
+            <a:off x="1951330" y="4169664"/>
+            <a:ext cx="676656" cy="475488"/>
           </a:xfrm>
           <a:prstGeom prst="rect">
             <a:avLst>
-              <a:gd name="adj" fmla="val 9615"/>
+              <a:gd name="adj" fmla="val 7692"/>
             </a:avLst>
           </a:prstGeom>
           <a:solidFill>
@@ -29386,104 +29538,131 @@
           </a:solidFill>
           <a:ln w="12700">
             <a:solidFill>
-              <a:srgbClr val="0D9488"/>
-            </a:solidFill>
-            <a:prstDash val="solid"/>
-          </a:ln>
-        </p:spPr>
-      </p:sp>
-      <p:sp>
-        <p:nvSpPr>
-          <p:cNvPr id="29" name="Text 27"/>
-          <p:cNvSpPr/>
-          <p:nvPr/>
-        </p:nvSpPr>
-        <p:spPr>
-          <a:xfrm>
-            <a:off x="1975104" y="3364992"/>
-            <a:ext cx="1554480" cy="475488"/>
-          </a:xfrm>
-          <a:prstGeom prst="rect">
-            <a:avLst/>
-          </a:prstGeom>
-          <a:noFill/>
-          <a:ln/>
-        </p:spPr>
-        <p:txBody>
-          <a:bodyPr wrap="square" lIns="0" tIns="0" rIns="0" bIns="0" rtlCol="0" anchor="ctr"/>
-          <a:lstStyle/>
-          <a:p>
-            <a:pPr algn="ctr" indent="0" marL="0">
-              <a:buNone/>
-            </a:pPr>
-            <a:r>
-              <a:rPr lang="en-US" sz="1400" b="1" dirty="0">
-                <a:solidFill>
-                  <a:srgbClr val="0D9488"/>
+              <a:srgbClr val="DB2777"/>
+            </a:solidFill>
+            <a:prstDash val="solid"/>
+          </a:ln>
+        </p:spPr>
+      </p:sp>
+      <p:sp>
+        <p:nvSpPr>
+          <p:cNvPr id="40" name="Text 38"/>
+          <p:cNvSpPr/>
+          <p:nvPr/>
+        </p:nvSpPr>
+        <p:spPr>
+          <a:xfrm>
+            <a:off x="1951330" y="4169664"/>
+            <a:ext cx="676656" cy="475488"/>
+          </a:xfrm>
+          <a:prstGeom prst="rect">
+            <a:avLst/>
+          </a:prstGeom>
+          <a:noFill/>
+          <a:ln/>
+        </p:spPr>
+        <p:txBody>
+          <a:bodyPr wrap="square" lIns="0" tIns="0" rIns="0" bIns="0" rtlCol="0" anchor="ctr"/>
+          <a:lstStyle/>
+          <a:p>
+            <a:pPr algn="ctr" indent="0" marL="0">
+              <a:buNone/>
+            </a:pPr>
+            <a:r>
+              <a:rPr lang="en-US" sz="900" b="1" dirty="0">
+                <a:solidFill>
+                  <a:srgbClr val="9D174D"/>
                 </a:solidFill>
                 <a:latin typeface="Trebuchet MS" pitchFamily="34" charset="0"/>
                 <a:ea typeface="Trebuchet MS" pitchFamily="34" charset="-122"/>
                 <a:cs typeface="Trebuchet MS" pitchFamily="34" charset="-120"/>
               </a:rPr>
-              <a:t>de</a:t>
-            </a:r>
-            <a:endParaRPr lang="en-US" sz="1400" dirty="0"/>
-          </a:p>
-        </p:txBody>
-      </p:sp>
-      <p:sp>
-        <p:nvSpPr>
-          <p:cNvPr id="30" name="Text 28"/>
-          <p:cNvSpPr/>
-          <p:nvPr/>
-        </p:nvSpPr>
-        <p:spPr>
-          <a:xfrm>
-            <a:off x="3529584" y="3364992"/>
-            <a:ext cx="73152" cy="475488"/>
-          </a:xfrm>
-          <a:prstGeom prst="rect">
-            <a:avLst/>
-          </a:prstGeom>
-          <a:noFill/>
-          <a:ln/>
-        </p:spPr>
-        <p:txBody>
-          <a:bodyPr wrap="square" lIns="0" tIns="0" rIns="0" bIns="0" rtlCol="0" anchor="ctr"/>
-          <a:lstStyle/>
-          <a:p>
-            <a:pPr algn="ctr" indent="0" marL="0">
-              <a:buNone/>
-            </a:pPr>
-            <a:r>
-              <a:rPr lang="en-US" sz="1600" b="1" dirty="0">
-                <a:solidFill>
-                  <a:srgbClr val="0D9488"/>
+              <a:t>d</a:t>
+            </a:r>
+            <a:endParaRPr lang="en-US" sz="900" dirty="0"/>
+          </a:p>
+        </p:txBody>
+      </p:sp>
+      <p:sp>
+        <p:nvSpPr>
+          <p:cNvPr id="41" name="Shape 39"/>
+          <p:cNvSpPr/>
+          <p:nvPr/>
+        </p:nvSpPr>
+        <p:spPr>
+          <a:xfrm>
+            <a:off x="2677363" y="4169664"/>
+            <a:ext cx="676656" cy="475488"/>
+          </a:xfrm>
+          <a:prstGeom prst="rect">
+            <a:avLst>
+              <a:gd name="adj" fmla="val 7692"/>
+            </a:avLst>
+          </a:prstGeom>
+          <a:solidFill>
+            <a:srgbClr val="FFFFFF"/>
+          </a:solidFill>
+          <a:ln w="12700">
+            <a:solidFill>
+              <a:srgbClr val="DB2777"/>
+            </a:solidFill>
+            <a:prstDash val="solid"/>
+          </a:ln>
+        </p:spPr>
+      </p:sp>
+      <p:sp>
+        <p:nvSpPr>
+          <p:cNvPr id="42" name="Text 40"/>
+          <p:cNvSpPr/>
+          <p:nvPr/>
+        </p:nvSpPr>
+        <p:spPr>
+          <a:xfrm>
+            <a:off x="2677363" y="4169664"/>
+            <a:ext cx="676656" cy="475488"/>
+          </a:xfrm>
+          <a:prstGeom prst="rect">
+            <a:avLst/>
+          </a:prstGeom>
+          <a:noFill/>
+          <a:ln/>
+        </p:spPr>
+        <p:txBody>
+          <a:bodyPr wrap="square" lIns="0" tIns="0" rIns="0" bIns="0" rtlCol="0" anchor="ctr"/>
+          <a:lstStyle/>
+          <a:p>
+            <a:pPr algn="ctr" indent="0" marL="0">
+              <a:buNone/>
+            </a:pPr>
+            <a:r>
+              <a:rPr lang="en-US" sz="900" b="1" dirty="0">
+                <a:solidFill>
+                  <a:srgbClr val="9D174D"/>
                 </a:solidFill>
                 <a:latin typeface="Trebuchet MS" pitchFamily="34" charset="0"/>
                 <a:ea typeface="Trebuchet MS" pitchFamily="34" charset="-122"/>
                 <a:cs typeface="Trebuchet MS" pitchFamily="34" charset="-120"/>
               </a:rPr>
-              <a:t>·</a:t>
-            </a:r>
-            <a:endParaRPr lang="en-US" sz="1600" dirty="0"/>
-          </a:p>
-        </p:txBody>
-      </p:sp>
-      <p:sp>
-        <p:nvSpPr>
-          <p:cNvPr id="31" name="Shape 29"/>
-          <p:cNvSpPr/>
-          <p:nvPr/>
-        </p:nvSpPr>
-        <p:spPr>
-          <a:xfrm>
-            <a:off x="3602736" y="3364992"/>
-            <a:ext cx="1554480" cy="475488"/>
+              <a:t>e</a:t>
+            </a:r>
+            <a:endParaRPr lang="en-US" sz="900" dirty="0"/>
+          </a:p>
+        </p:txBody>
+      </p:sp>
+      <p:sp>
+        <p:nvSpPr>
+          <p:cNvPr id="43" name="Shape 41"/>
+          <p:cNvSpPr/>
+          <p:nvPr/>
+        </p:nvSpPr>
+        <p:spPr>
+          <a:xfrm>
+            <a:off x="3403397" y="4169664"/>
+            <a:ext cx="676656" cy="475488"/>
           </a:xfrm>
           <a:prstGeom prst="rect">
             <a:avLst>
-              <a:gd name="adj" fmla="val 9615"/>
+              <a:gd name="adj" fmla="val 7692"/>
             </a:avLst>
           </a:prstGeom>
           <a:solidFill>
@@ -29491,104 +29670,131 @@
           </a:solidFill>
           <a:ln w="12700">
             <a:solidFill>
-              <a:srgbClr val="0D9488"/>
-            </a:solidFill>
-            <a:prstDash val="solid"/>
-          </a:ln>
-        </p:spPr>
-      </p:sp>
-      <p:sp>
-        <p:nvSpPr>
-          <p:cNvPr id="32" name="Text 30"/>
-          <p:cNvSpPr/>
-          <p:nvPr/>
-        </p:nvSpPr>
-        <p:spPr>
-          <a:xfrm>
-            <a:off x="3602736" y="3364992"/>
-            <a:ext cx="1554480" cy="475488"/>
-          </a:xfrm>
-          <a:prstGeom prst="rect">
-            <a:avLst/>
-          </a:prstGeom>
-          <a:noFill/>
-          <a:ln/>
-        </p:spPr>
-        <p:txBody>
-          <a:bodyPr wrap="square" lIns="0" tIns="0" rIns="0" bIns="0" rtlCol="0" anchor="ctr"/>
-          <a:lstStyle/>
-          <a:p>
-            <a:pPr algn="ctr" indent="0" marL="0">
-              <a:buNone/>
-            </a:pPr>
-            <a:r>
-              <a:rPr lang="en-US" sz="1400" b="1" dirty="0">
-                <a:solidFill>
-                  <a:srgbClr val="0D9488"/>
+              <a:srgbClr val="DB2777"/>
+            </a:solidFill>
+            <a:prstDash val="solid"/>
+          </a:ln>
+        </p:spPr>
+      </p:sp>
+      <p:sp>
+        <p:nvSpPr>
+          <p:cNvPr id="44" name="Text 42"/>
+          <p:cNvSpPr/>
+          <p:nvPr/>
+        </p:nvSpPr>
+        <p:spPr>
+          <a:xfrm>
+            <a:off x="3403397" y="4169664"/>
+            <a:ext cx="676656" cy="475488"/>
+          </a:xfrm>
+          <a:prstGeom prst="rect">
+            <a:avLst/>
+          </a:prstGeom>
+          <a:noFill/>
+          <a:ln/>
+        </p:spPr>
+        <p:txBody>
+          <a:bodyPr wrap="square" lIns="0" tIns="0" rIns="0" bIns="0" rtlCol="0" anchor="ctr"/>
+          <a:lstStyle/>
+          <a:p>
+            <a:pPr algn="ctr" indent="0" marL="0">
+              <a:buNone/>
+            </a:pPr>
+            <a:r>
+              <a:rPr lang="en-US" sz="900" b="1" dirty="0">
+                <a:solidFill>
+                  <a:srgbClr val="9D174D"/>
                 </a:solidFill>
                 <a:latin typeface="Trebuchet MS" pitchFamily="34" charset="0"/>
                 <a:ea typeface="Trebuchet MS" pitchFamily="34" charset="-122"/>
                 <a:cs typeface="Trebuchet MS" pitchFamily="34" charset="-120"/>
               </a:rPr>
-              <a:t>vel</a:t>
-            </a:r>
-            <a:endParaRPr lang="en-US" sz="1400" dirty="0"/>
-          </a:p>
-        </p:txBody>
-      </p:sp>
-      <p:sp>
-        <p:nvSpPr>
-          <p:cNvPr id="33" name="Text 31"/>
-          <p:cNvSpPr/>
-          <p:nvPr/>
-        </p:nvSpPr>
-        <p:spPr>
-          <a:xfrm>
-            <a:off x="5157216" y="3364992"/>
-            <a:ext cx="73152" cy="475488"/>
-          </a:xfrm>
-          <a:prstGeom prst="rect">
-            <a:avLst/>
-          </a:prstGeom>
-          <a:noFill/>
-          <a:ln/>
-        </p:spPr>
-        <p:txBody>
-          <a:bodyPr wrap="square" lIns="0" tIns="0" rIns="0" bIns="0" rtlCol="0" anchor="ctr"/>
-          <a:lstStyle/>
-          <a:p>
-            <a:pPr algn="ctr" indent="0" marL="0">
-              <a:buNone/>
-            </a:pPr>
-            <a:r>
-              <a:rPr lang="en-US" sz="1600" b="1" dirty="0">
-                <a:solidFill>
-                  <a:srgbClr val="0D9488"/>
+              <a:t>v</a:t>
+            </a:r>
+            <a:endParaRPr lang="en-US" sz="900" dirty="0"/>
+          </a:p>
+        </p:txBody>
+      </p:sp>
+      <p:sp>
+        <p:nvSpPr>
+          <p:cNvPr id="45" name="Shape 43"/>
+          <p:cNvSpPr/>
+          <p:nvPr/>
+        </p:nvSpPr>
+        <p:spPr>
+          <a:xfrm>
+            <a:off x="4129430" y="4169664"/>
+            <a:ext cx="676656" cy="475488"/>
+          </a:xfrm>
+          <a:prstGeom prst="rect">
+            <a:avLst>
+              <a:gd name="adj" fmla="val 7692"/>
+            </a:avLst>
+          </a:prstGeom>
+          <a:solidFill>
+            <a:srgbClr val="FFFFFF"/>
+          </a:solidFill>
+          <a:ln w="12700">
+            <a:solidFill>
+              <a:srgbClr val="DB2777"/>
+            </a:solidFill>
+            <a:prstDash val="solid"/>
+          </a:ln>
+        </p:spPr>
+      </p:sp>
+      <p:sp>
+        <p:nvSpPr>
+          <p:cNvPr id="46" name="Text 44"/>
+          <p:cNvSpPr/>
+          <p:nvPr/>
+        </p:nvSpPr>
+        <p:spPr>
+          <a:xfrm>
+            <a:off x="4129430" y="4169664"/>
+            <a:ext cx="676656" cy="475488"/>
+          </a:xfrm>
+          <a:prstGeom prst="rect">
+            <a:avLst/>
+          </a:prstGeom>
+          <a:noFill/>
+          <a:ln/>
+        </p:spPr>
+        <p:txBody>
+          <a:bodyPr wrap="square" lIns="0" tIns="0" rIns="0" bIns="0" rtlCol="0" anchor="ctr"/>
+          <a:lstStyle/>
+          <a:p>
+            <a:pPr algn="ctr" indent="0" marL="0">
+              <a:buNone/>
+            </a:pPr>
+            <a:r>
+              <a:rPr lang="en-US" sz="900" b="1" dirty="0">
+                <a:solidFill>
+                  <a:srgbClr val="9D174D"/>
                 </a:solidFill>
                 <a:latin typeface="Trebuchet MS" pitchFamily="34" charset="0"/>
                 <a:ea typeface="Trebuchet MS" pitchFamily="34" charset="-122"/>
                 <a:cs typeface="Trebuchet MS" pitchFamily="34" charset="-120"/>
               </a:rPr>
-              <a:t>·</a:t>
-            </a:r>
-            <a:endParaRPr lang="en-US" sz="1600" dirty="0"/>
-          </a:p>
-        </p:txBody>
-      </p:sp>
-      <p:sp>
-        <p:nvSpPr>
-          <p:cNvPr id="34" name="Shape 32"/>
-          <p:cNvSpPr/>
-          <p:nvPr/>
-        </p:nvSpPr>
-        <p:spPr>
-          <a:xfrm>
-            <a:off x="5230368" y="3364992"/>
-            <a:ext cx="1554480" cy="475488"/>
+              <a:t>e</a:t>
+            </a:r>
+            <a:endParaRPr lang="en-US" sz="900" dirty="0"/>
+          </a:p>
+        </p:txBody>
+      </p:sp>
+      <p:sp>
+        <p:nvSpPr>
+          <p:cNvPr id="47" name="Shape 45"/>
+          <p:cNvSpPr/>
+          <p:nvPr/>
+        </p:nvSpPr>
+        <p:spPr>
+          <a:xfrm>
+            <a:off x="4855464" y="4169664"/>
+            <a:ext cx="676656" cy="475488"/>
           </a:xfrm>
           <a:prstGeom prst="rect">
             <a:avLst>
-              <a:gd name="adj" fmla="val 9615"/>
+              <a:gd name="adj" fmla="val 7692"/>
             </a:avLst>
           </a:prstGeom>
           <a:solidFill>
@@ -29596,104 +29802,131 @@
           </a:solidFill>
           <a:ln w="12700">
             <a:solidFill>
-              <a:srgbClr val="0D9488"/>
-            </a:solidFill>
-            <a:prstDash val="solid"/>
-          </a:ln>
-        </p:spPr>
-      </p:sp>
-      <p:sp>
-        <p:nvSpPr>
-          <p:cNvPr id="35" name="Text 33"/>
-          <p:cNvSpPr/>
-          <p:nvPr/>
-        </p:nvSpPr>
-        <p:spPr>
-          <a:xfrm>
-            <a:off x="5230368" y="3364992"/>
-            <a:ext cx="1554480" cy="475488"/>
-          </a:xfrm>
-          <a:prstGeom prst="rect">
-            <a:avLst/>
-          </a:prstGeom>
-          <a:noFill/>
-          <a:ln/>
-        </p:spPr>
-        <p:txBody>
-          <a:bodyPr wrap="square" lIns="0" tIns="0" rIns="0" bIns="0" rtlCol="0" anchor="ctr"/>
-          <a:lstStyle/>
-          <a:p>
-            <a:pPr algn="ctr" indent="0" marL="0">
-              <a:buNone/>
-            </a:pPr>
-            <a:r>
-              <a:rPr lang="en-US" sz="1400" b="1" dirty="0">
-                <a:solidFill>
-                  <a:srgbClr val="0D9488"/>
+              <a:srgbClr val="DB2777"/>
+            </a:solidFill>
+            <a:prstDash val="solid"/>
+          </a:ln>
+        </p:spPr>
+      </p:sp>
+      <p:sp>
+        <p:nvSpPr>
+          <p:cNvPr id="48" name="Text 46"/>
+          <p:cNvSpPr/>
+          <p:nvPr/>
+        </p:nvSpPr>
+        <p:spPr>
+          <a:xfrm>
+            <a:off x="4855464" y="4169664"/>
+            <a:ext cx="676656" cy="475488"/>
+          </a:xfrm>
+          <a:prstGeom prst="rect">
+            <a:avLst/>
+          </a:prstGeom>
+          <a:noFill/>
+          <a:ln/>
+        </p:spPr>
+        <p:txBody>
+          <a:bodyPr wrap="square" lIns="0" tIns="0" rIns="0" bIns="0" rtlCol="0" anchor="ctr"/>
+          <a:lstStyle/>
+          <a:p>
+            <a:pPr algn="ctr" indent="0" marL="0">
+              <a:buNone/>
+            </a:pPr>
+            <a:r>
+              <a:rPr lang="en-US" sz="900" b="1" dirty="0">
+                <a:solidFill>
+                  <a:srgbClr val="9D174D"/>
                 </a:solidFill>
                 <a:latin typeface="Trebuchet MS" pitchFamily="34" charset="0"/>
                 <a:ea typeface="Trebuchet MS" pitchFamily="34" charset="-122"/>
                 <a:cs typeface="Trebuchet MS" pitchFamily="34" charset="-120"/>
               </a:rPr>
-              <a:t>op</a:t>
-            </a:r>
-            <a:endParaRPr lang="en-US" sz="1400" dirty="0"/>
-          </a:p>
-        </p:txBody>
-      </p:sp>
-      <p:sp>
-        <p:nvSpPr>
-          <p:cNvPr id="36" name="Text 34"/>
-          <p:cNvSpPr/>
-          <p:nvPr/>
-        </p:nvSpPr>
-        <p:spPr>
-          <a:xfrm>
-            <a:off x="6784848" y="3364992"/>
-            <a:ext cx="73152" cy="475488"/>
-          </a:xfrm>
-          <a:prstGeom prst="rect">
-            <a:avLst/>
-          </a:prstGeom>
-          <a:noFill/>
-          <a:ln/>
-        </p:spPr>
-        <p:txBody>
-          <a:bodyPr wrap="square" lIns="0" tIns="0" rIns="0" bIns="0" rtlCol="0" anchor="ctr"/>
-          <a:lstStyle/>
-          <a:p>
-            <a:pPr algn="ctr" indent="0" marL="0">
-              <a:buNone/>
-            </a:pPr>
-            <a:r>
-              <a:rPr lang="en-US" sz="1600" b="1" dirty="0">
-                <a:solidFill>
-                  <a:srgbClr val="0D9488"/>
+              <a:t>l</a:t>
+            </a:r>
+            <a:endParaRPr lang="en-US" sz="900" dirty="0"/>
+          </a:p>
+        </p:txBody>
+      </p:sp>
+      <p:sp>
+        <p:nvSpPr>
+          <p:cNvPr id="49" name="Shape 47"/>
+          <p:cNvSpPr/>
+          <p:nvPr/>
+        </p:nvSpPr>
+        <p:spPr>
+          <a:xfrm>
+            <a:off x="5581498" y="4169664"/>
+            <a:ext cx="676656" cy="475488"/>
+          </a:xfrm>
+          <a:prstGeom prst="rect">
+            <a:avLst>
+              <a:gd name="adj" fmla="val 7692"/>
+            </a:avLst>
+          </a:prstGeom>
+          <a:solidFill>
+            <a:srgbClr val="FFFFFF"/>
+          </a:solidFill>
+          <a:ln w="12700">
+            <a:solidFill>
+              <a:srgbClr val="DB2777"/>
+            </a:solidFill>
+            <a:prstDash val="solid"/>
+          </a:ln>
+        </p:spPr>
+      </p:sp>
+      <p:sp>
+        <p:nvSpPr>
+          <p:cNvPr id="50" name="Text 48"/>
+          <p:cNvSpPr/>
+          <p:nvPr/>
+        </p:nvSpPr>
+        <p:spPr>
+          <a:xfrm>
+            <a:off x="5581498" y="4169664"/>
+            <a:ext cx="676656" cy="475488"/>
+          </a:xfrm>
+          <a:prstGeom prst="rect">
+            <a:avLst/>
+          </a:prstGeom>
+          <a:noFill/>
+          <a:ln/>
+        </p:spPr>
+        <p:txBody>
+          <a:bodyPr wrap="square" lIns="0" tIns="0" rIns="0" bIns="0" rtlCol="0" anchor="ctr"/>
+          <a:lstStyle/>
+          <a:p>
+            <a:pPr algn="ctr" indent="0" marL="0">
+              <a:buNone/>
+            </a:pPr>
+            <a:r>
+              <a:rPr lang="en-US" sz="900" b="1" dirty="0">
+                <a:solidFill>
+                  <a:srgbClr val="9D174D"/>
                 </a:solidFill>
                 <a:latin typeface="Trebuchet MS" pitchFamily="34" charset="0"/>
                 <a:ea typeface="Trebuchet MS" pitchFamily="34" charset="-122"/>
                 <a:cs typeface="Trebuchet MS" pitchFamily="34" charset="-120"/>
               </a:rPr>
-              <a:t>·</a:t>
-            </a:r>
-            <a:endParaRPr lang="en-US" sz="1600" dirty="0"/>
-          </a:p>
-        </p:txBody>
-      </p:sp>
-      <p:sp>
-        <p:nvSpPr>
-          <p:cNvPr id="37" name="Shape 35"/>
-          <p:cNvSpPr/>
-          <p:nvPr/>
-        </p:nvSpPr>
-        <p:spPr>
-          <a:xfrm>
-            <a:off x="6858000" y="3364992"/>
-            <a:ext cx="1554480" cy="475488"/>
+              <a:t>o</a:t>
+            </a:r>
+            <a:endParaRPr lang="en-US" sz="900" dirty="0"/>
+          </a:p>
+        </p:txBody>
+      </p:sp>
+      <p:sp>
+        <p:nvSpPr>
+          <p:cNvPr id="51" name="Shape 49"/>
+          <p:cNvSpPr/>
+          <p:nvPr/>
+        </p:nvSpPr>
+        <p:spPr>
+          <a:xfrm>
+            <a:off x="6307531" y="4169664"/>
+            <a:ext cx="676656" cy="475488"/>
           </a:xfrm>
           <a:prstGeom prst="rect">
             <a:avLst>
-              <a:gd name="adj" fmla="val 9615"/>
+              <a:gd name="adj" fmla="val 7692"/>
             </a:avLst>
           </a:prstGeom>
           <a:solidFill>
@@ -29701,153 +29934,126 @@
           </a:solidFill>
           <a:ln w="12700">
             <a:solidFill>
-              <a:srgbClr val="0D9488"/>
-            </a:solidFill>
-            <a:prstDash val="solid"/>
-          </a:ln>
-        </p:spPr>
-      </p:sp>
-      <p:sp>
-        <p:nvSpPr>
-          <p:cNvPr id="38" name="Text 36"/>
-          <p:cNvSpPr/>
-          <p:nvPr/>
-        </p:nvSpPr>
-        <p:spPr>
-          <a:xfrm>
-            <a:off x="6858000" y="3364992"/>
-            <a:ext cx="1554480" cy="475488"/>
-          </a:xfrm>
-          <a:prstGeom prst="rect">
-            <a:avLst/>
-          </a:prstGeom>
-          <a:noFill/>
-          <a:ln/>
-        </p:spPr>
-        <p:txBody>
-          <a:bodyPr wrap="square" lIns="0" tIns="0" rIns="0" bIns="0" rtlCol="0" anchor="ctr"/>
-          <a:lstStyle/>
-          <a:p>
-            <a:pPr algn="ctr" indent="0" marL="0">
-              <a:buNone/>
-            </a:pPr>
-            <a:r>
-              <a:rPr lang="en-US" sz="1400" b="1" dirty="0">
-                <a:solidFill>
-                  <a:srgbClr val="0D9488"/>
+              <a:srgbClr val="DB2777"/>
+            </a:solidFill>
+            <a:prstDash val="solid"/>
+          </a:ln>
+        </p:spPr>
+      </p:sp>
+      <p:sp>
+        <p:nvSpPr>
+          <p:cNvPr id="52" name="Text 50"/>
+          <p:cNvSpPr/>
+          <p:nvPr/>
+        </p:nvSpPr>
+        <p:spPr>
+          <a:xfrm>
+            <a:off x="6307531" y="4169664"/>
+            <a:ext cx="676656" cy="475488"/>
+          </a:xfrm>
+          <a:prstGeom prst="rect">
+            <a:avLst/>
+          </a:prstGeom>
+          <a:noFill/>
+          <a:ln/>
+        </p:spPr>
+        <p:txBody>
+          <a:bodyPr wrap="square" lIns="0" tIns="0" rIns="0" bIns="0" rtlCol="0" anchor="ctr"/>
+          <a:lstStyle/>
+          <a:p>
+            <a:pPr algn="ctr" indent="0" marL="0">
+              <a:buNone/>
+            </a:pPr>
+            <a:r>
+              <a:rPr lang="en-US" sz="900" b="1" dirty="0">
+                <a:solidFill>
+                  <a:srgbClr val="9D174D"/>
                 </a:solidFill>
                 <a:latin typeface="Trebuchet MS" pitchFamily="34" charset="0"/>
                 <a:ea typeface="Trebuchet MS" pitchFamily="34" charset="-122"/>
                 <a:cs typeface="Trebuchet MS" pitchFamily="34" charset="-120"/>
               </a:rPr>
-              <a:t>ers</a:t>
-            </a:r>
-            <a:endParaRPr lang="en-US" sz="1400" dirty="0"/>
-          </a:p>
-        </p:txBody>
-      </p:sp>
-      <p:sp>
-        <p:nvSpPr>
-          <p:cNvPr id="39" name="Shape 37"/>
-          <p:cNvSpPr/>
-          <p:nvPr/>
-        </p:nvSpPr>
-        <p:spPr>
-          <a:xfrm>
-            <a:off x="365760" y="4096512"/>
-            <a:ext cx="1371600" cy="804672"/>
+              <a:t>p</a:t>
+            </a:r>
+            <a:endParaRPr lang="en-US" sz="900" dirty="0"/>
+          </a:p>
+        </p:txBody>
+      </p:sp>
+      <p:sp>
+        <p:nvSpPr>
+          <p:cNvPr id="53" name="Shape 51"/>
+          <p:cNvSpPr/>
+          <p:nvPr/>
+        </p:nvSpPr>
+        <p:spPr>
+          <a:xfrm>
+            <a:off x="7033565" y="4169664"/>
+            <a:ext cx="676656" cy="475488"/>
           </a:xfrm>
           <a:prstGeom prst="rect">
             <a:avLst>
-              <a:gd name="adj" fmla="val 6818"/>
+              <a:gd name="adj" fmla="val 7692"/>
             </a:avLst>
           </a:prstGeom>
           <a:solidFill>
-            <a:srgbClr val="E2E8F0"/>
-          </a:solidFill>
-          <a:ln w="12700">
-            <a:solidFill>
-              <a:srgbClr val="E2E8F0"/>
-            </a:solidFill>
-            <a:prstDash val="solid"/>
-          </a:ln>
-        </p:spPr>
-      </p:sp>
-      <p:sp>
-        <p:nvSpPr>
-          <p:cNvPr id="40" name="Text 38"/>
-          <p:cNvSpPr/>
-          <p:nvPr/>
-        </p:nvSpPr>
-        <p:spPr>
-          <a:xfrm>
-            <a:off x="365760" y="4096512"/>
-            <a:ext cx="1371600" cy="804672"/>
-          </a:xfrm>
-          <a:prstGeom prst="rect">
-            <a:avLst/>
-          </a:prstGeom>
-          <a:noFill/>
-          <a:ln/>
-        </p:spPr>
-        <p:txBody>
-          <a:bodyPr wrap="square" lIns="0" tIns="0" rIns="0" bIns="0" rtlCol="0" anchor="ctr"/>
-          <a:lstStyle/>
-          <a:p>
-            <a:pPr algn="ctr" indent="0" marL="0">
-              <a:buNone/>
-            </a:pPr>
-            <a:r>
-              <a:rPr lang="en-US" sz="1100" b="1" dirty="0">
-                <a:solidFill>
-                  <a:srgbClr val="475569"/>
+            <a:srgbClr val="FFFFFF"/>
+          </a:solidFill>
+          <a:ln w="12700">
+            <a:solidFill>
+              <a:srgbClr val="DB2777"/>
+            </a:solidFill>
+            <a:prstDash val="solid"/>
+          </a:ln>
+        </p:spPr>
+      </p:sp>
+      <p:sp>
+        <p:nvSpPr>
+          <p:cNvPr id="54" name="Text 52"/>
+          <p:cNvSpPr/>
+          <p:nvPr/>
+        </p:nvSpPr>
+        <p:spPr>
+          <a:xfrm>
+            <a:off x="7033565" y="4169664"/>
+            <a:ext cx="676656" cy="475488"/>
+          </a:xfrm>
+          <a:prstGeom prst="rect">
+            <a:avLst/>
+          </a:prstGeom>
+          <a:noFill/>
+          <a:ln/>
+        </p:spPr>
+        <p:txBody>
+          <a:bodyPr wrap="square" lIns="0" tIns="0" rIns="0" bIns="0" rtlCol="0" anchor="ctr"/>
+          <a:lstStyle/>
+          <a:p>
+            <a:pPr algn="ctr" indent="0" marL="0">
+              <a:buNone/>
+            </a:pPr>
+            <a:r>
+              <a:rPr lang="en-US" sz="900" b="1" dirty="0">
+                <a:solidFill>
+                  <a:srgbClr val="9D174D"/>
                 </a:solidFill>
                 <a:latin typeface="Trebuchet MS" pitchFamily="34" charset="0"/>
                 <a:ea typeface="Trebuchet MS" pitchFamily="34" charset="-122"/>
                 <a:cs typeface="Trebuchet MS" pitchFamily="34" charset="-120"/>
               </a:rPr>
-              <a:t>Phonemes</a:t>
-            </a:r>
-            <a:endParaRPr lang="en-US" sz="1100" dirty="0"/>
-          </a:p>
-        </p:txBody>
-      </p:sp>
-      <p:sp>
-        <p:nvSpPr>
-          <p:cNvPr id="41" name="Shape 39"/>
-          <p:cNvSpPr/>
-          <p:nvPr/>
-        </p:nvSpPr>
-        <p:spPr>
-          <a:xfrm>
-            <a:off x="1874520" y="4096512"/>
-            <a:ext cx="6903720" cy="658368"/>
-          </a:xfrm>
-          <a:prstGeom prst="rect">
-            <a:avLst>
-              <a:gd name="adj" fmla="val 8333"/>
-            </a:avLst>
-          </a:prstGeom>
-          <a:solidFill>
-            <a:srgbClr val="FCE7F3"/>
-          </a:solidFill>
-          <a:ln w="12700">
-            <a:solidFill>
-              <a:srgbClr val="DB2777"/>
-            </a:solidFill>
-            <a:prstDash val="solid"/>
-          </a:ln>
-        </p:spPr>
-      </p:sp>
-      <p:sp>
-        <p:nvSpPr>
-          <p:cNvPr id="42" name="Shape 40"/>
-          <p:cNvSpPr/>
-          <p:nvPr/>
-        </p:nvSpPr>
-        <p:spPr>
-          <a:xfrm>
-            <a:off x="1951330" y="4169664"/>
+              <a:t>i</a:t>
+            </a:r>
+            <a:endParaRPr lang="en-US" sz="900" dirty="0"/>
+          </a:p>
+        </p:txBody>
+      </p:sp>
+      <p:sp>
+        <p:nvSpPr>
+          <p:cNvPr id="55" name="Shape 53"/>
+          <p:cNvSpPr/>
+          <p:nvPr/>
+        </p:nvSpPr>
+        <p:spPr>
+          <a:xfrm>
+            <a:off x="7759598" y="4169664"/>
             <a:ext cx="676656" cy="475488"/>
           </a:xfrm>
           <a:prstGeom prst="rect">
@@ -29868,13 +30074,13 @@
       </p:sp>
       <p:sp>
         <p:nvSpPr>
-          <p:cNvPr id="43" name="Text 41"/>
-          <p:cNvSpPr/>
-          <p:nvPr/>
-        </p:nvSpPr>
-        <p:spPr>
-          <a:xfrm>
-            <a:off x="1951330" y="4169664"/>
+          <p:cNvPr id="56" name="Text 54"/>
+          <p:cNvSpPr/>
+          <p:nvPr/>
+        </p:nvSpPr>
+        <p:spPr>
+          <a:xfrm>
+            <a:off x="7759598" y="4169664"/>
             <a:ext cx="676656" cy="475488"/>
           </a:xfrm>
           <a:prstGeom prst="rect">
@@ -29899,535 +30105,7 @@
                 <a:ea typeface="Trebuchet MS" pitchFamily="34" charset="-122"/>
                 <a:cs typeface="Trebuchet MS" pitchFamily="34" charset="-120"/>
               </a:rPr>
-              <a:t>d</a:t>
-            </a:r>
-            <a:endParaRPr lang="en-US" sz="900" dirty="0"/>
-          </a:p>
-        </p:txBody>
-      </p:sp>
-      <p:sp>
-        <p:nvSpPr>
-          <p:cNvPr id="44" name="Shape 42"/>
-          <p:cNvSpPr/>
-          <p:nvPr/>
-        </p:nvSpPr>
-        <p:spPr>
-          <a:xfrm>
-            <a:off x="2677363" y="4169664"/>
-            <a:ext cx="676656" cy="475488"/>
-          </a:xfrm>
-          <a:prstGeom prst="rect">
-            <a:avLst>
-              <a:gd name="adj" fmla="val 7692"/>
-            </a:avLst>
-          </a:prstGeom>
-          <a:solidFill>
-            <a:srgbClr val="FFFFFF"/>
-          </a:solidFill>
-          <a:ln w="12700">
-            <a:solidFill>
-              <a:srgbClr val="DB2777"/>
-            </a:solidFill>
-            <a:prstDash val="solid"/>
-          </a:ln>
-        </p:spPr>
-      </p:sp>
-      <p:sp>
-        <p:nvSpPr>
-          <p:cNvPr id="45" name="Text 43"/>
-          <p:cNvSpPr/>
-          <p:nvPr/>
-        </p:nvSpPr>
-        <p:spPr>
-          <a:xfrm>
-            <a:off x="2677363" y="4169664"/>
-            <a:ext cx="676656" cy="475488"/>
-          </a:xfrm>
-          <a:prstGeom prst="rect">
-            <a:avLst/>
-          </a:prstGeom>
-          <a:noFill/>
-          <a:ln/>
-        </p:spPr>
-        <p:txBody>
-          <a:bodyPr wrap="square" lIns="0" tIns="0" rIns="0" bIns="0" rtlCol="0" anchor="ctr"/>
-          <a:lstStyle/>
-          <a:p>
-            <a:pPr algn="ctr" indent="0" marL="0">
-              <a:buNone/>
-            </a:pPr>
-            <a:r>
-              <a:rPr lang="en-US" sz="900" b="1" dirty="0">
-                <a:solidFill>
-                  <a:srgbClr val="9D174D"/>
-                </a:solidFill>
-                <a:latin typeface="Trebuchet MS" pitchFamily="34" charset="0"/>
-                <a:ea typeface="Trebuchet MS" pitchFamily="34" charset="-122"/>
-                <a:cs typeface="Trebuchet MS" pitchFamily="34" charset="-120"/>
-              </a:rPr>
-              <a:t>e</a:t>
-            </a:r>
-            <a:endParaRPr lang="en-US" sz="900" dirty="0"/>
-          </a:p>
-        </p:txBody>
-      </p:sp>
-      <p:sp>
-        <p:nvSpPr>
-          <p:cNvPr id="46" name="Shape 44"/>
-          <p:cNvSpPr/>
-          <p:nvPr/>
-        </p:nvSpPr>
-        <p:spPr>
-          <a:xfrm>
-            <a:off x="3403397" y="4169664"/>
-            <a:ext cx="676656" cy="475488"/>
-          </a:xfrm>
-          <a:prstGeom prst="rect">
-            <a:avLst>
-              <a:gd name="adj" fmla="val 7692"/>
-            </a:avLst>
-          </a:prstGeom>
-          <a:solidFill>
-            <a:srgbClr val="FFFFFF"/>
-          </a:solidFill>
-          <a:ln w="12700">
-            <a:solidFill>
-              <a:srgbClr val="DB2777"/>
-            </a:solidFill>
-            <a:prstDash val="solid"/>
-          </a:ln>
-        </p:spPr>
-      </p:sp>
-      <p:sp>
-        <p:nvSpPr>
-          <p:cNvPr id="47" name="Text 45"/>
-          <p:cNvSpPr/>
-          <p:nvPr/>
-        </p:nvSpPr>
-        <p:spPr>
-          <a:xfrm>
-            <a:off x="3403397" y="4169664"/>
-            <a:ext cx="676656" cy="475488"/>
-          </a:xfrm>
-          <a:prstGeom prst="rect">
-            <a:avLst/>
-          </a:prstGeom>
-          <a:noFill/>
-          <a:ln/>
-        </p:spPr>
-        <p:txBody>
-          <a:bodyPr wrap="square" lIns="0" tIns="0" rIns="0" bIns="0" rtlCol="0" anchor="ctr"/>
-          <a:lstStyle/>
-          <a:p>
-            <a:pPr algn="ctr" indent="0" marL="0">
-              <a:buNone/>
-            </a:pPr>
-            <a:r>
-              <a:rPr lang="en-US" sz="900" b="1" dirty="0">
-                <a:solidFill>
-                  <a:srgbClr val="9D174D"/>
-                </a:solidFill>
-                <a:latin typeface="Trebuchet MS" pitchFamily="34" charset="0"/>
-                <a:ea typeface="Trebuchet MS" pitchFamily="34" charset="-122"/>
-                <a:cs typeface="Trebuchet MS" pitchFamily="34" charset="-120"/>
-              </a:rPr>
-              <a:t>v</a:t>
-            </a:r>
-            <a:endParaRPr lang="en-US" sz="900" dirty="0"/>
-          </a:p>
-        </p:txBody>
-      </p:sp>
-      <p:sp>
-        <p:nvSpPr>
-          <p:cNvPr id="48" name="Shape 46"/>
-          <p:cNvSpPr/>
-          <p:nvPr/>
-        </p:nvSpPr>
-        <p:spPr>
-          <a:xfrm>
-            <a:off x="4129430" y="4169664"/>
-            <a:ext cx="676656" cy="475488"/>
-          </a:xfrm>
-          <a:prstGeom prst="rect">
-            <a:avLst>
-              <a:gd name="adj" fmla="val 7692"/>
-            </a:avLst>
-          </a:prstGeom>
-          <a:solidFill>
-            <a:srgbClr val="FFFFFF"/>
-          </a:solidFill>
-          <a:ln w="12700">
-            <a:solidFill>
-              <a:srgbClr val="DB2777"/>
-            </a:solidFill>
-            <a:prstDash val="solid"/>
-          </a:ln>
-        </p:spPr>
-      </p:sp>
-      <p:sp>
-        <p:nvSpPr>
-          <p:cNvPr id="49" name="Text 47"/>
-          <p:cNvSpPr/>
-          <p:nvPr/>
-        </p:nvSpPr>
-        <p:spPr>
-          <a:xfrm>
-            <a:off x="4129430" y="4169664"/>
-            <a:ext cx="676656" cy="475488"/>
-          </a:xfrm>
-          <a:prstGeom prst="rect">
-            <a:avLst/>
-          </a:prstGeom>
-          <a:noFill/>
-          <a:ln/>
-        </p:spPr>
-        <p:txBody>
-          <a:bodyPr wrap="square" lIns="0" tIns="0" rIns="0" bIns="0" rtlCol="0" anchor="ctr"/>
-          <a:lstStyle/>
-          <a:p>
-            <a:pPr algn="ctr" indent="0" marL="0">
-              <a:buNone/>
-            </a:pPr>
-            <a:r>
-              <a:rPr lang="en-US" sz="900" b="1" dirty="0">
-                <a:solidFill>
-                  <a:srgbClr val="9D174D"/>
-                </a:solidFill>
-                <a:latin typeface="Trebuchet MS" pitchFamily="34" charset="0"/>
-                <a:ea typeface="Trebuchet MS" pitchFamily="34" charset="-122"/>
-                <a:cs typeface="Trebuchet MS" pitchFamily="34" charset="-120"/>
-              </a:rPr>
-              <a:t>e</a:t>
-            </a:r>
-            <a:endParaRPr lang="en-US" sz="900" dirty="0"/>
-          </a:p>
-        </p:txBody>
-      </p:sp>
-      <p:sp>
-        <p:nvSpPr>
-          <p:cNvPr id="50" name="Shape 48"/>
-          <p:cNvSpPr/>
-          <p:nvPr/>
-        </p:nvSpPr>
-        <p:spPr>
-          <a:xfrm>
-            <a:off x="4855464" y="4169664"/>
-            <a:ext cx="676656" cy="475488"/>
-          </a:xfrm>
-          <a:prstGeom prst="rect">
-            <a:avLst>
-              <a:gd name="adj" fmla="val 7692"/>
-            </a:avLst>
-          </a:prstGeom>
-          <a:solidFill>
-            <a:srgbClr val="FFFFFF"/>
-          </a:solidFill>
-          <a:ln w="12700">
-            <a:solidFill>
-              <a:srgbClr val="DB2777"/>
-            </a:solidFill>
-            <a:prstDash val="solid"/>
-          </a:ln>
-        </p:spPr>
-      </p:sp>
-      <p:sp>
-        <p:nvSpPr>
-          <p:cNvPr id="51" name="Text 49"/>
-          <p:cNvSpPr/>
-          <p:nvPr/>
-        </p:nvSpPr>
-        <p:spPr>
-          <a:xfrm>
-            <a:off x="4855464" y="4169664"/>
-            <a:ext cx="676656" cy="475488"/>
-          </a:xfrm>
-          <a:prstGeom prst="rect">
-            <a:avLst/>
-          </a:prstGeom>
-          <a:noFill/>
-          <a:ln/>
-        </p:spPr>
-        <p:txBody>
-          <a:bodyPr wrap="square" lIns="0" tIns="0" rIns="0" bIns="0" rtlCol="0" anchor="ctr"/>
-          <a:lstStyle/>
-          <a:p>
-            <a:pPr algn="ctr" indent="0" marL="0">
-              <a:buNone/>
-            </a:pPr>
-            <a:r>
-              <a:rPr lang="en-US" sz="900" b="1" dirty="0">
-                <a:solidFill>
-                  <a:srgbClr val="9D174D"/>
-                </a:solidFill>
-                <a:latin typeface="Trebuchet MS" pitchFamily="34" charset="0"/>
-                <a:ea typeface="Trebuchet MS" pitchFamily="34" charset="-122"/>
-                <a:cs typeface="Trebuchet MS" pitchFamily="34" charset="-120"/>
-              </a:rPr>
-              <a:t>l</a:t>
-            </a:r>
-            <a:endParaRPr lang="en-US" sz="900" dirty="0"/>
-          </a:p>
-        </p:txBody>
-      </p:sp>
-      <p:sp>
-        <p:nvSpPr>
-          <p:cNvPr id="52" name="Shape 50"/>
-          <p:cNvSpPr/>
-          <p:nvPr/>
-        </p:nvSpPr>
-        <p:spPr>
-          <a:xfrm>
-            <a:off x="5581498" y="4169664"/>
-            <a:ext cx="676656" cy="475488"/>
-          </a:xfrm>
-          <a:prstGeom prst="rect">
-            <a:avLst>
-              <a:gd name="adj" fmla="val 7692"/>
-            </a:avLst>
-          </a:prstGeom>
-          <a:solidFill>
-            <a:srgbClr val="FFFFFF"/>
-          </a:solidFill>
-          <a:ln w="12700">
-            <a:solidFill>
-              <a:srgbClr val="DB2777"/>
-            </a:solidFill>
-            <a:prstDash val="solid"/>
-          </a:ln>
-        </p:spPr>
-      </p:sp>
-      <p:sp>
-        <p:nvSpPr>
-          <p:cNvPr id="53" name="Text 51"/>
-          <p:cNvSpPr/>
-          <p:nvPr/>
-        </p:nvSpPr>
-        <p:spPr>
-          <a:xfrm>
-            <a:off x="5581498" y="4169664"/>
-            <a:ext cx="676656" cy="475488"/>
-          </a:xfrm>
-          <a:prstGeom prst="rect">
-            <a:avLst/>
-          </a:prstGeom>
-          <a:noFill/>
-          <a:ln/>
-        </p:spPr>
-        <p:txBody>
-          <a:bodyPr wrap="square" lIns="0" tIns="0" rIns="0" bIns="0" rtlCol="0" anchor="ctr"/>
-          <a:lstStyle/>
-          <a:p>
-            <a:pPr algn="ctr" indent="0" marL="0">
-              <a:buNone/>
-            </a:pPr>
-            <a:r>
-              <a:rPr lang="en-US" sz="900" b="1" dirty="0">
-                <a:solidFill>
-                  <a:srgbClr val="9D174D"/>
-                </a:solidFill>
-                <a:latin typeface="Trebuchet MS" pitchFamily="34" charset="0"/>
-                <a:ea typeface="Trebuchet MS" pitchFamily="34" charset="-122"/>
-                <a:cs typeface="Trebuchet MS" pitchFamily="34" charset="-120"/>
-              </a:rPr>
-              <a:t>o</a:t>
-            </a:r>
-            <a:endParaRPr lang="en-US" sz="900" dirty="0"/>
-          </a:p>
-        </p:txBody>
-      </p:sp>
-      <p:sp>
-        <p:nvSpPr>
-          <p:cNvPr id="54" name="Shape 52"/>
-          <p:cNvSpPr/>
-          <p:nvPr/>
-        </p:nvSpPr>
-        <p:spPr>
-          <a:xfrm>
-            <a:off x="6307531" y="4169664"/>
-            <a:ext cx="676656" cy="475488"/>
-          </a:xfrm>
-          <a:prstGeom prst="rect">
-            <a:avLst>
-              <a:gd name="adj" fmla="val 7692"/>
-            </a:avLst>
-          </a:prstGeom>
-          <a:solidFill>
-            <a:srgbClr val="FFFFFF"/>
-          </a:solidFill>
-          <a:ln w="12700">
-            <a:solidFill>
-              <a:srgbClr val="DB2777"/>
-            </a:solidFill>
-            <a:prstDash val="solid"/>
-          </a:ln>
-        </p:spPr>
-      </p:sp>
-      <p:sp>
-        <p:nvSpPr>
-          <p:cNvPr id="55" name="Text 53"/>
-          <p:cNvSpPr/>
-          <p:nvPr/>
-        </p:nvSpPr>
-        <p:spPr>
-          <a:xfrm>
-            <a:off x="6307531" y="4169664"/>
-            <a:ext cx="676656" cy="475488"/>
-          </a:xfrm>
-          <a:prstGeom prst="rect">
-            <a:avLst/>
-          </a:prstGeom>
-          <a:noFill/>
-          <a:ln/>
-        </p:spPr>
-        <p:txBody>
-          <a:bodyPr wrap="square" lIns="0" tIns="0" rIns="0" bIns="0" rtlCol="0" anchor="ctr"/>
-          <a:lstStyle/>
-          <a:p>
-            <a:pPr algn="ctr" indent="0" marL="0">
-              <a:buNone/>
-            </a:pPr>
-            <a:r>
-              <a:rPr lang="en-US" sz="900" b="1" dirty="0">
-                <a:solidFill>
-                  <a:srgbClr val="9D174D"/>
-                </a:solidFill>
-                <a:latin typeface="Trebuchet MS" pitchFamily="34" charset="0"/>
-                <a:ea typeface="Trebuchet MS" pitchFamily="34" charset="-122"/>
-                <a:cs typeface="Trebuchet MS" pitchFamily="34" charset="-120"/>
-              </a:rPr>
-              <a:t>p</a:t>
-            </a:r>
-            <a:endParaRPr lang="en-US" sz="900" dirty="0"/>
-          </a:p>
-        </p:txBody>
-      </p:sp>
-      <p:sp>
-        <p:nvSpPr>
-          <p:cNvPr id="56" name="Shape 54"/>
-          <p:cNvSpPr/>
-          <p:nvPr/>
-        </p:nvSpPr>
-        <p:spPr>
-          <a:xfrm>
-            <a:off x="7033565" y="4169664"/>
-            <a:ext cx="676656" cy="475488"/>
-          </a:xfrm>
-          <a:prstGeom prst="rect">
-            <a:avLst>
-              <a:gd name="adj" fmla="val 7692"/>
-            </a:avLst>
-          </a:prstGeom>
-          <a:solidFill>
-            <a:srgbClr val="FFFFFF"/>
-          </a:solidFill>
-          <a:ln w="12700">
-            <a:solidFill>
-              <a:srgbClr val="DB2777"/>
-            </a:solidFill>
-            <a:prstDash val="solid"/>
-          </a:ln>
-        </p:spPr>
-      </p:sp>
-      <p:sp>
-        <p:nvSpPr>
-          <p:cNvPr id="57" name="Text 55"/>
-          <p:cNvSpPr/>
-          <p:nvPr/>
-        </p:nvSpPr>
-        <p:spPr>
-          <a:xfrm>
-            <a:off x="7033565" y="4169664"/>
-            <a:ext cx="676656" cy="475488"/>
-          </a:xfrm>
-          <a:prstGeom prst="rect">
-            <a:avLst/>
-          </a:prstGeom>
-          <a:noFill/>
-          <a:ln/>
-        </p:spPr>
-        <p:txBody>
-          <a:bodyPr wrap="square" lIns="0" tIns="0" rIns="0" bIns="0" rtlCol="0" anchor="ctr"/>
-          <a:lstStyle/>
-          <a:p>
-            <a:pPr algn="ctr" indent="0" marL="0">
-              <a:buNone/>
-            </a:pPr>
-            <a:r>
-              <a:rPr lang="en-US" sz="900" b="1" dirty="0">
-                <a:solidFill>
-                  <a:srgbClr val="9D174D"/>
-                </a:solidFill>
-                <a:latin typeface="Trebuchet MS" pitchFamily="34" charset="0"/>
-                <a:ea typeface="Trebuchet MS" pitchFamily="34" charset="-122"/>
-                <a:cs typeface="Trebuchet MS" pitchFamily="34" charset="-120"/>
-              </a:rPr>
-              <a:t>er</a:t>
-            </a:r>
-            <a:endParaRPr lang="en-US" sz="900" dirty="0"/>
-          </a:p>
-        </p:txBody>
-      </p:sp>
-      <p:sp>
-        <p:nvSpPr>
-          <p:cNvPr id="58" name="Shape 56"/>
-          <p:cNvSpPr/>
-          <p:nvPr/>
-        </p:nvSpPr>
-        <p:spPr>
-          <a:xfrm>
-            <a:off x="7759598" y="4169664"/>
-            <a:ext cx="676656" cy="475488"/>
-          </a:xfrm>
-          <a:prstGeom prst="rect">
-            <a:avLst>
-              <a:gd name="adj" fmla="val 7692"/>
-            </a:avLst>
-          </a:prstGeom>
-          <a:solidFill>
-            <a:srgbClr val="FFFFFF"/>
-          </a:solidFill>
-          <a:ln w="12700">
-            <a:solidFill>
-              <a:srgbClr val="DB2777"/>
-            </a:solidFill>
-            <a:prstDash val="solid"/>
-          </a:ln>
-        </p:spPr>
-      </p:sp>
-      <p:sp>
-        <p:nvSpPr>
-          <p:cNvPr id="59" name="Text 57"/>
-          <p:cNvSpPr/>
-          <p:nvPr/>
-        </p:nvSpPr>
-        <p:spPr>
-          <a:xfrm>
-            <a:off x="7759598" y="4169664"/>
-            <a:ext cx="676656" cy="475488"/>
-          </a:xfrm>
-          <a:prstGeom prst="rect">
-            <a:avLst/>
-          </a:prstGeom>
-          <a:noFill/>
-          <a:ln/>
-        </p:spPr>
-        <p:txBody>
-          <a:bodyPr wrap="square" lIns="0" tIns="0" rIns="0" bIns="0" rtlCol="0" anchor="ctr"/>
-          <a:lstStyle/>
-          <a:p>
-            <a:pPr algn="ctr" indent="0" marL="0">
-              <a:buNone/>
-            </a:pPr>
-            <a:r>
-              <a:rPr lang="en-US" sz="900" b="1" dirty="0">
-                <a:solidFill>
-                  <a:srgbClr val="9D174D"/>
-                </a:solidFill>
-                <a:latin typeface="Trebuchet MS" pitchFamily="34" charset="0"/>
-                <a:ea typeface="Trebuchet MS" pitchFamily="34" charset="-122"/>
-                <a:cs typeface="Trebuchet MS" pitchFamily="34" charset="-120"/>
-              </a:rPr>
-              <a:t>s</a:t>
+              <a:t>ng</a:t>
             </a:r>
             <a:endParaRPr lang="en-US" sz="900" dirty="0"/>
           </a:p>
@@ -30719,7 +30397,7 @@
                 <a:ea typeface="Calibri" pitchFamily="34" charset="-122"/>
                 <a:cs typeface="Calibri" pitchFamily="34" charset="-120"/>
               </a:rPr>
-              <a:t>Word Labs  •  wordlabs.app  •  Root: 'develop' = to grow or build up</a:t>
+              <a:t>Word Labs  •  wordlabs.app  •  Root: 'develop' = to grow or unfold gradually</a:t>
             </a:r>
             <a:endParaRPr lang="en-US" sz="800" dirty="0"/>
           </a:p>
@@ -30858,7 +30536,7 @@
                 <a:ea typeface="Trebuchet MS" pitchFamily="34" charset="-122"/>
                 <a:cs typeface="Trebuchet MS" pitchFamily="34" charset="-120"/>
               </a:rPr>
-              <a:t>developed</a:t>
+              <a:t>developments</a:t>
             </a:r>
             <a:endParaRPr lang="en-US" sz="2800" dirty="0"/>
           </a:p>
@@ -31546,7 +31224,7 @@
                 <a:ea typeface="Calibri" pitchFamily="34" charset="-122"/>
                 <a:cs typeface="Calibri" pitchFamily="34" charset="-120"/>
               </a:rPr>
-              <a:t>Word Labs  •  wordlabs.app  •  Root: 'develop' = to grow or build up</a:t>
+              <a:t>Word Labs  •  wordlabs.app  •  Root: 'develop' = to grow or unfold gradually</a:t>
             </a:r>
             <a:endParaRPr lang="en-US" sz="800" dirty="0"/>
           </a:p>
@@ -31685,7 +31363,7 @@
                 <a:ea typeface="Trebuchet MS" pitchFamily="34" charset="-122"/>
                 <a:cs typeface="Trebuchet MS" pitchFamily="34" charset="-120"/>
               </a:rPr>
-              <a:t>developed</a:t>
+              <a:t>developments</a:t>
             </a:r>
             <a:endParaRPr lang="en-US" sz="2800" dirty="0"/>
           </a:p>
@@ -31765,7 +31443,7 @@
         </p:nvSpPr>
         <p:spPr>
           <a:xfrm>
-            <a:off x="2938272" y="2258568"/>
+            <a:off x="2221992" y="2258568"/>
             <a:ext cx="1828800" cy="292608"/>
           </a:xfrm>
           <a:prstGeom prst="rect">
@@ -31799,7 +31477,7 @@
         </p:nvSpPr>
         <p:spPr>
           <a:xfrm>
-            <a:off x="2938272" y="2258568"/>
+            <a:off x="2221992" y="2258568"/>
             <a:ext cx="1828800" cy="292608"/>
           </a:xfrm>
           <a:prstGeom prst="rect">
@@ -31838,7 +31516,7 @@
         </p:nvSpPr>
         <p:spPr>
           <a:xfrm>
-            <a:off x="2938272" y="2569464"/>
+            <a:off x="2221992" y="2569464"/>
             <a:ext cx="1828800" cy="201168"/>
           </a:xfrm>
           <a:prstGeom prst="rect">
@@ -31863,7 +31541,7 @@
                 <a:ea typeface="Calibri" pitchFamily="34" charset="-122"/>
                 <a:cs typeface="Calibri" pitchFamily="34" charset="-120"/>
               </a:rPr>
-              <a:t>to grow or build up</a:t>
+              <a:t>to grow or build gradually</a:t>
             </a:r>
             <a:endParaRPr lang="en-US" sz="850" dirty="0"/>
           </a:p>
@@ -31877,7 +31555,7 @@
         </p:nvSpPr>
         <p:spPr>
           <a:xfrm>
-            <a:off x="5803392" y="2258568"/>
+            <a:off x="4370832" y="2258568"/>
             <a:ext cx="1828800" cy="292608"/>
           </a:xfrm>
           <a:prstGeom prst="rect">
@@ -31911,7 +31589,7 @@
         </p:nvSpPr>
         <p:spPr>
           <a:xfrm>
-            <a:off x="5803392" y="2258568"/>
+            <a:off x="4370832" y="2258568"/>
             <a:ext cx="1828800" cy="292608"/>
           </a:xfrm>
           <a:prstGeom prst="rect">
@@ -31936,7 +31614,7 @@
                 <a:ea typeface="Trebuchet MS" pitchFamily="34" charset="-122"/>
                 <a:cs typeface="Trebuchet MS" pitchFamily="34" charset="-120"/>
               </a:rPr>
-              <a:t>ed</a:t>
+              <a:t>ment</a:t>
             </a:r>
             <a:endParaRPr lang="en-US" sz="1300" dirty="0"/>
           </a:p>
@@ -31950,7 +31628,7 @@
         </p:nvSpPr>
         <p:spPr>
           <a:xfrm>
-            <a:off x="5803392" y="2569464"/>
+            <a:off x="4370832" y="2569464"/>
             <a:ext cx="1828800" cy="201168"/>
           </a:xfrm>
           <a:prstGeom prst="rect">
@@ -31975,7 +31653,7 @@
                 <a:ea typeface="Calibri" pitchFamily="34" charset="-122"/>
                 <a:cs typeface="Calibri" pitchFamily="34" charset="-120"/>
               </a:rPr>
-              <a:t>happened in the past</a:t>
+              <a:t>the result or process of</a:t>
             </a:r>
             <a:endParaRPr lang="en-US" sz="850" dirty="0"/>
           </a:p>
@@ -31984,6 +31662,118 @@
       <p:sp>
         <p:nvSpPr>
           <p:cNvPr id="22" name="Shape 20"/>
+          <p:cNvSpPr/>
+          <p:nvPr/>
+        </p:nvSpPr>
+        <p:spPr>
+          <a:xfrm>
+            <a:off x="6519672" y="2258568"/>
+            <a:ext cx="1828800" cy="292608"/>
+          </a:xfrm>
+          <a:prstGeom prst="rect">
+            <a:avLst>
+              <a:gd name="adj" fmla="val 25000"/>
+            </a:avLst>
+          </a:prstGeom>
+          <a:solidFill>
+            <a:srgbClr val="FCE7F3"/>
+          </a:solidFill>
+          <a:ln w="19050">
+            <a:solidFill>
+              <a:srgbClr val="DB2777"/>
+            </a:solidFill>
+            <a:prstDash val="solid"/>
+          </a:ln>
+          <a:effectLst>
+            <a:outerShdw sx="100000" sy="100000" kx="0" ky="0" algn="bl" rotWithShape="0" blurRad="101600" dist="38100" dir="8100000">
+              <a:srgbClr val="000000">
+                <a:alpha val="12000"/>
+              </a:srgbClr>
+            </a:outerShdw>
+          </a:effectLst>
+        </p:spPr>
+      </p:sp>
+      <p:sp>
+        <p:nvSpPr>
+          <p:cNvPr id="23" name="Text 21"/>
+          <p:cNvSpPr/>
+          <p:nvPr/>
+        </p:nvSpPr>
+        <p:spPr>
+          <a:xfrm>
+            <a:off x="6519672" y="2258568"/>
+            <a:ext cx="1828800" cy="292608"/>
+          </a:xfrm>
+          <a:prstGeom prst="rect">
+            <a:avLst/>
+          </a:prstGeom>
+          <a:noFill/>
+          <a:ln/>
+        </p:spPr>
+        <p:txBody>
+          <a:bodyPr wrap="square" lIns="0" tIns="0" rIns="0" bIns="0" rtlCol="0" anchor="ctr"/>
+          <a:lstStyle/>
+          <a:p>
+            <a:pPr algn="ctr" indent="0" marL="0">
+              <a:buNone/>
+            </a:pPr>
+            <a:r>
+              <a:rPr lang="en-US" sz="1300" b="1" dirty="0">
+                <a:solidFill>
+                  <a:srgbClr val="9D174D"/>
+                </a:solidFill>
+                <a:latin typeface="Trebuchet MS" pitchFamily="34" charset="0"/>
+                <a:ea typeface="Trebuchet MS" pitchFamily="34" charset="-122"/>
+                <a:cs typeface="Trebuchet MS" pitchFamily="34" charset="-120"/>
+              </a:rPr>
+              <a:t>s</a:t>
+            </a:r>
+            <a:endParaRPr lang="en-US" sz="1300" dirty="0"/>
+          </a:p>
+        </p:txBody>
+      </p:sp>
+      <p:sp>
+        <p:nvSpPr>
+          <p:cNvPr id="24" name="Text 22"/>
+          <p:cNvSpPr/>
+          <p:nvPr/>
+        </p:nvSpPr>
+        <p:spPr>
+          <a:xfrm>
+            <a:off x="6519672" y="2569464"/>
+            <a:ext cx="1828800" cy="201168"/>
+          </a:xfrm>
+          <a:prstGeom prst="rect">
+            <a:avLst/>
+          </a:prstGeom>
+          <a:noFill/>
+          <a:ln/>
+        </p:spPr>
+        <p:txBody>
+          <a:bodyPr wrap="square" lIns="0" tIns="0" rIns="0" bIns="0" rtlCol="0" anchor="t"/>
+          <a:lstStyle/>
+          <a:p>
+            <a:pPr algn="ctr" indent="0" marL="0">
+              <a:buNone/>
+            </a:pPr>
+            <a:r>
+              <a:rPr lang="en-US" sz="850" dirty="0">
+                <a:solidFill>
+                  <a:srgbClr val="475569"/>
+                </a:solidFill>
+                <a:latin typeface="Calibri" pitchFamily="34" charset="0"/>
+                <a:ea typeface="Calibri" pitchFamily="34" charset="-122"/>
+                <a:cs typeface="Calibri" pitchFamily="34" charset="-120"/>
+              </a:rPr>
+              <a:t>more than one</a:t>
+            </a:r>
+            <a:endParaRPr lang="en-US" sz="850" dirty="0"/>
+          </a:p>
+        </p:txBody>
+      </p:sp>
+      <p:sp>
+        <p:nvSpPr>
+          <p:cNvPr id="25" name="Shape 23"/>
           <p:cNvSpPr/>
           <p:nvPr/>
         </p:nvSpPr>
@@ -32010,7 +31800,7 @@
       </p:sp>
       <p:sp>
         <p:nvSpPr>
-          <p:cNvPr id="23" name="Text 21"/>
+          <p:cNvPr id="26" name="Text 24"/>
           <p:cNvSpPr/>
           <p:nvPr/>
         </p:nvSpPr>
@@ -32049,7 +31839,7 @@
       </p:sp>
       <p:sp>
         <p:nvSpPr>
-          <p:cNvPr id="24" name="Shape 22"/>
+          <p:cNvPr id="27" name="Shape 25"/>
           <p:cNvSpPr/>
           <p:nvPr/>
         </p:nvSpPr>
@@ -32076,7 +31866,7 @@
       </p:sp>
       <p:sp>
         <p:nvSpPr>
-          <p:cNvPr id="25" name="Text 23"/>
+          <p:cNvPr id="28" name="Text 26"/>
           <p:cNvSpPr/>
           <p:nvPr/>
         </p:nvSpPr>
@@ -32115,7 +31905,7 @@
       </p:sp>
       <p:sp>
         <p:nvSpPr>
-          <p:cNvPr id="26" name="Shape 24"/>
+          <p:cNvPr id="29" name="Shape 27"/>
           <p:cNvSpPr/>
           <p:nvPr/>
         </p:nvSpPr>
@@ -32142,7 +31932,7 @@
       </p:sp>
       <p:sp>
         <p:nvSpPr>
-          <p:cNvPr id="27" name="Text 25"/>
+          <p:cNvPr id="30" name="Text 28"/>
           <p:cNvSpPr/>
           <p:nvPr/>
         </p:nvSpPr>
@@ -32181,7 +31971,7 @@
       </p:sp>
       <p:sp>
         <p:nvSpPr>
-          <p:cNvPr id="28" name="Shape 26"/>
+          <p:cNvPr id="31" name="Shape 29"/>
           <p:cNvSpPr/>
           <p:nvPr/>
         </p:nvSpPr>
@@ -32208,7 +31998,7 @@
       </p:sp>
       <p:sp>
         <p:nvSpPr>
-          <p:cNvPr id="29" name="Text 27"/>
+          <p:cNvPr id="32" name="Text 30"/>
           <p:cNvSpPr/>
           <p:nvPr/>
         </p:nvSpPr>
@@ -32531,7 +32321,7 @@
                 <a:ea typeface="Calibri" pitchFamily="34" charset="-122"/>
                 <a:cs typeface="Calibri" pitchFamily="34" charset="-120"/>
               </a:rPr>
-              <a:t>Word Labs  •  wordlabs.app  •  Root: 'develop' = to grow or build up</a:t>
+              <a:t>Word Labs  •  wordlabs.app  •  Root: 'develop' = to grow or unfold gradually</a:t>
             </a:r>
             <a:endParaRPr lang="en-US" sz="800" dirty="0"/>
           </a:p>
@@ -32670,7 +32460,7 @@
                 <a:ea typeface="Trebuchet MS" pitchFamily="34" charset="-122"/>
                 <a:cs typeface="Trebuchet MS" pitchFamily="34" charset="-120"/>
               </a:rPr>
-              <a:t>developed</a:t>
+              <a:t>developments</a:t>
             </a:r>
             <a:endParaRPr lang="en-US" sz="2800" dirty="0"/>
           </a:p>
@@ -32750,7 +32540,7 @@
         </p:nvSpPr>
         <p:spPr>
           <a:xfrm>
-            <a:off x="2938272" y="2258568"/>
+            <a:off x="2221992" y="2258568"/>
             <a:ext cx="1828800" cy="292608"/>
           </a:xfrm>
           <a:prstGeom prst="rect">
@@ -32784,7 +32574,7 @@
         </p:nvSpPr>
         <p:spPr>
           <a:xfrm>
-            <a:off x="2938272" y="2258568"/>
+            <a:off x="2221992" y="2258568"/>
             <a:ext cx="1828800" cy="292608"/>
           </a:xfrm>
           <a:prstGeom prst="rect">
@@ -32823,7 +32613,7 @@
         </p:nvSpPr>
         <p:spPr>
           <a:xfrm>
-            <a:off x="2938272" y="2569464"/>
+            <a:off x="2221992" y="2569464"/>
             <a:ext cx="1828800" cy="201168"/>
           </a:xfrm>
           <a:prstGeom prst="rect">
@@ -32848,7 +32638,7 @@
                 <a:ea typeface="Calibri" pitchFamily="34" charset="-122"/>
                 <a:cs typeface="Calibri" pitchFamily="34" charset="-120"/>
               </a:rPr>
-              <a:t>to grow or build up</a:t>
+              <a:t>to grow or build gradually</a:t>
             </a:r>
             <a:endParaRPr lang="en-US" sz="850" dirty="0"/>
           </a:p>
@@ -32862,7 +32652,7 @@
         </p:nvSpPr>
         <p:spPr>
           <a:xfrm>
-            <a:off x="5803392" y="2258568"/>
+            <a:off x="4370832" y="2258568"/>
             <a:ext cx="1828800" cy="292608"/>
           </a:xfrm>
           <a:prstGeom prst="rect">
@@ -32896,7 +32686,7 @@
         </p:nvSpPr>
         <p:spPr>
           <a:xfrm>
-            <a:off x="5803392" y="2258568"/>
+            <a:off x="4370832" y="2258568"/>
             <a:ext cx="1828800" cy="292608"/>
           </a:xfrm>
           <a:prstGeom prst="rect">
@@ -32921,7 +32711,7 @@
                 <a:ea typeface="Trebuchet MS" pitchFamily="34" charset="-122"/>
                 <a:cs typeface="Trebuchet MS" pitchFamily="34" charset="-120"/>
               </a:rPr>
-              <a:t>ed</a:t>
+              <a:t>ment</a:t>
             </a:r>
             <a:endParaRPr lang="en-US" sz="1300" dirty="0"/>
           </a:p>
@@ -32935,7 +32725,7 @@
         </p:nvSpPr>
         <p:spPr>
           <a:xfrm>
-            <a:off x="5803392" y="2569464"/>
+            <a:off x="4370832" y="2569464"/>
             <a:ext cx="1828800" cy="201168"/>
           </a:xfrm>
           <a:prstGeom prst="rect">
@@ -32960,7 +32750,7 @@
                 <a:ea typeface="Calibri" pitchFamily="34" charset="-122"/>
                 <a:cs typeface="Calibri" pitchFamily="34" charset="-120"/>
               </a:rPr>
-              <a:t>happened in the past</a:t>
+              <a:t>the result or process of</a:t>
             </a:r>
             <a:endParaRPr lang="en-US" sz="850" dirty="0"/>
           </a:p>
@@ -32969,6 +32759,118 @@
       <p:sp>
         <p:nvSpPr>
           <p:cNvPr id="22" name="Shape 20"/>
+          <p:cNvSpPr/>
+          <p:nvPr/>
+        </p:nvSpPr>
+        <p:spPr>
+          <a:xfrm>
+            <a:off x="6519672" y="2258568"/>
+            <a:ext cx="1828800" cy="292608"/>
+          </a:xfrm>
+          <a:prstGeom prst="rect">
+            <a:avLst>
+              <a:gd name="adj" fmla="val 25000"/>
+            </a:avLst>
+          </a:prstGeom>
+          <a:solidFill>
+            <a:srgbClr val="FCE7F3"/>
+          </a:solidFill>
+          <a:ln w="19050">
+            <a:solidFill>
+              <a:srgbClr val="DB2777"/>
+            </a:solidFill>
+            <a:prstDash val="solid"/>
+          </a:ln>
+          <a:effectLst>
+            <a:outerShdw sx="100000" sy="100000" kx="0" ky="0" algn="bl" rotWithShape="0" blurRad="101600" dist="38100" dir="8100000">
+              <a:srgbClr val="000000">
+                <a:alpha val="12000"/>
+              </a:srgbClr>
+            </a:outerShdw>
+          </a:effectLst>
+        </p:spPr>
+      </p:sp>
+      <p:sp>
+        <p:nvSpPr>
+          <p:cNvPr id="23" name="Text 21"/>
+          <p:cNvSpPr/>
+          <p:nvPr/>
+        </p:nvSpPr>
+        <p:spPr>
+          <a:xfrm>
+            <a:off x="6519672" y="2258568"/>
+            <a:ext cx="1828800" cy="292608"/>
+          </a:xfrm>
+          <a:prstGeom prst="rect">
+            <a:avLst/>
+          </a:prstGeom>
+          <a:noFill/>
+          <a:ln/>
+        </p:spPr>
+        <p:txBody>
+          <a:bodyPr wrap="square" lIns="0" tIns="0" rIns="0" bIns="0" rtlCol="0" anchor="ctr"/>
+          <a:lstStyle/>
+          <a:p>
+            <a:pPr algn="ctr" indent="0" marL="0">
+              <a:buNone/>
+            </a:pPr>
+            <a:r>
+              <a:rPr lang="en-US" sz="1300" b="1" dirty="0">
+                <a:solidFill>
+                  <a:srgbClr val="9D174D"/>
+                </a:solidFill>
+                <a:latin typeface="Trebuchet MS" pitchFamily="34" charset="0"/>
+                <a:ea typeface="Trebuchet MS" pitchFamily="34" charset="-122"/>
+                <a:cs typeface="Trebuchet MS" pitchFamily="34" charset="-120"/>
+              </a:rPr>
+              <a:t>s</a:t>
+            </a:r>
+            <a:endParaRPr lang="en-US" sz="1300" dirty="0"/>
+          </a:p>
+        </p:txBody>
+      </p:sp>
+      <p:sp>
+        <p:nvSpPr>
+          <p:cNvPr id="24" name="Text 22"/>
+          <p:cNvSpPr/>
+          <p:nvPr/>
+        </p:nvSpPr>
+        <p:spPr>
+          <a:xfrm>
+            <a:off x="6519672" y="2569464"/>
+            <a:ext cx="1828800" cy="201168"/>
+          </a:xfrm>
+          <a:prstGeom prst="rect">
+            <a:avLst/>
+          </a:prstGeom>
+          <a:noFill/>
+          <a:ln/>
+        </p:spPr>
+        <p:txBody>
+          <a:bodyPr wrap="square" lIns="0" tIns="0" rIns="0" bIns="0" rtlCol="0" anchor="t"/>
+          <a:lstStyle/>
+          <a:p>
+            <a:pPr algn="ctr" indent="0" marL="0">
+              <a:buNone/>
+            </a:pPr>
+            <a:r>
+              <a:rPr lang="en-US" sz="850" dirty="0">
+                <a:solidFill>
+                  <a:srgbClr val="475569"/>
+                </a:solidFill>
+                <a:latin typeface="Calibri" pitchFamily="34" charset="0"/>
+                <a:ea typeface="Calibri" pitchFamily="34" charset="-122"/>
+                <a:cs typeface="Calibri" pitchFamily="34" charset="-120"/>
+              </a:rPr>
+              <a:t>more than one</a:t>
+            </a:r>
+            <a:endParaRPr lang="en-US" sz="850" dirty="0"/>
+          </a:p>
+        </p:txBody>
+      </p:sp>
+      <p:sp>
+        <p:nvSpPr>
+          <p:cNvPr id="25" name="Shape 23"/>
           <p:cNvSpPr/>
           <p:nvPr/>
         </p:nvSpPr>
@@ -32995,7 +32897,7 @@
       </p:sp>
       <p:sp>
         <p:nvSpPr>
-          <p:cNvPr id="23" name="Text 21"/>
+          <p:cNvPr id="26" name="Text 24"/>
           <p:cNvSpPr/>
           <p:nvPr/>
         </p:nvSpPr>
@@ -33034,7 +32936,7 @@
       </p:sp>
       <p:sp>
         <p:nvSpPr>
-          <p:cNvPr id="24" name="Shape 22"/>
+          <p:cNvPr id="27" name="Shape 25"/>
           <p:cNvSpPr/>
           <p:nvPr/>
         </p:nvSpPr>
@@ -33061,14 +32963,14 @@
       </p:sp>
       <p:sp>
         <p:nvSpPr>
-          <p:cNvPr id="25" name="Shape 23"/>
-          <p:cNvSpPr/>
-          <p:nvPr/>
-        </p:nvSpPr>
-        <p:spPr>
-          <a:xfrm>
-            <a:off x="2313432" y="3364992"/>
-            <a:ext cx="1645920" cy="475488"/>
+          <p:cNvPr id="28" name="Shape 26"/>
+          <p:cNvSpPr/>
+          <p:nvPr/>
+        </p:nvSpPr>
+        <p:spPr>
+          <a:xfrm>
+            <a:off x="1975104" y="3364992"/>
+            <a:ext cx="1554480" cy="475488"/>
           </a:xfrm>
           <a:prstGeom prst="rect">
             <a:avLst>
@@ -33088,14 +32990,14 @@
       </p:sp>
       <p:sp>
         <p:nvSpPr>
-          <p:cNvPr id="26" name="Text 24"/>
-          <p:cNvSpPr/>
-          <p:nvPr/>
-        </p:nvSpPr>
-        <p:spPr>
-          <a:xfrm>
-            <a:off x="2313432" y="3364992"/>
-            <a:ext cx="1645920" cy="475488"/>
+          <p:cNvPr id="29" name="Text 27"/>
+          <p:cNvSpPr/>
+          <p:nvPr/>
+        </p:nvSpPr>
+        <p:spPr>
+          <a:xfrm>
+            <a:off x="1975104" y="3364992"/>
+            <a:ext cx="1554480" cy="475488"/>
           </a:xfrm>
           <a:prstGeom prst="rect">
             <a:avLst/>
@@ -33127,14 +33029,14 @@
       </p:sp>
       <p:sp>
         <p:nvSpPr>
-          <p:cNvPr id="27" name="Text 25"/>
-          <p:cNvSpPr/>
-          <p:nvPr/>
-        </p:nvSpPr>
-        <p:spPr>
-          <a:xfrm>
-            <a:off x="3959352" y="3364992"/>
-            <a:ext cx="411480" cy="475488"/>
+          <p:cNvPr id="30" name="Text 28"/>
+          <p:cNvSpPr/>
+          <p:nvPr/>
+        </p:nvSpPr>
+        <p:spPr>
+          <a:xfrm>
+            <a:off x="3529584" y="3364992"/>
+            <a:ext cx="73152" cy="475488"/>
           </a:xfrm>
           <a:prstGeom prst="rect">
             <a:avLst/>
@@ -33166,14 +33068,14 @@
       </p:sp>
       <p:sp>
         <p:nvSpPr>
-          <p:cNvPr id="28" name="Shape 26"/>
-          <p:cNvSpPr/>
-          <p:nvPr/>
-        </p:nvSpPr>
-        <p:spPr>
-          <a:xfrm>
-            <a:off x="4370832" y="3364992"/>
-            <a:ext cx="1645920" cy="475488"/>
+          <p:cNvPr id="31" name="Shape 29"/>
+          <p:cNvSpPr/>
+          <p:nvPr/>
+        </p:nvSpPr>
+        <p:spPr>
+          <a:xfrm>
+            <a:off x="3602736" y="3364992"/>
+            <a:ext cx="1554480" cy="475488"/>
           </a:xfrm>
           <a:prstGeom prst="rect">
             <a:avLst>
@@ -33193,14 +33095,14 @@
       </p:sp>
       <p:sp>
         <p:nvSpPr>
-          <p:cNvPr id="29" name="Text 27"/>
-          <p:cNvSpPr/>
-          <p:nvPr/>
-        </p:nvSpPr>
-        <p:spPr>
-          <a:xfrm>
-            <a:off x="4370832" y="3364992"/>
-            <a:ext cx="1645920" cy="475488"/>
+          <p:cNvPr id="32" name="Text 30"/>
+          <p:cNvSpPr/>
+          <p:nvPr/>
+        </p:nvSpPr>
+        <p:spPr>
+          <a:xfrm>
+            <a:off x="3602736" y="3364992"/>
+            <a:ext cx="1554480" cy="475488"/>
           </a:xfrm>
           <a:prstGeom prst="rect">
             <a:avLst/>
@@ -33232,14 +33134,14 @@
       </p:sp>
       <p:sp>
         <p:nvSpPr>
-          <p:cNvPr id="30" name="Text 28"/>
-          <p:cNvSpPr/>
-          <p:nvPr/>
-        </p:nvSpPr>
-        <p:spPr>
-          <a:xfrm>
-            <a:off x="6016752" y="3364992"/>
-            <a:ext cx="411480" cy="475488"/>
+          <p:cNvPr id="33" name="Text 31"/>
+          <p:cNvSpPr/>
+          <p:nvPr/>
+        </p:nvSpPr>
+        <p:spPr>
+          <a:xfrm>
+            <a:off x="5157216" y="3364992"/>
+            <a:ext cx="73152" cy="475488"/>
           </a:xfrm>
           <a:prstGeom prst="rect">
             <a:avLst/>
@@ -33271,14 +33173,14 @@
       </p:sp>
       <p:sp>
         <p:nvSpPr>
-          <p:cNvPr id="31" name="Shape 29"/>
-          <p:cNvSpPr/>
-          <p:nvPr/>
-        </p:nvSpPr>
-        <p:spPr>
-          <a:xfrm>
-            <a:off x="6428232" y="3364992"/>
-            <a:ext cx="1645920" cy="475488"/>
+          <p:cNvPr id="34" name="Shape 32"/>
+          <p:cNvSpPr/>
+          <p:nvPr/>
+        </p:nvSpPr>
+        <p:spPr>
+          <a:xfrm>
+            <a:off x="5230368" y="3364992"/>
+            <a:ext cx="1554480" cy="475488"/>
           </a:xfrm>
           <a:prstGeom prst="rect">
             <a:avLst>
@@ -33298,14 +33200,14 @@
       </p:sp>
       <p:sp>
         <p:nvSpPr>
-          <p:cNvPr id="32" name="Text 30"/>
-          <p:cNvSpPr/>
-          <p:nvPr/>
-        </p:nvSpPr>
-        <p:spPr>
-          <a:xfrm>
-            <a:off x="6428232" y="3364992"/>
-            <a:ext cx="1645920" cy="475488"/>
+          <p:cNvPr id="35" name="Text 33"/>
+          <p:cNvSpPr/>
+          <p:nvPr/>
+        </p:nvSpPr>
+        <p:spPr>
+          <a:xfrm>
+            <a:off x="5230368" y="3364992"/>
+            <a:ext cx="1554480" cy="475488"/>
           </a:xfrm>
           <a:prstGeom prst="rect">
             <a:avLst/>
@@ -33329,7 +33231,7 @@
                 <a:ea typeface="Trebuchet MS" pitchFamily="34" charset="-122"/>
                 <a:cs typeface="Trebuchet MS" pitchFamily="34" charset="-120"/>
               </a:rPr>
-              <a:t>oped</a:t>
+              <a:t>op</a:t>
             </a:r>
             <a:endParaRPr lang="en-US" sz="1400" dirty="0"/>
           </a:p>
@@ -33337,7 +33239,112 @@
       </p:sp>
       <p:sp>
         <p:nvSpPr>
-          <p:cNvPr id="33" name="Shape 31"/>
+          <p:cNvPr id="36" name="Text 34"/>
+          <p:cNvSpPr/>
+          <p:nvPr/>
+        </p:nvSpPr>
+        <p:spPr>
+          <a:xfrm>
+            <a:off x="6784848" y="3364992"/>
+            <a:ext cx="73152" cy="475488"/>
+          </a:xfrm>
+          <a:prstGeom prst="rect">
+            <a:avLst/>
+          </a:prstGeom>
+          <a:noFill/>
+          <a:ln/>
+        </p:spPr>
+        <p:txBody>
+          <a:bodyPr wrap="square" lIns="0" tIns="0" rIns="0" bIns="0" rtlCol="0" anchor="ctr"/>
+          <a:lstStyle/>
+          <a:p>
+            <a:pPr algn="ctr" indent="0" marL="0">
+              <a:buNone/>
+            </a:pPr>
+            <a:r>
+              <a:rPr lang="en-US" sz="1600" b="1" dirty="0">
+                <a:solidFill>
+                  <a:srgbClr val="0D9488"/>
+                </a:solidFill>
+                <a:latin typeface="Trebuchet MS" pitchFamily="34" charset="0"/>
+                <a:ea typeface="Trebuchet MS" pitchFamily="34" charset="-122"/>
+                <a:cs typeface="Trebuchet MS" pitchFamily="34" charset="-120"/>
+              </a:rPr>
+              <a:t>·</a:t>
+            </a:r>
+            <a:endParaRPr lang="en-US" sz="1600" dirty="0"/>
+          </a:p>
+        </p:txBody>
+      </p:sp>
+      <p:sp>
+        <p:nvSpPr>
+          <p:cNvPr id="37" name="Shape 35"/>
+          <p:cNvSpPr/>
+          <p:nvPr/>
+        </p:nvSpPr>
+        <p:spPr>
+          <a:xfrm>
+            <a:off x="6858000" y="3364992"/>
+            <a:ext cx="1554480" cy="475488"/>
+          </a:xfrm>
+          <a:prstGeom prst="rect">
+            <a:avLst>
+              <a:gd name="adj" fmla="val 9615"/>
+            </a:avLst>
+          </a:prstGeom>
+          <a:solidFill>
+            <a:srgbClr val="FFFFFF"/>
+          </a:solidFill>
+          <a:ln w="12700">
+            <a:solidFill>
+              <a:srgbClr val="0D9488"/>
+            </a:solidFill>
+            <a:prstDash val="solid"/>
+          </a:ln>
+        </p:spPr>
+      </p:sp>
+      <p:sp>
+        <p:nvSpPr>
+          <p:cNvPr id="38" name="Text 36"/>
+          <p:cNvSpPr/>
+          <p:nvPr/>
+        </p:nvSpPr>
+        <p:spPr>
+          <a:xfrm>
+            <a:off x="6858000" y="3364992"/>
+            <a:ext cx="1554480" cy="475488"/>
+          </a:xfrm>
+          <a:prstGeom prst="rect">
+            <a:avLst/>
+          </a:prstGeom>
+          <a:noFill/>
+          <a:ln/>
+        </p:spPr>
+        <p:txBody>
+          <a:bodyPr wrap="square" lIns="0" tIns="0" rIns="0" bIns="0" rtlCol="0" anchor="ctr"/>
+          <a:lstStyle/>
+          <a:p>
+            <a:pPr algn="ctr" indent="0" marL="0">
+              <a:buNone/>
+            </a:pPr>
+            <a:r>
+              <a:rPr lang="en-US" sz="1400" b="1" dirty="0">
+                <a:solidFill>
+                  <a:srgbClr val="0D9488"/>
+                </a:solidFill>
+                <a:latin typeface="Trebuchet MS" pitchFamily="34" charset="0"/>
+                <a:ea typeface="Trebuchet MS" pitchFamily="34" charset="-122"/>
+                <a:cs typeface="Trebuchet MS" pitchFamily="34" charset="-120"/>
+              </a:rPr>
+              <a:t>ments</a:t>
+            </a:r>
+            <a:endParaRPr lang="en-US" sz="1400" dirty="0"/>
+          </a:p>
+        </p:txBody>
+      </p:sp>
+      <p:sp>
+        <p:nvSpPr>
+          <p:cNvPr id="39" name="Shape 37"/>
           <p:cNvSpPr/>
           <p:nvPr/>
         </p:nvSpPr>
@@ -33364,7 +33371,7 @@
       </p:sp>
       <p:sp>
         <p:nvSpPr>
-          <p:cNvPr id="34" name="Text 32"/>
+          <p:cNvPr id="40" name="Text 38"/>
           <p:cNvSpPr/>
           <p:nvPr/>
         </p:nvSpPr>
@@ -33403,7 +33410,7 @@
       </p:sp>
       <p:sp>
         <p:nvSpPr>
-          <p:cNvPr id="35" name="Shape 33"/>
+          <p:cNvPr id="41" name="Shape 39"/>
           <p:cNvSpPr/>
           <p:nvPr/>
         </p:nvSpPr>
@@ -33430,7 +33437,7 @@
       </p:sp>
       <p:sp>
         <p:nvSpPr>
-          <p:cNvPr id="36" name="Text 34"/>
+          <p:cNvPr id="42" name="Text 40"/>
           <p:cNvSpPr/>
           <p:nvPr/>
         </p:nvSpPr>
@@ -33753,7 +33760,7 @@
                 <a:ea typeface="Calibri" pitchFamily="34" charset="-122"/>
                 <a:cs typeface="Calibri" pitchFamily="34" charset="-120"/>
               </a:rPr>
-              <a:t>Word Labs  •  wordlabs.app  •  Root: 'develop' = to grow or build up</a:t>
+              <a:t>Word Labs  •  wordlabs.app  •  Root: 'develop' = to grow or unfold gradually</a:t>
             </a:r>
             <a:endParaRPr lang="en-US" sz="800" dirty="0"/>
           </a:p>
@@ -33892,7 +33899,7 @@
                 <a:ea typeface="Trebuchet MS" pitchFamily="34" charset="-122"/>
                 <a:cs typeface="Trebuchet MS" pitchFamily="34" charset="-120"/>
               </a:rPr>
-              <a:t>developed</a:t>
+              <a:t>developments</a:t>
             </a:r>
             <a:endParaRPr lang="en-US" sz="2800" dirty="0"/>
           </a:p>
@@ -33972,7 +33979,7 @@
         </p:nvSpPr>
         <p:spPr>
           <a:xfrm>
-            <a:off x="2938272" y="2258568"/>
+            <a:off x="2221992" y="2258568"/>
             <a:ext cx="1828800" cy="292608"/>
           </a:xfrm>
           <a:prstGeom prst="rect">
@@ -34006,7 +34013,7 @@
         </p:nvSpPr>
         <p:spPr>
           <a:xfrm>
-            <a:off x="2938272" y="2258568"/>
+            <a:off x="2221992" y="2258568"/>
             <a:ext cx="1828800" cy="292608"/>
           </a:xfrm>
           <a:prstGeom prst="rect">
@@ -34045,7 +34052,7 @@
         </p:nvSpPr>
         <p:spPr>
           <a:xfrm>
-            <a:off x="2938272" y="2569464"/>
+            <a:off x="2221992" y="2569464"/>
             <a:ext cx="1828800" cy="201168"/>
           </a:xfrm>
           <a:prstGeom prst="rect">
@@ -34070,7 +34077,7 @@
                 <a:ea typeface="Calibri" pitchFamily="34" charset="-122"/>
                 <a:cs typeface="Calibri" pitchFamily="34" charset="-120"/>
               </a:rPr>
-              <a:t>to grow or build up</a:t>
+              <a:t>to grow or build gradually</a:t>
             </a:r>
             <a:endParaRPr lang="en-US" sz="850" dirty="0"/>
           </a:p>
@@ -34084,7 +34091,7 @@
         </p:nvSpPr>
         <p:spPr>
           <a:xfrm>
-            <a:off x="5803392" y="2258568"/>
+            <a:off x="4370832" y="2258568"/>
             <a:ext cx="1828800" cy="292608"/>
           </a:xfrm>
           <a:prstGeom prst="rect">
@@ -34118,7 +34125,7 @@
         </p:nvSpPr>
         <p:spPr>
           <a:xfrm>
-            <a:off x="5803392" y="2258568"/>
+            <a:off x="4370832" y="2258568"/>
             <a:ext cx="1828800" cy="292608"/>
           </a:xfrm>
           <a:prstGeom prst="rect">
@@ -34143,7 +34150,7 @@
                 <a:ea typeface="Trebuchet MS" pitchFamily="34" charset="-122"/>
                 <a:cs typeface="Trebuchet MS" pitchFamily="34" charset="-120"/>
               </a:rPr>
-              <a:t>ed</a:t>
+              <a:t>ment</a:t>
             </a:r>
             <a:endParaRPr lang="en-US" sz="1300" dirty="0"/>
           </a:p>
@@ -34157,7 +34164,7 @@
         </p:nvSpPr>
         <p:spPr>
           <a:xfrm>
-            <a:off x="5803392" y="2569464"/>
+            <a:off x="4370832" y="2569464"/>
             <a:ext cx="1828800" cy="201168"/>
           </a:xfrm>
           <a:prstGeom prst="rect">
@@ -34182,7 +34189,7 @@
                 <a:ea typeface="Calibri" pitchFamily="34" charset="-122"/>
                 <a:cs typeface="Calibri" pitchFamily="34" charset="-120"/>
               </a:rPr>
-              <a:t>happened in the past</a:t>
+              <a:t>the result or process of</a:t>
             </a:r>
             <a:endParaRPr lang="en-US" sz="850" dirty="0"/>
           </a:p>
@@ -34191,6 +34198,118 @@
       <p:sp>
         <p:nvSpPr>
           <p:cNvPr id="22" name="Shape 20"/>
+          <p:cNvSpPr/>
+          <p:nvPr/>
+        </p:nvSpPr>
+        <p:spPr>
+          <a:xfrm>
+            <a:off x="6519672" y="2258568"/>
+            <a:ext cx="1828800" cy="292608"/>
+          </a:xfrm>
+          <a:prstGeom prst="rect">
+            <a:avLst>
+              <a:gd name="adj" fmla="val 25000"/>
+            </a:avLst>
+          </a:prstGeom>
+          <a:solidFill>
+            <a:srgbClr val="FCE7F3"/>
+          </a:solidFill>
+          <a:ln w="19050">
+            <a:solidFill>
+              <a:srgbClr val="DB2777"/>
+            </a:solidFill>
+            <a:prstDash val="solid"/>
+          </a:ln>
+          <a:effectLst>
+            <a:outerShdw sx="100000" sy="100000" kx="0" ky="0" algn="bl" rotWithShape="0" blurRad="101600" dist="38100" dir="8100000">
+              <a:srgbClr val="000000">
+                <a:alpha val="12000"/>
+              </a:srgbClr>
+            </a:outerShdw>
+          </a:effectLst>
+        </p:spPr>
+      </p:sp>
+      <p:sp>
+        <p:nvSpPr>
+          <p:cNvPr id="23" name="Text 21"/>
+          <p:cNvSpPr/>
+          <p:nvPr/>
+        </p:nvSpPr>
+        <p:spPr>
+          <a:xfrm>
+            <a:off x="6519672" y="2258568"/>
+            <a:ext cx="1828800" cy="292608"/>
+          </a:xfrm>
+          <a:prstGeom prst="rect">
+            <a:avLst/>
+          </a:prstGeom>
+          <a:noFill/>
+          <a:ln/>
+        </p:spPr>
+        <p:txBody>
+          <a:bodyPr wrap="square" lIns="0" tIns="0" rIns="0" bIns="0" rtlCol="0" anchor="ctr"/>
+          <a:lstStyle/>
+          <a:p>
+            <a:pPr algn="ctr" indent="0" marL="0">
+              <a:buNone/>
+            </a:pPr>
+            <a:r>
+              <a:rPr lang="en-US" sz="1300" b="1" dirty="0">
+                <a:solidFill>
+                  <a:srgbClr val="9D174D"/>
+                </a:solidFill>
+                <a:latin typeface="Trebuchet MS" pitchFamily="34" charset="0"/>
+                <a:ea typeface="Trebuchet MS" pitchFamily="34" charset="-122"/>
+                <a:cs typeface="Trebuchet MS" pitchFamily="34" charset="-120"/>
+              </a:rPr>
+              <a:t>s</a:t>
+            </a:r>
+            <a:endParaRPr lang="en-US" sz="1300" dirty="0"/>
+          </a:p>
+        </p:txBody>
+      </p:sp>
+      <p:sp>
+        <p:nvSpPr>
+          <p:cNvPr id="24" name="Text 22"/>
+          <p:cNvSpPr/>
+          <p:nvPr/>
+        </p:nvSpPr>
+        <p:spPr>
+          <a:xfrm>
+            <a:off x="6519672" y="2569464"/>
+            <a:ext cx="1828800" cy="201168"/>
+          </a:xfrm>
+          <a:prstGeom prst="rect">
+            <a:avLst/>
+          </a:prstGeom>
+          <a:noFill/>
+          <a:ln/>
+        </p:spPr>
+        <p:txBody>
+          <a:bodyPr wrap="square" lIns="0" tIns="0" rIns="0" bIns="0" rtlCol="0" anchor="t"/>
+          <a:lstStyle/>
+          <a:p>
+            <a:pPr algn="ctr" indent="0" marL="0">
+              <a:buNone/>
+            </a:pPr>
+            <a:r>
+              <a:rPr lang="en-US" sz="850" dirty="0">
+                <a:solidFill>
+                  <a:srgbClr val="475569"/>
+                </a:solidFill>
+                <a:latin typeface="Calibri" pitchFamily="34" charset="0"/>
+                <a:ea typeface="Calibri" pitchFamily="34" charset="-122"/>
+                <a:cs typeface="Calibri" pitchFamily="34" charset="-120"/>
+              </a:rPr>
+              <a:t>more than one</a:t>
+            </a:r>
+            <a:endParaRPr lang="en-US" sz="850" dirty="0"/>
+          </a:p>
+        </p:txBody>
+      </p:sp>
+      <p:sp>
+        <p:nvSpPr>
+          <p:cNvPr id="25" name="Shape 23"/>
           <p:cNvSpPr/>
           <p:nvPr/>
         </p:nvSpPr>
@@ -34217,7 +34336,7 @@
       </p:sp>
       <p:sp>
         <p:nvSpPr>
-          <p:cNvPr id="23" name="Text 21"/>
+          <p:cNvPr id="26" name="Text 24"/>
           <p:cNvSpPr/>
           <p:nvPr/>
         </p:nvSpPr>
@@ -34256,7 +34375,7 @@
       </p:sp>
       <p:sp>
         <p:nvSpPr>
-          <p:cNvPr id="24" name="Shape 22"/>
+          <p:cNvPr id="27" name="Shape 25"/>
           <p:cNvSpPr/>
           <p:nvPr/>
         </p:nvSpPr>
@@ -34283,14 +34402,14 @@
       </p:sp>
       <p:sp>
         <p:nvSpPr>
-          <p:cNvPr id="25" name="Shape 23"/>
-          <p:cNvSpPr/>
-          <p:nvPr/>
-        </p:nvSpPr>
-        <p:spPr>
-          <a:xfrm>
-            <a:off x="2313432" y="3364992"/>
-            <a:ext cx="1645920" cy="475488"/>
+          <p:cNvPr id="28" name="Shape 26"/>
+          <p:cNvSpPr/>
+          <p:nvPr/>
+        </p:nvSpPr>
+        <p:spPr>
+          <a:xfrm>
+            <a:off x="1975104" y="3364992"/>
+            <a:ext cx="1554480" cy="475488"/>
           </a:xfrm>
           <a:prstGeom prst="rect">
             <a:avLst>
@@ -34310,14 +34429,14 @@
       </p:sp>
       <p:sp>
         <p:nvSpPr>
-          <p:cNvPr id="26" name="Text 24"/>
-          <p:cNvSpPr/>
-          <p:nvPr/>
-        </p:nvSpPr>
-        <p:spPr>
-          <a:xfrm>
-            <a:off x="2313432" y="3364992"/>
-            <a:ext cx="1645920" cy="475488"/>
+          <p:cNvPr id="29" name="Text 27"/>
+          <p:cNvSpPr/>
+          <p:nvPr/>
+        </p:nvSpPr>
+        <p:spPr>
+          <a:xfrm>
+            <a:off x="1975104" y="3364992"/>
+            <a:ext cx="1554480" cy="475488"/>
           </a:xfrm>
           <a:prstGeom prst="rect">
             <a:avLst/>
@@ -34349,14 +34468,14 @@
       </p:sp>
       <p:sp>
         <p:nvSpPr>
-          <p:cNvPr id="27" name="Text 25"/>
-          <p:cNvSpPr/>
-          <p:nvPr/>
-        </p:nvSpPr>
-        <p:spPr>
-          <a:xfrm>
-            <a:off x="3959352" y="3364992"/>
-            <a:ext cx="411480" cy="475488"/>
+          <p:cNvPr id="30" name="Text 28"/>
+          <p:cNvSpPr/>
+          <p:nvPr/>
+        </p:nvSpPr>
+        <p:spPr>
+          <a:xfrm>
+            <a:off x="3529584" y="3364992"/>
+            <a:ext cx="73152" cy="475488"/>
           </a:xfrm>
           <a:prstGeom prst="rect">
             <a:avLst/>
@@ -34388,14 +34507,14 @@
       </p:sp>
       <p:sp>
         <p:nvSpPr>
-          <p:cNvPr id="28" name="Shape 26"/>
-          <p:cNvSpPr/>
-          <p:nvPr/>
-        </p:nvSpPr>
-        <p:spPr>
-          <a:xfrm>
-            <a:off x="4370832" y="3364992"/>
-            <a:ext cx="1645920" cy="475488"/>
+          <p:cNvPr id="31" name="Shape 29"/>
+          <p:cNvSpPr/>
+          <p:nvPr/>
+        </p:nvSpPr>
+        <p:spPr>
+          <a:xfrm>
+            <a:off x="3602736" y="3364992"/>
+            <a:ext cx="1554480" cy="475488"/>
           </a:xfrm>
           <a:prstGeom prst="rect">
             <a:avLst>
@@ -34415,14 +34534,14 @@
       </p:sp>
       <p:sp>
         <p:nvSpPr>
-          <p:cNvPr id="29" name="Text 27"/>
-          <p:cNvSpPr/>
-          <p:nvPr/>
-        </p:nvSpPr>
-        <p:spPr>
-          <a:xfrm>
-            <a:off x="4370832" y="3364992"/>
-            <a:ext cx="1645920" cy="475488"/>
+          <p:cNvPr id="32" name="Text 30"/>
+          <p:cNvSpPr/>
+          <p:nvPr/>
+        </p:nvSpPr>
+        <p:spPr>
+          <a:xfrm>
+            <a:off x="3602736" y="3364992"/>
+            <a:ext cx="1554480" cy="475488"/>
           </a:xfrm>
           <a:prstGeom prst="rect">
             <a:avLst/>
@@ -34454,14 +34573,14 @@
       </p:sp>
       <p:sp>
         <p:nvSpPr>
-          <p:cNvPr id="30" name="Text 28"/>
-          <p:cNvSpPr/>
-          <p:nvPr/>
-        </p:nvSpPr>
-        <p:spPr>
-          <a:xfrm>
-            <a:off x="6016752" y="3364992"/>
-            <a:ext cx="411480" cy="475488"/>
+          <p:cNvPr id="33" name="Text 31"/>
+          <p:cNvSpPr/>
+          <p:nvPr/>
+        </p:nvSpPr>
+        <p:spPr>
+          <a:xfrm>
+            <a:off x="5157216" y="3364992"/>
+            <a:ext cx="73152" cy="475488"/>
           </a:xfrm>
           <a:prstGeom prst="rect">
             <a:avLst/>
@@ -34493,14 +34612,14 @@
       </p:sp>
       <p:sp>
         <p:nvSpPr>
-          <p:cNvPr id="31" name="Shape 29"/>
-          <p:cNvSpPr/>
-          <p:nvPr/>
-        </p:nvSpPr>
-        <p:spPr>
-          <a:xfrm>
-            <a:off x="6428232" y="3364992"/>
-            <a:ext cx="1645920" cy="475488"/>
+          <p:cNvPr id="34" name="Shape 32"/>
+          <p:cNvSpPr/>
+          <p:nvPr/>
+        </p:nvSpPr>
+        <p:spPr>
+          <a:xfrm>
+            <a:off x="5230368" y="3364992"/>
+            <a:ext cx="1554480" cy="475488"/>
           </a:xfrm>
           <a:prstGeom prst="rect">
             <a:avLst>
@@ -34520,14 +34639,14 @@
       </p:sp>
       <p:sp>
         <p:nvSpPr>
-          <p:cNvPr id="32" name="Text 30"/>
-          <p:cNvSpPr/>
-          <p:nvPr/>
-        </p:nvSpPr>
-        <p:spPr>
-          <a:xfrm>
-            <a:off x="6428232" y="3364992"/>
-            <a:ext cx="1645920" cy="475488"/>
+          <p:cNvPr id="35" name="Text 33"/>
+          <p:cNvSpPr/>
+          <p:nvPr/>
+        </p:nvSpPr>
+        <p:spPr>
+          <a:xfrm>
+            <a:off x="5230368" y="3364992"/>
+            <a:ext cx="1554480" cy="475488"/>
           </a:xfrm>
           <a:prstGeom prst="rect">
             <a:avLst/>
@@ -34551,7 +34670,7 @@
                 <a:ea typeface="Trebuchet MS" pitchFamily="34" charset="-122"/>
                 <a:cs typeface="Trebuchet MS" pitchFamily="34" charset="-120"/>
               </a:rPr>
-              <a:t>oped</a:t>
+              <a:t>op</a:t>
             </a:r>
             <a:endParaRPr lang="en-US" sz="1400" dirty="0"/>
           </a:p>
@@ -34559,7 +34678,112 @@
       </p:sp>
       <p:sp>
         <p:nvSpPr>
-          <p:cNvPr id="33" name="Shape 31"/>
+          <p:cNvPr id="36" name="Text 34"/>
+          <p:cNvSpPr/>
+          <p:nvPr/>
+        </p:nvSpPr>
+        <p:spPr>
+          <a:xfrm>
+            <a:off x="6784848" y="3364992"/>
+            <a:ext cx="73152" cy="475488"/>
+          </a:xfrm>
+          <a:prstGeom prst="rect">
+            <a:avLst/>
+          </a:prstGeom>
+          <a:noFill/>
+          <a:ln/>
+        </p:spPr>
+        <p:txBody>
+          <a:bodyPr wrap="square" lIns="0" tIns="0" rIns="0" bIns="0" rtlCol="0" anchor="ctr"/>
+          <a:lstStyle/>
+          <a:p>
+            <a:pPr algn="ctr" indent="0" marL="0">
+              <a:buNone/>
+            </a:pPr>
+            <a:r>
+              <a:rPr lang="en-US" sz="1600" b="1" dirty="0">
+                <a:solidFill>
+                  <a:srgbClr val="0D9488"/>
+                </a:solidFill>
+                <a:latin typeface="Trebuchet MS" pitchFamily="34" charset="0"/>
+                <a:ea typeface="Trebuchet MS" pitchFamily="34" charset="-122"/>
+                <a:cs typeface="Trebuchet MS" pitchFamily="34" charset="-120"/>
+              </a:rPr>
+              <a:t>·</a:t>
+            </a:r>
+            <a:endParaRPr lang="en-US" sz="1600" dirty="0"/>
+          </a:p>
+        </p:txBody>
+      </p:sp>
+      <p:sp>
+        <p:nvSpPr>
+          <p:cNvPr id="37" name="Shape 35"/>
+          <p:cNvSpPr/>
+          <p:nvPr/>
+        </p:nvSpPr>
+        <p:spPr>
+          <a:xfrm>
+            <a:off x="6858000" y="3364992"/>
+            <a:ext cx="1554480" cy="475488"/>
+          </a:xfrm>
+          <a:prstGeom prst="rect">
+            <a:avLst>
+              <a:gd name="adj" fmla="val 9615"/>
+            </a:avLst>
+          </a:prstGeom>
+          <a:solidFill>
+            <a:srgbClr val="FFFFFF"/>
+          </a:solidFill>
+          <a:ln w="12700">
+            <a:solidFill>
+              <a:srgbClr val="0D9488"/>
+            </a:solidFill>
+            <a:prstDash val="solid"/>
+          </a:ln>
+        </p:spPr>
+      </p:sp>
+      <p:sp>
+        <p:nvSpPr>
+          <p:cNvPr id="38" name="Text 36"/>
+          <p:cNvSpPr/>
+          <p:nvPr/>
+        </p:nvSpPr>
+        <p:spPr>
+          <a:xfrm>
+            <a:off x="6858000" y="3364992"/>
+            <a:ext cx="1554480" cy="475488"/>
+          </a:xfrm>
+          <a:prstGeom prst="rect">
+            <a:avLst/>
+          </a:prstGeom>
+          <a:noFill/>
+          <a:ln/>
+        </p:spPr>
+        <p:txBody>
+          <a:bodyPr wrap="square" lIns="0" tIns="0" rIns="0" bIns="0" rtlCol="0" anchor="ctr"/>
+          <a:lstStyle/>
+          <a:p>
+            <a:pPr algn="ctr" indent="0" marL="0">
+              <a:buNone/>
+            </a:pPr>
+            <a:r>
+              <a:rPr lang="en-US" sz="1400" b="1" dirty="0">
+                <a:solidFill>
+                  <a:srgbClr val="0D9488"/>
+                </a:solidFill>
+                <a:latin typeface="Trebuchet MS" pitchFamily="34" charset="0"/>
+                <a:ea typeface="Trebuchet MS" pitchFamily="34" charset="-122"/>
+                <a:cs typeface="Trebuchet MS" pitchFamily="34" charset="-120"/>
+              </a:rPr>
+              <a:t>ments</a:t>
+            </a:r>
+            <a:endParaRPr lang="en-US" sz="1400" dirty="0"/>
+          </a:p>
+        </p:txBody>
+      </p:sp>
+      <p:sp>
+        <p:nvSpPr>
+          <p:cNvPr id="39" name="Shape 37"/>
           <p:cNvSpPr/>
           <p:nvPr/>
         </p:nvSpPr>
@@ -34586,7 +34810,7 @@
       </p:sp>
       <p:sp>
         <p:nvSpPr>
-          <p:cNvPr id="34" name="Text 32"/>
+          <p:cNvPr id="40" name="Text 38"/>
           <p:cNvSpPr/>
           <p:nvPr/>
         </p:nvSpPr>
@@ -34625,18 +34849,18 @@
       </p:sp>
       <p:sp>
         <p:nvSpPr>
-          <p:cNvPr id="35" name="Shape 33"/>
+          <p:cNvPr id="41" name="Shape 39"/>
           <p:cNvSpPr/>
           <p:nvPr/>
         </p:nvSpPr>
         <p:spPr>
           <a:xfrm>
             <a:off x="1874520" y="4096512"/>
-            <a:ext cx="6903720" cy="804672"/>
+            <a:ext cx="6903720" cy="658368"/>
           </a:xfrm>
           <a:prstGeom prst="rect">
             <a:avLst>
-              <a:gd name="adj" fmla="val 6818"/>
+              <a:gd name="adj" fmla="val 8333"/>
             </a:avLst>
           </a:prstGeom>
           <a:solidFill>
@@ -34652,18 +34876,18 @@
       </p:sp>
       <p:sp>
         <p:nvSpPr>
-          <p:cNvPr id="36" name="Shape 34"/>
-          <p:cNvSpPr/>
-          <p:nvPr/>
-        </p:nvSpPr>
-        <p:spPr>
-          <a:xfrm>
-            <a:off x="2023872" y="4169664"/>
-            <a:ext cx="685800" cy="384048"/>
+          <p:cNvPr id="42" name="Shape 40"/>
+          <p:cNvSpPr/>
+          <p:nvPr/>
+        </p:nvSpPr>
+        <p:spPr>
+          <a:xfrm>
+            <a:off x="1952596" y="4169664"/>
+            <a:ext cx="493776" cy="475488"/>
           </a:xfrm>
           <a:prstGeom prst="rect">
             <a:avLst>
-              <a:gd name="adj" fmla="val 9524"/>
+              <a:gd name="adj" fmla="val 7692"/>
             </a:avLst>
           </a:prstGeom>
           <a:solidFill>
@@ -34679,14 +34903,14 @@
       </p:sp>
       <p:sp>
         <p:nvSpPr>
-          <p:cNvPr id="37" name="Text 35"/>
-          <p:cNvSpPr/>
-          <p:nvPr/>
-        </p:nvSpPr>
-        <p:spPr>
-          <a:xfrm>
-            <a:off x="2023872" y="4169664"/>
-            <a:ext cx="685800" cy="384048"/>
+          <p:cNvPr id="43" name="Text 41"/>
+          <p:cNvSpPr/>
+          <p:nvPr/>
+        </p:nvSpPr>
+        <p:spPr>
+          <a:xfrm>
+            <a:off x="1952596" y="4169664"/>
+            <a:ext cx="493776" cy="475488"/>
           </a:xfrm>
           <a:prstGeom prst="rect">
             <a:avLst/>
@@ -34718,18 +34942,18 @@
       </p:sp>
       <p:sp>
         <p:nvSpPr>
-          <p:cNvPr id="38" name="Shape 36"/>
-          <p:cNvSpPr/>
-          <p:nvPr/>
-        </p:nvSpPr>
-        <p:spPr>
-          <a:xfrm>
-            <a:off x="2831592" y="4169664"/>
-            <a:ext cx="685800" cy="384048"/>
+          <p:cNvPr id="44" name="Shape 42"/>
+          <p:cNvSpPr/>
+          <p:nvPr/>
+        </p:nvSpPr>
+        <p:spPr>
+          <a:xfrm>
+            <a:off x="2497015" y="4169664"/>
+            <a:ext cx="493776" cy="475488"/>
           </a:xfrm>
           <a:prstGeom prst="rect">
             <a:avLst>
-              <a:gd name="adj" fmla="val 9524"/>
+              <a:gd name="adj" fmla="val 7692"/>
             </a:avLst>
           </a:prstGeom>
           <a:solidFill>
@@ -34745,14 +34969,14 @@
       </p:sp>
       <p:sp>
         <p:nvSpPr>
-          <p:cNvPr id="39" name="Text 37"/>
-          <p:cNvSpPr/>
-          <p:nvPr/>
-        </p:nvSpPr>
-        <p:spPr>
-          <a:xfrm>
-            <a:off x="2831592" y="4169664"/>
-            <a:ext cx="685800" cy="384048"/>
+          <p:cNvPr id="45" name="Text 43"/>
+          <p:cNvSpPr/>
+          <p:nvPr/>
+        </p:nvSpPr>
+        <p:spPr>
+          <a:xfrm>
+            <a:off x="2497015" y="4169664"/>
+            <a:ext cx="493776" cy="475488"/>
           </a:xfrm>
           <a:prstGeom prst="rect">
             <a:avLst/>
@@ -34784,18 +35008,18 @@
       </p:sp>
       <p:sp>
         <p:nvSpPr>
-          <p:cNvPr id="40" name="Shape 38"/>
-          <p:cNvSpPr/>
-          <p:nvPr/>
-        </p:nvSpPr>
-        <p:spPr>
-          <a:xfrm>
-            <a:off x="3639312" y="4169664"/>
-            <a:ext cx="685800" cy="384048"/>
+          <p:cNvPr id="46" name="Shape 44"/>
+          <p:cNvSpPr/>
+          <p:nvPr/>
+        </p:nvSpPr>
+        <p:spPr>
+          <a:xfrm>
+            <a:off x="3041435" y="4169664"/>
+            <a:ext cx="493776" cy="475488"/>
           </a:xfrm>
           <a:prstGeom prst="rect">
             <a:avLst>
-              <a:gd name="adj" fmla="val 9524"/>
+              <a:gd name="adj" fmla="val 7692"/>
             </a:avLst>
           </a:prstGeom>
           <a:solidFill>
@@ -34811,14 +35035,14 @@
       </p:sp>
       <p:sp>
         <p:nvSpPr>
-          <p:cNvPr id="41" name="Text 39"/>
-          <p:cNvSpPr/>
-          <p:nvPr/>
-        </p:nvSpPr>
-        <p:spPr>
-          <a:xfrm>
-            <a:off x="3639312" y="4169664"/>
-            <a:ext cx="685800" cy="384048"/>
+          <p:cNvPr id="47" name="Text 45"/>
+          <p:cNvSpPr/>
+          <p:nvPr/>
+        </p:nvSpPr>
+        <p:spPr>
+          <a:xfrm>
+            <a:off x="3041435" y="4169664"/>
+            <a:ext cx="493776" cy="475488"/>
           </a:xfrm>
           <a:prstGeom prst="rect">
             <a:avLst/>
@@ -34850,18 +35074,18 @@
       </p:sp>
       <p:sp>
         <p:nvSpPr>
-          <p:cNvPr id="42" name="Shape 40"/>
-          <p:cNvSpPr/>
-          <p:nvPr/>
-        </p:nvSpPr>
-        <p:spPr>
-          <a:xfrm>
-            <a:off x="4447032" y="4169664"/>
-            <a:ext cx="685800" cy="384048"/>
+          <p:cNvPr id="48" name="Shape 46"/>
+          <p:cNvSpPr/>
+          <p:nvPr/>
+        </p:nvSpPr>
+        <p:spPr>
+          <a:xfrm>
+            <a:off x="3585855" y="4169664"/>
+            <a:ext cx="493776" cy="475488"/>
           </a:xfrm>
           <a:prstGeom prst="rect">
             <a:avLst>
-              <a:gd name="adj" fmla="val 9524"/>
+              <a:gd name="adj" fmla="val 7692"/>
             </a:avLst>
           </a:prstGeom>
           <a:solidFill>
@@ -34877,14 +35101,14 @@
       </p:sp>
       <p:sp>
         <p:nvSpPr>
-          <p:cNvPr id="43" name="Text 41"/>
-          <p:cNvSpPr/>
-          <p:nvPr/>
-        </p:nvSpPr>
-        <p:spPr>
-          <a:xfrm>
-            <a:off x="4447032" y="4169664"/>
-            <a:ext cx="685800" cy="384048"/>
+          <p:cNvPr id="49" name="Text 47"/>
+          <p:cNvSpPr/>
+          <p:nvPr/>
+        </p:nvSpPr>
+        <p:spPr>
+          <a:xfrm>
+            <a:off x="3585855" y="4169664"/>
+            <a:ext cx="493776" cy="475488"/>
           </a:xfrm>
           <a:prstGeom prst="rect">
             <a:avLst/>
@@ -34916,18 +35140,18 @@
       </p:sp>
       <p:sp>
         <p:nvSpPr>
-          <p:cNvPr id="44" name="Shape 42"/>
-          <p:cNvSpPr/>
-          <p:nvPr/>
-        </p:nvSpPr>
-        <p:spPr>
-          <a:xfrm>
-            <a:off x="5254752" y="4169664"/>
-            <a:ext cx="685800" cy="384048"/>
+          <p:cNvPr id="50" name="Shape 48"/>
+          <p:cNvSpPr/>
+          <p:nvPr/>
+        </p:nvSpPr>
+        <p:spPr>
+          <a:xfrm>
+            <a:off x="4130274" y="4169664"/>
+            <a:ext cx="493776" cy="475488"/>
           </a:xfrm>
           <a:prstGeom prst="rect">
             <a:avLst>
-              <a:gd name="adj" fmla="val 9524"/>
+              <a:gd name="adj" fmla="val 7692"/>
             </a:avLst>
           </a:prstGeom>
           <a:solidFill>
@@ -34943,14 +35167,14 @@
       </p:sp>
       <p:sp>
         <p:nvSpPr>
-          <p:cNvPr id="45" name="Text 43"/>
-          <p:cNvSpPr/>
-          <p:nvPr/>
-        </p:nvSpPr>
-        <p:spPr>
-          <a:xfrm>
-            <a:off x="5254752" y="4169664"/>
-            <a:ext cx="685800" cy="384048"/>
+          <p:cNvPr id="51" name="Text 49"/>
+          <p:cNvSpPr/>
+          <p:nvPr/>
+        </p:nvSpPr>
+        <p:spPr>
+          <a:xfrm>
+            <a:off x="4130274" y="4169664"/>
+            <a:ext cx="493776" cy="475488"/>
           </a:xfrm>
           <a:prstGeom prst="rect">
             <a:avLst/>
@@ -34982,18 +35206,18 @@
       </p:sp>
       <p:sp>
         <p:nvSpPr>
-          <p:cNvPr id="46" name="Shape 44"/>
-          <p:cNvSpPr/>
-          <p:nvPr/>
-        </p:nvSpPr>
-        <p:spPr>
-          <a:xfrm>
-            <a:off x="6062472" y="4169664"/>
-            <a:ext cx="685800" cy="384048"/>
+          <p:cNvPr id="52" name="Shape 50"/>
+          <p:cNvSpPr/>
+          <p:nvPr/>
+        </p:nvSpPr>
+        <p:spPr>
+          <a:xfrm>
+            <a:off x="4674694" y="4169664"/>
+            <a:ext cx="493776" cy="475488"/>
           </a:xfrm>
           <a:prstGeom prst="rect">
             <a:avLst>
-              <a:gd name="adj" fmla="val 9524"/>
+              <a:gd name="adj" fmla="val 7692"/>
             </a:avLst>
           </a:prstGeom>
           <a:solidFill>
@@ -35009,14 +35233,14 @@
       </p:sp>
       <p:sp>
         <p:nvSpPr>
-          <p:cNvPr id="47" name="Text 45"/>
-          <p:cNvSpPr/>
-          <p:nvPr/>
-        </p:nvSpPr>
-        <p:spPr>
-          <a:xfrm>
-            <a:off x="6062472" y="4169664"/>
-            <a:ext cx="685800" cy="384048"/>
+          <p:cNvPr id="53" name="Text 51"/>
+          <p:cNvSpPr/>
+          <p:nvPr/>
+        </p:nvSpPr>
+        <p:spPr>
+          <a:xfrm>
+            <a:off x="4674694" y="4169664"/>
+            <a:ext cx="493776" cy="475488"/>
           </a:xfrm>
           <a:prstGeom prst="rect">
             <a:avLst/>
@@ -35048,18 +35272,18 @@
       </p:sp>
       <p:sp>
         <p:nvSpPr>
-          <p:cNvPr id="48" name="Shape 46"/>
-          <p:cNvSpPr/>
-          <p:nvPr/>
-        </p:nvSpPr>
-        <p:spPr>
-          <a:xfrm>
-            <a:off x="6870192" y="4169664"/>
-            <a:ext cx="685800" cy="384048"/>
+          <p:cNvPr id="54" name="Shape 52"/>
+          <p:cNvSpPr/>
+          <p:nvPr/>
+        </p:nvSpPr>
+        <p:spPr>
+          <a:xfrm>
+            <a:off x="5219114" y="4169664"/>
+            <a:ext cx="493776" cy="475488"/>
           </a:xfrm>
           <a:prstGeom prst="rect">
             <a:avLst>
-              <a:gd name="adj" fmla="val 9524"/>
+              <a:gd name="adj" fmla="val 7692"/>
             </a:avLst>
           </a:prstGeom>
           <a:solidFill>
@@ -35075,14 +35299,14 @@
       </p:sp>
       <p:sp>
         <p:nvSpPr>
-          <p:cNvPr id="49" name="Text 47"/>
-          <p:cNvSpPr/>
-          <p:nvPr/>
-        </p:nvSpPr>
-        <p:spPr>
-          <a:xfrm>
-            <a:off x="6870192" y="4169664"/>
-            <a:ext cx="685800" cy="384048"/>
+          <p:cNvPr id="55" name="Text 53"/>
+          <p:cNvSpPr/>
+          <p:nvPr/>
+        </p:nvSpPr>
+        <p:spPr>
+          <a:xfrm>
+            <a:off x="5219114" y="4169664"/>
+            <a:ext cx="493776" cy="475488"/>
           </a:xfrm>
           <a:prstGeom prst="rect">
             <a:avLst/>
@@ -35114,18 +35338,18 @@
       </p:sp>
       <p:sp>
         <p:nvSpPr>
-          <p:cNvPr id="50" name="Shape 48"/>
-          <p:cNvSpPr/>
-          <p:nvPr/>
-        </p:nvSpPr>
-        <p:spPr>
-          <a:xfrm>
-            <a:off x="7677912" y="4169664"/>
-            <a:ext cx="685800" cy="384048"/>
+          <p:cNvPr id="56" name="Shape 54"/>
+          <p:cNvSpPr/>
+          <p:nvPr/>
+        </p:nvSpPr>
+        <p:spPr>
+          <a:xfrm>
+            <a:off x="5763534" y="4169664"/>
+            <a:ext cx="493776" cy="475488"/>
           </a:xfrm>
           <a:prstGeom prst="rect">
             <a:avLst>
-              <a:gd name="adj" fmla="val 9524"/>
+              <a:gd name="adj" fmla="val 7692"/>
             </a:avLst>
           </a:prstGeom>
           <a:solidFill>
@@ -35141,14 +35365,14 @@
       </p:sp>
       <p:sp>
         <p:nvSpPr>
-          <p:cNvPr id="51" name="Text 49"/>
-          <p:cNvSpPr/>
-          <p:nvPr/>
-        </p:nvSpPr>
-        <p:spPr>
-          <a:xfrm>
-            <a:off x="7677912" y="4169664"/>
-            <a:ext cx="685800" cy="384048"/>
+          <p:cNvPr id="57" name="Text 55"/>
+          <p:cNvSpPr/>
+          <p:nvPr/>
+        </p:nvSpPr>
+        <p:spPr>
+          <a:xfrm>
+            <a:off x="5763534" y="4169664"/>
+            <a:ext cx="493776" cy="475488"/>
           </a:xfrm>
           <a:prstGeom prst="rect">
             <a:avLst/>
@@ -35172,6 +35396,204 @@
                 <a:ea typeface="Trebuchet MS" pitchFamily="34" charset="-122"/>
                 <a:cs typeface="Trebuchet MS" pitchFamily="34" charset="-120"/>
               </a:rPr>
+              <a:t>m</a:t>
+            </a:r>
+            <a:endParaRPr lang="en-US" sz="900" dirty="0"/>
+          </a:p>
+        </p:txBody>
+      </p:sp>
+      <p:sp>
+        <p:nvSpPr>
+          <p:cNvPr id="58" name="Shape 56"/>
+          <p:cNvSpPr/>
+          <p:nvPr/>
+        </p:nvSpPr>
+        <p:spPr>
+          <a:xfrm>
+            <a:off x="6307953" y="4169664"/>
+            <a:ext cx="493776" cy="475488"/>
+          </a:xfrm>
+          <a:prstGeom prst="rect">
+            <a:avLst>
+              <a:gd name="adj" fmla="val 7692"/>
+            </a:avLst>
+          </a:prstGeom>
+          <a:solidFill>
+            <a:srgbClr val="FFFFFF"/>
+          </a:solidFill>
+          <a:ln w="12700">
+            <a:solidFill>
+              <a:srgbClr val="DB2777"/>
+            </a:solidFill>
+            <a:prstDash val="solid"/>
+          </a:ln>
+        </p:spPr>
+      </p:sp>
+      <p:sp>
+        <p:nvSpPr>
+          <p:cNvPr id="59" name="Text 57"/>
+          <p:cNvSpPr/>
+          <p:nvPr/>
+        </p:nvSpPr>
+        <p:spPr>
+          <a:xfrm>
+            <a:off x="6307953" y="4169664"/>
+            <a:ext cx="493776" cy="475488"/>
+          </a:xfrm>
+          <a:prstGeom prst="rect">
+            <a:avLst/>
+          </a:prstGeom>
+          <a:noFill/>
+          <a:ln/>
+        </p:spPr>
+        <p:txBody>
+          <a:bodyPr wrap="square" lIns="0" tIns="0" rIns="0" bIns="0" rtlCol="0" anchor="ctr"/>
+          <a:lstStyle/>
+          <a:p>
+            <a:pPr algn="ctr" indent="0" marL="0">
+              <a:buNone/>
+            </a:pPr>
+            <a:r>
+              <a:rPr lang="en-US" sz="900" b="1" dirty="0">
+                <a:solidFill>
+                  <a:srgbClr val="9D174D"/>
+                </a:solidFill>
+                <a:latin typeface="Trebuchet MS" pitchFamily="34" charset="0"/>
+                <a:ea typeface="Trebuchet MS" pitchFamily="34" charset="-122"/>
+                <a:cs typeface="Trebuchet MS" pitchFamily="34" charset="-120"/>
+              </a:rPr>
+              <a:t>e</a:t>
+            </a:r>
+            <a:endParaRPr lang="en-US" sz="900" dirty="0"/>
+          </a:p>
+        </p:txBody>
+      </p:sp>
+      <p:sp>
+        <p:nvSpPr>
+          <p:cNvPr id="60" name="Shape 58"/>
+          <p:cNvSpPr/>
+          <p:nvPr/>
+        </p:nvSpPr>
+        <p:spPr>
+          <a:xfrm>
+            <a:off x="6852373" y="4169664"/>
+            <a:ext cx="493776" cy="475488"/>
+          </a:xfrm>
+          <a:prstGeom prst="rect">
+            <a:avLst>
+              <a:gd name="adj" fmla="val 7692"/>
+            </a:avLst>
+          </a:prstGeom>
+          <a:solidFill>
+            <a:srgbClr val="FFFFFF"/>
+          </a:solidFill>
+          <a:ln w="12700">
+            <a:solidFill>
+              <a:srgbClr val="DB2777"/>
+            </a:solidFill>
+            <a:prstDash val="solid"/>
+          </a:ln>
+        </p:spPr>
+      </p:sp>
+      <p:sp>
+        <p:nvSpPr>
+          <p:cNvPr id="61" name="Text 59"/>
+          <p:cNvSpPr/>
+          <p:nvPr/>
+        </p:nvSpPr>
+        <p:spPr>
+          <a:xfrm>
+            <a:off x="6852373" y="4169664"/>
+            <a:ext cx="493776" cy="475488"/>
+          </a:xfrm>
+          <a:prstGeom prst="rect">
+            <a:avLst/>
+          </a:prstGeom>
+          <a:noFill/>
+          <a:ln/>
+        </p:spPr>
+        <p:txBody>
+          <a:bodyPr wrap="square" lIns="0" tIns="0" rIns="0" bIns="0" rtlCol="0" anchor="ctr"/>
+          <a:lstStyle/>
+          <a:p>
+            <a:pPr algn="ctr" indent="0" marL="0">
+              <a:buNone/>
+            </a:pPr>
+            <a:r>
+              <a:rPr lang="en-US" sz="900" b="1" dirty="0">
+                <a:solidFill>
+                  <a:srgbClr val="9D174D"/>
+                </a:solidFill>
+                <a:latin typeface="Trebuchet MS" pitchFamily="34" charset="0"/>
+                <a:ea typeface="Trebuchet MS" pitchFamily="34" charset="-122"/>
+                <a:cs typeface="Trebuchet MS" pitchFamily="34" charset="-120"/>
+              </a:rPr>
+              <a:t>n</a:t>
+            </a:r>
+            <a:endParaRPr lang="en-US" sz="900" dirty="0"/>
+          </a:p>
+        </p:txBody>
+      </p:sp>
+      <p:sp>
+        <p:nvSpPr>
+          <p:cNvPr id="62" name="Shape 60"/>
+          <p:cNvSpPr/>
+          <p:nvPr/>
+        </p:nvSpPr>
+        <p:spPr>
+          <a:xfrm>
+            <a:off x="7396793" y="4169664"/>
+            <a:ext cx="493776" cy="475488"/>
+          </a:xfrm>
+          <a:prstGeom prst="rect">
+            <a:avLst>
+              <a:gd name="adj" fmla="val 7692"/>
+            </a:avLst>
+          </a:prstGeom>
+          <a:solidFill>
+            <a:srgbClr val="FFFFFF"/>
+          </a:solidFill>
+          <a:ln w="12700">
+            <a:solidFill>
+              <a:srgbClr val="DB2777"/>
+            </a:solidFill>
+            <a:prstDash val="solid"/>
+          </a:ln>
+        </p:spPr>
+      </p:sp>
+      <p:sp>
+        <p:nvSpPr>
+          <p:cNvPr id="63" name="Text 61"/>
+          <p:cNvSpPr/>
+          <p:nvPr/>
+        </p:nvSpPr>
+        <p:spPr>
+          <a:xfrm>
+            <a:off x="7396793" y="4169664"/>
+            <a:ext cx="493776" cy="475488"/>
+          </a:xfrm>
+          <a:prstGeom prst="rect">
+            <a:avLst/>
+          </a:prstGeom>
+          <a:noFill/>
+          <a:ln/>
+        </p:spPr>
+        <p:txBody>
+          <a:bodyPr wrap="square" lIns="0" tIns="0" rIns="0" bIns="0" rtlCol="0" anchor="ctr"/>
+          <a:lstStyle/>
+          <a:p>
+            <a:pPr algn="ctr" indent="0" marL="0">
+              <a:buNone/>
+            </a:pPr>
+            <a:r>
+              <a:rPr lang="en-US" sz="900" b="1" dirty="0">
+                <a:solidFill>
+                  <a:srgbClr val="9D174D"/>
+                </a:solidFill>
+                <a:latin typeface="Trebuchet MS" pitchFamily="34" charset="0"/>
+                <a:ea typeface="Trebuchet MS" pitchFamily="34" charset="-122"/>
+                <a:cs typeface="Trebuchet MS" pitchFamily="34" charset="-120"/>
+              </a:rPr>
               <a:t>t</a:t>
             </a:r>
             <a:endParaRPr lang="en-US" sz="900" dirty="0"/>
@@ -35180,40 +35602,67 @@
       </p:sp>
       <p:sp>
         <p:nvSpPr>
-          <p:cNvPr id="52" name="Text 50"/>
-          <p:cNvSpPr/>
-          <p:nvPr/>
-        </p:nvSpPr>
-        <p:spPr>
-          <a:xfrm>
-            <a:off x="7677912" y="4572000"/>
-            <a:ext cx="685800" cy="219456"/>
-          </a:xfrm>
-          <a:prstGeom prst="rect">
-            <a:avLst/>
-          </a:prstGeom>
-          <a:noFill/>
-          <a:ln/>
-        </p:spPr>
-        <p:txBody>
-          <a:bodyPr wrap="square" lIns="0" tIns="0" rIns="0" bIns="0" rtlCol="0" anchor="t"/>
-          <a:lstStyle/>
-          <a:p>
-            <a:pPr algn="ctr" indent="0" marL="0">
-              <a:buNone/>
-            </a:pPr>
-            <a:r>
-              <a:rPr lang="en-US" sz="750" i="1" dirty="0">
-                <a:solidFill>
-                  <a:srgbClr val="94A3B8"/>
-                </a:solidFill>
-                <a:latin typeface="Calibri" pitchFamily="34" charset="0"/>
-                <a:ea typeface="Calibri" pitchFamily="34" charset="-122"/>
-                <a:cs typeface="Calibri" pitchFamily="34" charset="-120"/>
-              </a:rPr>
-              <a:t>/t/</a:t>
-            </a:r>
-            <a:endParaRPr lang="en-US" sz="750" dirty="0"/>
+          <p:cNvPr id="64" name="Shape 62"/>
+          <p:cNvSpPr/>
+          <p:nvPr/>
+        </p:nvSpPr>
+        <p:spPr>
+          <a:xfrm>
+            <a:off x="7941212" y="4169664"/>
+            <a:ext cx="493776" cy="475488"/>
+          </a:xfrm>
+          <a:prstGeom prst="rect">
+            <a:avLst>
+              <a:gd name="adj" fmla="val 7692"/>
+            </a:avLst>
+          </a:prstGeom>
+          <a:solidFill>
+            <a:srgbClr val="FFFFFF"/>
+          </a:solidFill>
+          <a:ln w="12700">
+            <a:solidFill>
+              <a:srgbClr val="DB2777"/>
+            </a:solidFill>
+            <a:prstDash val="solid"/>
+          </a:ln>
+        </p:spPr>
+      </p:sp>
+      <p:sp>
+        <p:nvSpPr>
+          <p:cNvPr id="65" name="Text 63"/>
+          <p:cNvSpPr/>
+          <p:nvPr/>
+        </p:nvSpPr>
+        <p:spPr>
+          <a:xfrm>
+            <a:off x="7941212" y="4169664"/>
+            <a:ext cx="493776" cy="475488"/>
+          </a:xfrm>
+          <a:prstGeom prst="rect">
+            <a:avLst/>
+          </a:prstGeom>
+          <a:noFill/>
+          <a:ln/>
+        </p:spPr>
+        <p:txBody>
+          <a:bodyPr wrap="square" lIns="0" tIns="0" rIns="0" bIns="0" rtlCol="0" anchor="ctr"/>
+          <a:lstStyle/>
+          <a:p>
+            <a:pPr algn="ctr" indent="0" marL="0">
+              <a:buNone/>
+            </a:pPr>
+            <a:r>
+              <a:rPr lang="en-US" sz="900" b="1" dirty="0">
+                <a:solidFill>
+                  <a:srgbClr val="9D174D"/>
+                </a:solidFill>
+                <a:latin typeface="Trebuchet MS" pitchFamily="34" charset="0"/>
+                <a:ea typeface="Trebuchet MS" pitchFamily="34" charset="-122"/>
+                <a:cs typeface="Trebuchet MS" pitchFamily="34" charset="-120"/>
+              </a:rPr>
+              <a:t>s</a:t>
+            </a:r>
+            <a:endParaRPr lang="en-US" sz="900" dirty="0"/>
           </a:p>
         </p:txBody>
       </p:sp>
@@ -35503,7 +35952,7 @@
                 <a:ea typeface="Calibri" pitchFamily="34" charset="-122"/>
                 <a:cs typeface="Calibri" pitchFamily="34" charset="-120"/>
               </a:rPr>
-              <a:t>Word Labs  •  wordlabs.app  •  Root: 'develop' = to grow or build up</a:t>
+              <a:t>Word Labs  •  wordlabs.app  •  Root: 'develop' = to grow or unfold gradually</a:t>
             </a:r>
             <a:endParaRPr lang="en-US" sz="800" dirty="0"/>
           </a:p>
@@ -36672,7 +37121,7 @@
                 <a:ea typeface="Calibri" pitchFamily="34" charset="-122"/>
                 <a:cs typeface="Calibri" pitchFamily="34" charset="-120"/>
               </a:rPr>
-              <a:t>Word Labs  •  wordlabs.app  •  Root: 'develop' = to grow or build up</a:t>
+              <a:t>Word Labs  •  wordlabs.app  •  Root: 'develop' = to grow or unfold gradually</a:t>
             </a:r>
             <a:endParaRPr lang="en-US" sz="800" dirty="0"/>
           </a:p>
@@ -37101,7 +37550,7 @@
                 <a:ea typeface="Trebuchet MS" pitchFamily="34" charset="-122"/>
                 <a:cs typeface="Trebuchet MS" pitchFamily="34" charset="-120"/>
               </a:rPr>
-              <a:t>-ment</a:t>
+              <a:t>-ed</a:t>
             </a:r>
             <a:endParaRPr lang="en-US" sz="1300" dirty="0"/>
           </a:p>
@@ -37254,7 +37703,7 @@
                 <a:ea typeface="Trebuchet MS" pitchFamily="34" charset="-122"/>
                 <a:cs typeface="Trebuchet MS" pitchFamily="34" charset="-120"/>
               </a:rPr>
-              <a:t>-er</a:t>
+              <a:t>-ing</a:t>
             </a:r>
             <a:endParaRPr lang="en-US" sz="1300" dirty="0"/>
           </a:p>
@@ -37407,7 +37856,7 @@
                 <a:ea typeface="Trebuchet MS" pitchFamily="34" charset="-122"/>
                 <a:cs typeface="Trebuchet MS" pitchFamily="34" charset="-120"/>
               </a:rPr>
-              <a:t>-ing</a:t>
+              <a:t>-er</a:t>
             </a:r>
             <a:endParaRPr lang="en-US" sz="1300" dirty="0"/>
           </a:p>
@@ -37471,7 +37920,7 @@
                 <a:ea typeface="Trebuchet MS" pitchFamily="34" charset="-122"/>
                 <a:cs typeface="Trebuchet MS" pitchFamily="34" charset="-120"/>
               </a:rPr>
-              <a:t>under-</a:t>
+              <a:t>pre-</a:t>
             </a:r>
             <a:endParaRPr lang="en-US" sz="1300" dirty="0"/>
           </a:p>
@@ -37560,7 +38009,7 @@
                 <a:ea typeface="Trebuchet MS" pitchFamily="34" charset="-122"/>
                 <a:cs typeface="Trebuchet MS" pitchFamily="34" charset="-120"/>
               </a:rPr>
-              <a:t>-ed</a:t>
+              <a:t>-ment</a:t>
             </a:r>
             <a:endParaRPr lang="en-US" sz="1300" dirty="0"/>
           </a:p>
@@ -37624,7 +38073,7 @@
                 <a:ea typeface="Trebuchet MS" pitchFamily="34" charset="-122"/>
                 <a:cs typeface="Trebuchet MS" pitchFamily="34" charset="-120"/>
               </a:rPr>
-              <a:t>pre-</a:t>
+              <a:t>co-</a:t>
             </a:r>
             <a:endParaRPr lang="en-US" sz="1300" dirty="0"/>
           </a:p>
@@ -37713,7 +38162,7 @@
                 <a:ea typeface="Trebuchet MS" pitchFamily="34" charset="-122"/>
                 <a:cs typeface="Trebuchet MS" pitchFamily="34" charset="-120"/>
               </a:rPr>
-              <a:t>-al</a:t>
+              <a:t>-ments</a:t>
             </a:r>
             <a:endParaRPr lang="en-US" sz="1300" dirty="0"/>
           </a:p>
@@ -37884,7 +38333,7 @@
                 <a:ea typeface="Trebuchet MS" pitchFamily="34" charset="-122"/>
                 <a:cs typeface="Trebuchet MS" pitchFamily="34" charset="-120"/>
               </a:rPr>
-              <a:t>development</a:t>
+              <a:t>developed</a:t>
             </a:r>
             <a:endParaRPr lang="en-US" sz="1200" dirty="0"/>
           </a:p>
@@ -37950,7 +38399,7 @@
                 <a:ea typeface="Trebuchet MS" pitchFamily="34" charset="-122"/>
                 <a:cs typeface="Trebuchet MS" pitchFamily="34" charset="-120"/>
               </a:rPr>
-              <a:t>developer</a:t>
+              <a:t>developing</a:t>
             </a:r>
             <a:endParaRPr lang="en-US" sz="1200" dirty="0"/>
           </a:p>
@@ -38016,7 +38465,7 @@
                 <a:ea typeface="Trebuchet MS" pitchFamily="34" charset="-122"/>
                 <a:cs typeface="Trebuchet MS" pitchFamily="34" charset="-120"/>
               </a:rPr>
-              <a:t>developing</a:t>
+              <a:t>developer</a:t>
             </a:r>
             <a:endParaRPr lang="en-US" sz="1200" dirty="0"/>
           </a:p>
@@ -38082,7 +38531,7 @@
                 <a:ea typeface="Trebuchet MS" pitchFamily="34" charset="-122"/>
                 <a:cs typeface="Trebuchet MS" pitchFamily="34" charset="-120"/>
               </a:rPr>
-              <a:t>developed</a:t>
+              <a:t>development</a:t>
             </a:r>
             <a:endParaRPr lang="en-US" sz="1200" dirty="0"/>
           </a:p>
@@ -38148,7 +38597,7 @@
                 <a:ea typeface="Trebuchet MS" pitchFamily="34" charset="-122"/>
                 <a:cs typeface="Trebuchet MS" pitchFamily="34" charset="-120"/>
               </a:rPr>
-              <a:t>redevelop</a:t>
+              <a:t>developments</a:t>
             </a:r>
             <a:endParaRPr lang="en-US" sz="1200" dirty="0"/>
           </a:p>
@@ -38214,7 +38663,7 @@
                 <a:ea typeface="Trebuchet MS" pitchFamily="34" charset="-122"/>
                 <a:cs typeface="Trebuchet MS" pitchFamily="34" charset="-120"/>
               </a:rPr>
-              <a:t>underdeveloped</a:t>
+              <a:t>redevelop</a:t>
             </a:r>
             <a:endParaRPr lang="en-US" sz="1200" dirty="0"/>
           </a:p>
@@ -38280,7 +38729,7 @@
                 <a:ea typeface="Trebuchet MS" pitchFamily="34" charset="-122"/>
                 <a:cs typeface="Trebuchet MS" pitchFamily="34" charset="-120"/>
               </a:rPr>
-              <a:t>overdeveloped</a:t>
+              <a:t>underdeveloped</a:t>
             </a:r>
             <a:endParaRPr lang="en-US" sz="1200" dirty="0"/>
           </a:p>
@@ -38572,7 +39021,7 @@
                 <a:ea typeface="Calibri" pitchFamily="34" charset="-122"/>
                 <a:cs typeface="Calibri" pitchFamily="34" charset="-120"/>
               </a:rPr>
-              <a:t>Word Labs  •  wordlabs.app  •  Root: 'develop' = to grow or build up</a:t>
+              <a:t>Word Labs  •  wordlabs.app  •  Root: 'develop' = to grow or unfold gradually</a:t>
             </a:r>
             <a:endParaRPr lang="en-US" sz="800" dirty="0"/>
           </a:p>
@@ -38736,7 +39185,7 @@
                 <a:ea typeface="Calibri" pitchFamily="34" charset="-122"/>
                 <a:cs typeface="Calibri" pitchFamily="34" charset="-120"/>
               </a:rPr>
-              <a:t>The core part of a word carrying its basic meaning. For example, 'develop' means 'to grow or build up'.</a:t>
+              <a:t>The core part of a word carrying its basic meaning. For example, 'develop' means 'to grow or unfold gradually'.</a:t>
             </a:r>
             <a:endParaRPr lang="en-US" sz="1350" dirty="0"/>
           </a:p>
@@ -39356,7 +39805,7 @@
                 <a:ea typeface="Calibri" pitchFamily="34" charset="-122"/>
                 <a:cs typeface="Calibri" pitchFamily="34" charset="-120"/>
               </a:rPr>
-              <a:t>Word Labs  •  wordlabs.app  •  Root: 'develop' = to grow or build up</a:t>
+              <a:t>Word Labs  •  wordlabs.app  •  Root: 'develop' = to grow or unfold gradually</a:t>
             </a:r>
             <a:endParaRPr lang="en-US" sz="800" dirty="0"/>
           </a:p>
@@ -39468,7 +39917,7 @@
                 <a:ea typeface="Calibri" pitchFamily="34" charset="-122"/>
                 <a:cs typeface="Calibri" pitchFamily="34" charset="-120"/>
               </a:rPr>
-              <a:t>1.  The word 'development' contains the root 'develop' plus the suffix '-ment'.</a:t>
+              <a:t>1.  Adding the suffix '-ment' to 'develop' makes the noun 'development'.</a:t>
             </a:r>
             <a:endParaRPr lang="en-US" sz="1300" dirty="0"/>
           </a:p>
@@ -39607,7 +40056,7 @@
                 <a:ea typeface="Calibri" pitchFamily="34" charset="-122"/>
                 <a:cs typeface="Calibri" pitchFamily="34" charset="-120"/>
               </a:rPr>
-              <a:t>2.  The root 'develop' comes originally from Latin.</a:t>
+              <a:t>2.  The root 'develop' means to destroy or break down.</a:t>
             </a:r>
             <a:endParaRPr lang="en-US" sz="1300" dirty="0"/>
           </a:p>
@@ -39746,7 +40195,7 @@
                 <a:ea typeface="Calibri" pitchFamily="34" charset="-122"/>
                 <a:cs typeface="Calibri" pitchFamily="34" charset="-120"/>
               </a:rPr>
-              <a:t>3.  A 'developer' is someone who develops or builds something.</a:t>
+              <a:t>3.  'Redevelop' means to develop something again.</a:t>
             </a:r>
             <a:endParaRPr lang="en-US" sz="1300" dirty="0"/>
           </a:p>
@@ -39885,7 +40334,7 @@
                 <a:ea typeface="Calibri" pitchFamily="34" charset="-122"/>
                 <a:cs typeface="Calibri" pitchFamily="34" charset="-120"/>
               </a:rPr>
-              <a:t>4.  The prefix 're-' in 'redevelop' means to do something again.</a:t>
+              <a:t>4.  The word 'developer' contains the root 'develop'.</a:t>
             </a:r>
             <a:endParaRPr lang="en-US" sz="1300" dirty="0"/>
           </a:p>
@@ -40024,7 +40473,7 @@
                 <a:ea typeface="Calibri" pitchFamily="34" charset="-122"/>
                 <a:cs typeface="Calibri" pitchFamily="34" charset="-120"/>
               </a:rPr>
-              <a:t>5.  'Underdeveloped' means something has been built up too much.</a:t>
+              <a:t>5.  The root 'develop' comes from the Greek word for water.</a:t>
             </a:r>
             <a:endParaRPr lang="en-US" sz="1300" dirty="0"/>
           </a:p>
@@ -40382,7 +40831,7 @@
                 <a:ea typeface="Calibri" pitchFamily="34" charset="-122"/>
                 <a:cs typeface="Calibri" pitchFamily="34" charset="-120"/>
               </a:rPr>
-              <a:t>Word Labs  •  wordlabs.app  •  Root: 'develop' = to grow or build up</a:t>
+              <a:t>Word Labs  •  wordlabs.app  •  Root: 'develop' = to grow or unfold gradually</a:t>
             </a:r>
             <a:endParaRPr lang="en-US" sz="800" dirty="0"/>
           </a:p>
@@ -40519,7 +40968,7 @@
                 <a:ea typeface="Trebuchet MS" pitchFamily="34" charset="-122"/>
                 <a:cs typeface="Trebuchet MS" pitchFamily="34" charset="-120"/>
               </a:rPr>
-              <a:t>to grow or build up</a:t>
+              <a:t>to grow or unfold gradually</a:t>
             </a:r>
             <a:endParaRPr lang="en-US" sz="2000" dirty="0"/>
           </a:p>
@@ -40558,7 +41007,7 @@
                 <a:ea typeface="Calibri" pitchFamily="34" charset="-122"/>
                 <a:cs typeface="Calibri" pitchFamily="34" charset="-120"/>
               </a:rPr>
-              <a:t>Origin: French: développer</a:t>
+              <a:t>Origin: Latin: de + volvere</a:t>
             </a:r>
             <a:endParaRPr lang="en-US" sz="1100" dirty="0"/>
           </a:p>
@@ -40729,7 +41178,7 @@
                 <a:ea typeface="Trebuchet MS" pitchFamily="34" charset="-122"/>
                 <a:cs typeface="Trebuchet MS" pitchFamily="34" charset="-120"/>
               </a:rPr>
-              <a:t>development</a:t>
+              <a:t>developed</a:t>
             </a:r>
             <a:endParaRPr lang="en-US" sz="1300" dirty="0"/>
           </a:p>
@@ -40795,7 +41244,7 @@
                 <a:ea typeface="Trebuchet MS" pitchFamily="34" charset="-122"/>
                 <a:cs typeface="Trebuchet MS" pitchFamily="34" charset="-120"/>
               </a:rPr>
-              <a:t>developer</a:t>
+              <a:t>developing</a:t>
             </a:r>
             <a:endParaRPr lang="en-US" sz="1300" dirty="0"/>
           </a:p>
@@ -40861,7 +41310,7 @@
                 <a:ea typeface="Trebuchet MS" pitchFamily="34" charset="-122"/>
                 <a:cs typeface="Trebuchet MS" pitchFamily="34" charset="-120"/>
               </a:rPr>
-              <a:t>developing</a:t>
+              <a:t>developer</a:t>
             </a:r>
             <a:endParaRPr lang="en-US" sz="1300" dirty="0"/>
           </a:p>
@@ -40927,7 +41376,7 @@
                 <a:ea typeface="Trebuchet MS" pitchFamily="34" charset="-122"/>
                 <a:cs typeface="Trebuchet MS" pitchFamily="34" charset="-120"/>
               </a:rPr>
-              <a:t>developed</a:t>
+              <a:t>development</a:t>
             </a:r>
             <a:endParaRPr lang="en-US" sz="1300" dirty="0"/>
           </a:p>
@@ -40993,7 +41442,7 @@
                 <a:ea typeface="Trebuchet MS" pitchFamily="34" charset="-122"/>
                 <a:cs typeface="Trebuchet MS" pitchFamily="34" charset="-120"/>
               </a:rPr>
-              <a:t>redevelop</a:t>
+              <a:t>developments</a:t>
             </a:r>
             <a:endParaRPr lang="en-US" sz="1300" dirty="0"/>
           </a:p>
@@ -41059,7 +41508,7 @@
                 <a:ea typeface="Trebuchet MS" pitchFamily="34" charset="-122"/>
                 <a:cs typeface="Trebuchet MS" pitchFamily="34" charset="-120"/>
               </a:rPr>
-              <a:t>underdeveloped</a:t>
+              <a:t>redevelop</a:t>
             </a:r>
             <a:endParaRPr lang="en-US" sz="1300" dirty="0"/>
           </a:p>
@@ -41351,7 +41800,7 @@
                 <a:ea typeface="Calibri" pitchFamily="34" charset="-122"/>
                 <a:cs typeface="Calibri" pitchFamily="34" charset="-120"/>
               </a:rPr>
-              <a:t>Word Labs  •  wordlabs.app  •  Root: 'develop' = to grow or build up</a:t>
+              <a:t>Word Labs  •  wordlabs.app  •  Root: 'develop' = to grow or unfold gradually</a:t>
             </a:r>
             <a:endParaRPr lang="en-US" sz="800" dirty="0"/>
           </a:p>
@@ -41780,7 +42229,7 @@
                 <a:ea typeface="Trebuchet MS" pitchFamily="34" charset="-122"/>
                 <a:cs typeface="Trebuchet MS" pitchFamily="34" charset="-120"/>
               </a:rPr>
-              <a:t>-ment</a:t>
+              <a:t>-ed</a:t>
             </a:r>
             <a:endParaRPr lang="en-US" sz="1300" dirty="0"/>
           </a:p>
@@ -41933,7 +42382,7 @@
                 <a:ea typeface="Trebuchet MS" pitchFamily="34" charset="-122"/>
                 <a:cs typeface="Trebuchet MS" pitchFamily="34" charset="-120"/>
               </a:rPr>
-              <a:t>-er</a:t>
+              <a:t>-ing</a:t>
             </a:r>
             <a:endParaRPr lang="en-US" sz="1300" dirty="0"/>
           </a:p>
@@ -42086,7 +42535,7 @@
                 <a:ea typeface="Trebuchet MS" pitchFamily="34" charset="-122"/>
                 <a:cs typeface="Trebuchet MS" pitchFamily="34" charset="-120"/>
               </a:rPr>
-              <a:t>-ing</a:t>
+              <a:t>-er</a:t>
             </a:r>
             <a:endParaRPr lang="en-US" sz="1300" dirty="0"/>
           </a:p>
@@ -42150,7 +42599,7 @@
                 <a:ea typeface="Trebuchet MS" pitchFamily="34" charset="-122"/>
                 <a:cs typeface="Trebuchet MS" pitchFamily="34" charset="-120"/>
               </a:rPr>
-              <a:t>under-</a:t>
+              <a:t>pre-</a:t>
             </a:r>
             <a:endParaRPr lang="en-US" sz="1300" dirty="0"/>
           </a:p>
@@ -42239,7 +42688,7 @@
                 <a:ea typeface="Trebuchet MS" pitchFamily="34" charset="-122"/>
                 <a:cs typeface="Trebuchet MS" pitchFamily="34" charset="-120"/>
               </a:rPr>
-              <a:t>-ed</a:t>
+              <a:t>-ment</a:t>
             </a:r>
             <a:endParaRPr lang="en-US" sz="1300" dirty="0"/>
           </a:p>
@@ -42303,7 +42752,7 @@
                 <a:ea typeface="Trebuchet MS" pitchFamily="34" charset="-122"/>
                 <a:cs typeface="Trebuchet MS" pitchFamily="34" charset="-120"/>
               </a:rPr>
-              <a:t>pre-</a:t>
+              <a:t>co-</a:t>
             </a:r>
             <a:endParaRPr lang="en-US" sz="1300" dirty="0"/>
           </a:p>
@@ -42392,7 +42841,7 @@
                 <a:ea typeface="Trebuchet MS" pitchFamily="34" charset="-122"/>
                 <a:cs typeface="Trebuchet MS" pitchFamily="34" charset="-120"/>
               </a:rPr>
-              <a:t>-al</a:t>
+              <a:t>-ments</a:t>
             </a:r>
             <a:endParaRPr lang="en-US" sz="1300" dirty="0"/>
           </a:p>
@@ -42670,7 +43119,7 @@
         <p:spPr>
           <a:xfrm>
             <a:off x="4764024" y="4178808"/>
-            <a:ext cx="1097280" cy="420624"/>
+            <a:ext cx="822960" cy="420624"/>
           </a:xfrm>
           <a:prstGeom prst="rect">
             <a:avLst>
@@ -42704,7 +43153,7 @@
         <p:spPr>
           <a:xfrm>
             <a:off x="4764024" y="4178808"/>
-            <a:ext cx="1097280" cy="420624"/>
+            <a:ext cx="822960" cy="420624"/>
           </a:xfrm>
           <a:prstGeom prst="rect">
             <a:avLst/>
@@ -42728,7 +43177,7 @@
                 <a:ea typeface="Trebuchet MS" pitchFamily="34" charset="-122"/>
                 <a:cs typeface="Trebuchet MS" pitchFamily="34" charset="-120"/>
               </a:rPr>
-              <a:t>-ment</a:t>
+              <a:t>-ed</a:t>
             </a:r>
             <a:endParaRPr lang="en-US" sz="1300" dirty="0"/>
           </a:p>
@@ -42742,7 +43191,7 @@
         </p:nvSpPr>
         <p:spPr>
           <a:xfrm>
-            <a:off x="5934456" y="4178808"/>
+            <a:off x="5660136" y="4178808"/>
             <a:ext cx="365760" cy="420624"/>
           </a:xfrm>
           <a:prstGeom prst="rect">
@@ -42781,7 +43230,7 @@
         </p:nvSpPr>
         <p:spPr>
           <a:xfrm>
-            <a:off x="6345936" y="4178808"/>
+            <a:off x="6071616" y="4178808"/>
             <a:ext cx="2194560" cy="420624"/>
           </a:xfrm>
           <a:prstGeom prst="rect">
@@ -42808,7 +43257,7 @@
         </p:nvSpPr>
         <p:spPr>
           <a:xfrm>
-            <a:off x="6345936" y="4178808"/>
+            <a:off x="6071616" y="4178808"/>
             <a:ext cx="2194560" cy="420624"/>
           </a:xfrm>
           <a:prstGeom prst="rect">
@@ -43125,7 +43574,7 @@
                 <a:ea typeface="Calibri" pitchFamily="34" charset="-122"/>
                 <a:cs typeface="Calibri" pitchFamily="34" charset="-120"/>
               </a:rPr>
-              <a:t>Word Labs  •  wordlabs.app  •  Root: 'develop' = to grow or build up</a:t>
+              <a:t>Word Labs  •  wordlabs.app  •  Root: 'develop' = to grow or unfold gradually</a:t>
             </a:r>
             <a:endParaRPr lang="en-US" sz="800" dirty="0"/>
           </a:p>
@@ -43303,7 +43752,7 @@
                 <a:ea typeface="Calibri" pitchFamily="34" charset="-122"/>
                 <a:cs typeface="Calibri" pitchFamily="34" charset="-120"/>
               </a:rPr>
-              <a:t>Having already grown or been built up fully.</a:t>
+              <a:t>The process of growing, changing, or improving over time.</a:t>
             </a:r>
             <a:endParaRPr lang="en-US" sz="1200" dirty="0"/>
           </a:p>
@@ -43376,7 +43825,7 @@
                 <a:ea typeface="Trebuchet MS" pitchFamily="34" charset="-122"/>
                 <a:cs typeface="Trebuchet MS" pitchFamily="34" charset="-120"/>
               </a:rPr>
-              <a:t>development</a:t>
+              <a:t>developed</a:t>
             </a:r>
             <a:endParaRPr lang="en-US" sz="1200" dirty="0"/>
           </a:p>
@@ -43442,7 +43891,7 @@
                 <a:ea typeface="Calibri" pitchFamily="34" charset="-122"/>
                 <a:cs typeface="Calibri" pitchFamily="34" charset="-120"/>
               </a:rPr>
-              <a:t>Not grown or built up as much as it should be.</a:t>
+              <a:t>To build or improve something again that was already there.</a:t>
             </a:r>
             <a:endParaRPr lang="en-US" sz="1200" dirty="0"/>
           </a:p>
@@ -43515,7 +43964,7 @@
                 <a:ea typeface="Trebuchet MS" pitchFamily="34" charset="-122"/>
                 <a:cs typeface="Trebuchet MS" pitchFamily="34" charset="-120"/>
               </a:rPr>
-              <a:t>developer</a:t>
+              <a:t>developing</a:t>
             </a:r>
             <a:endParaRPr lang="en-US" sz="1200" dirty="0"/>
           </a:p>
@@ -43581,7 +44030,7 @@
                 <a:ea typeface="Calibri" pitchFamily="34" charset="-122"/>
                 <a:cs typeface="Calibri" pitchFamily="34" charset="-120"/>
               </a:rPr>
-              <a:t>To grow, improve, or build something over time.</a:t>
+              <a:t>To grow or change into something more complete over time.</a:t>
             </a:r>
             <a:endParaRPr lang="en-US" sz="1200" dirty="0"/>
           </a:p>
@@ -43654,7 +44103,7 @@
                 <a:ea typeface="Trebuchet MS" pitchFamily="34" charset="-122"/>
                 <a:cs typeface="Trebuchet MS" pitchFamily="34" charset="-120"/>
               </a:rPr>
-              <a:t>developing</a:t>
+              <a:t>developer</a:t>
             </a:r>
             <a:endParaRPr lang="en-US" sz="1200" dirty="0"/>
           </a:p>
@@ -43720,7 +44169,7 @@
                 <a:ea typeface="Calibri" pitchFamily="34" charset="-122"/>
                 <a:cs typeface="Calibri" pitchFamily="34" charset="-120"/>
               </a:rPr>
-              <a:t>To build or improve something again that was there before.</a:t>
+              <a:t>More than one change or improvement that has happened.</a:t>
             </a:r>
             <a:endParaRPr lang="en-US" sz="1200" dirty="0"/>
           </a:p>
@@ -43793,7 +44242,7 @@
                 <a:ea typeface="Trebuchet MS" pitchFamily="34" charset="-122"/>
                 <a:cs typeface="Trebuchet MS" pitchFamily="34" charset="-120"/>
               </a:rPr>
-              <a:t>developed</a:t>
+              <a:t>development</a:t>
             </a:r>
             <a:endParaRPr lang="en-US" sz="1200" dirty="0"/>
           </a:p>
@@ -43859,7 +44308,7 @@
                 <a:ea typeface="Calibri" pitchFamily="34" charset="-122"/>
                 <a:cs typeface="Calibri" pitchFamily="34" charset="-120"/>
               </a:rPr>
-              <a:t>A person or company that builds or creates something new.</a:t>
+              <a:t>In the process of growing or becoming more advanced right now.</a:t>
             </a:r>
             <a:endParaRPr lang="en-US" sz="1200" dirty="0"/>
           </a:p>
@@ -43932,7 +44381,7 @@
                 <a:ea typeface="Trebuchet MS" pitchFamily="34" charset="-122"/>
                 <a:cs typeface="Trebuchet MS" pitchFamily="34" charset="-120"/>
               </a:rPr>
-              <a:t>redevelop</a:t>
+              <a:t>developments</a:t>
             </a:r>
             <a:endParaRPr lang="en-US" sz="1200" dirty="0"/>
           </a:p>
@@ -43998,7 +44447,7 @@
                 <a:ea typeface="Calibri" pitchFamily="34" charset="-122"/>
                 <a:cs typeface="Calibri" pitchFamily="34" charset="-120"/>
               </a:rPr>
-              <a:t>In the process of growing or changing to become better.</a:t>
+              <a:t>A person or company that creates or builds something new.</a:t>
             </a:r>
             <a:endParaRPr lang="en-US" sz="1200" dirty="0"/>
           </a:p>
@@ -44071,7 +44520,7 @@
                 <a:ea typeface="Trebuchet MS" pitchFamily="34" charset="-122"/>
                 <a:cs typeface="Trebuchet MS" pitchFamily="34" charset="-120"/>
               </a:rPr>
-              <a:t>underdeveloped</a:t>
+              <a:t>redevelop</a:t>
             </a:r>
             <a:endParaRPr lang="en-US" sz="1200" dirty="0"/>
           </a:p>
@@ -44137,7 +44586,7 @@
                 <a:ea typeface="Calibri" pitchFamily="34" charset="-122"/>
                 <a:cs typeface="Calibri" pitchFamily="34" charset="-120"/>
               </a:rPr>
-              <a:t>The process of growing or making something better.</a:t>
+              <a:t>Something that has already grown or been made more complete.</a:t>
             </a:r>
             <a:endParaRPr lang="en-US" sz="1200" dirty="0"/>
           </a:p>
@@ -44429,7 +44878,7 @@
                 <a:ea typeface="Calibri" pitchFamily="34" charset="-122"/>
                 <a:cs typeface="Calibri" pitchFamily="34" charset="-120"/>
               </a:rPr>
-              <a:t>Word Labs  •  wordlabs.app  •  Root: 'develop' = to grow or build up</a:t>
+              <a:t>Word Labs  •  wordlabs.app  •  Root: 'develop' = to grow or unfold gradually</a:t>
             </a:r>
             <a:endParaRPr lang="en-US" sz="800" dirty="0"/>
           </a:p>
@@ -44632,7 +45081,7 @@
                 <a:ea typeface="Calibri" pitchFamily="34" charset="-122"/>
                 <a:cs typeface="Calibri" pitchFamily="34" charset="-120"/>
               </a:rPr>
-              <a:t>Scientists are working hard to develop a new medicine that will help sick children.</a:t>
+              <a:t>Scientists are working hard to develop a new medicine that could help thousands of people.</a:t>
             </a:r>
             <a:endParaRPr lang="en-US" sz="1500" dirty="0"/>
           </a:p>
@@ -44796,7 +45245,7 @@
                 <a:ea typeface="Calibri" pitchFamily="34" charset="-122"/>
                 <a:cs typeface="Calibri" pitchFamily="34" charset="-120"/>
               </a:rPr>
-              <a:t>The development of our school garden has been a wonderful project for everyone in Year 5.</a:t>
+              <a:t>The development of the new community park took two years to complete.</a:t>
             </a:r>
             <a:endParaRPr lang="en-US" sz="1500" dirty="0"/>
           </a:p>
@@ -44960,7 +45409,7 @@
                 <a:ea typeface="Calibri" pitchFamily="34" charset="-122"/>
                 <a:cs typeface="Calibri" pitchFamily="34" charset="-120"/>
               </a:rPr>
-              <a:t>Over time, the tiny caterpillar will develop into a beautiful butterfly.</a:t>
+              <a:t>Our class watched a caterpillar develop into a beautiful butterfly over several weeks.</a:t>
             </a:r>
             <a:endParaRPr lang="en-US" sz="1500" dirty="0"/>
           </a:p>
